--- a/public/fun/pack/pptx/review/보장점검양식_01_본인점검_외갓집매화.pptx
+++ b/public/fun/pack/pptx/review/보장점검양식_01_본인점검_외갓집매화.pptx
@@ -3347,7 +3347,7 @@
             <a:r>
               <a:rPr sz="3600" b="1" i="0">
                 <a:solidFill>
-                  <a:srgbClr val="742F4C"/>
+                  <a:srgbClr val="6F1F41"/>
                 </a:solidFill>
               </a:rPr>
               <a:t>우리 보험 점검 시간</a:t>
@@ -3385,7 +3385,7 @@
             <a:r>
               <a:rPr sz="1700" b="0" i="1">
                 <a:solidFill>
-                  <a:srgbClr val="742F4C"/>
+                  <a:srgbClr val="6F1F41"/>
                 </a:solidFill>
               </a:rPr>
               <a:t>가입한 보험을 한자리에 모아 봅니다</a:t>
@@ -3460,7 +3460,7 @@
     <p:bg>
       <p:bgPr>
         <a:solidFill>
-          <a:srgbClr val="F9F1F4"/>
+          <a:srgbClr val="FCF3F7"/>
         </a:solidFill>
         <a:effectLst/>
       </p:bgPr>
@@ -3487,7 +3487,7 @@
             <a:avLst/>
           </a:prstGeom>
           <a:solidFill>
-            <a:srgbClr val="B8517C"/>
+            <a:srgbClr val="CD4C82"/>
           </a:solidFill>
           <a:ln>
             <a:noFill/>
@@ -3516,7 +3516,7 @@
             <a:avLst/>
           </a:prstGeom>
           <a:solidFill>
-            <a:srgbClr val="3B9142"/>
+            <a:srgbClr val="339941"/>
           </a:solidFill>
           <a:ln>
             <a:noFill/>
@@ -3560,7 +3560,7 @@
             <a:r>
               <a:rPr sz="3000" b="1" i="0">
                 <a:solidFill>
-                  <a:srgbClr val="742F4C"/>
+                  <a:srgbClr val="6F1F41"/>
                 </a:solidFill>
               </a:rPr>
               <a:t>점검 대상 현황</a:t>
@@ -3610,30 +3610,30 @@
                   <a:tcPr anchor="ctr" marL="73152" marR="73152">
                     <a:lnL w="9525" cap="flat" cmpd="sng" algn="ctr">
                       <a:solidFill>
-                        <a:srgbClr val="B8517C"/>
+                        <a:srgbClr val="CD4C82"/>
                       </a:solidFill>
                       <a:prstDash val="solid"/>
                     </a:lnL>
                     <a:lnR w="9525" cap="flat" cmpd="sng" algn="ctr">
                       <a:solidFill>
-                        <a:srgbClr val="B8517C"/>
+                        <a:srgbClr val="CD4C82"/>
                       </a:solidFill>
                       <a:prstDash val="solid"/>
                     </a:lnR>
                     <a:lnT w="9525" cap="flat" cmpd="sng" algn="ctr">
                       <a:solidFill>
-                        <a:srgbClr val="B8517C"/>
+                        <a:srgbClr val="CD4C82"/>
                       </a:solidFill>
                       <a:prstDash val="solid"/>
                     </a:lnT>
                     <a:lnB w="9525" cap="flat" cmpd="sng" algn="ctr">
                       <a:solidFill>
-                        <a:srgbClr val="B8517C"/>
+                        <a:srgbClr val="CD4C82"/>
                       </a:solidFill>
                       <a:prstDash val="solid"/>
                     </a:lnB>
                     <a:solidFill>
-                      <a:srgbClr val="B8517C"/>
+                      <a:srgbClr val="CD4C82"/>
                     </a:solidFill>
                   </a:tcPr>
                 </a:tc>
@@ -3656,30 +3656,30 @@
                   <a:tcPr anchor="ctr" marL="73152" marR="73152">
                     <a:lnL w="9525" cap="flat" cmpd="sng" algn="ctr">
                       <a:solidFill>
-                        <a:srgbClr val="B8517C"/>
+                        <a:srgbClr val="CD4C82"/>
                       </a:solidFill>
                       <a:prstDash val="solid"/>
                     </a:lnL>
                     <a:lnR w="9525" cap="flat" cmpd="sng" algn="ctr">
                       <a:solidFill>
-                        <a:srgbClr val="B8517C"/>
+                        <a:srgbClr val="CD4C82"/>
                       </a:solidFill>
                       <a:prstDash val="solid"/>
                     </a:lnR>
                     <a:lnT w="9525" cap="flat" cmpd="sng" algn="ctr">
                       <a:solidFill>
-                        <a:srgbClr val="B8517C"/>
+                        <a:srgbClr val="CD4C82"/>
                       </a:solidFill>
                       <a:prstDash val="solid"/>
                     </a:lnT>
                     <a:lnB w="9525" cap="flat" cmpd="sng" algn="ctr">
                       <a:solidFill>
-                        <a:srgbClr val="B8517C"/>
+                        <a:srgbClr val="CD4C82"/>
                       </a:solidFill>
                       <a:prstDash val="solid"/>
                     </a:lnB>
                     <a:solidFill>
-                      <a:srgbClr val="B8517C"/>
+                      <a:srgbClr val="CD4C82"/>
                     </a:solidFill>
                   </a:tcPr>
                 </a:tc>
@@ -3694,7 +3694,7 @@
                       <a:r>
                         <a:rPr sz="1600" b="1">
                           <a:solidFill>
-                            <a:srgbClr val="742F4C"/>
+                            <a:srgbClr val="6F1F41"/>
                           </a:solidFill>
                         </a:rPr>
                         <a:t>이름</a:t>
@@ -3704,30 +3704,30 @@
                   <a:tcPr anchor="ctr" marL="73152" marR="73152">
                     <a:lnL w="9525" cap="flat" cmpd="sng" algn="ctr">
                       <a:solidFill>
-                        <a:srgbClr val="EFD2DE"/>
+                        <a:srgbClr val="F7D4E3"/>
                       </a:solidFill>
                       <a:prstDash val="solid"/>
                     </a:lnL>
                     <a:lnR w="9525" cap="flat" cmpd="sng" algn="ctr">
                       <a:solidFill>
-                        <a:srgbClr val="EFD2DE"/>
+                        <a:srgbClr val="F7D4E3"/>
                       </a:solidFill>
                       <a:prstDash val="solid"/>
                     </a:lnR>
                     <a:lnT w="9525" cap="flat" cmpd="sng" algn="ctr">
                       <a:solidFill>
-                        <a:srgbClr val="EFD2DE"/>
+                        <a:srgbClr val="F7D4E3"/>
                       </a:solidFill>
                       <a:prstDash val="solid"/>
                     </a:lnT>
                     <a:lnB w="9525" cap="flat" cmpd="sng" algn="ctr">
                       <a:solidFill>
-                        <a:srgbClr val="EFD2DE"/>
+                        <a:srgbClr val="F7D4E3"/>
                       </a:solidFill>
                       <a:prstDash val="solid"/>
                     </a:lnB>
                     <a:solidFill>
-                      <a:srgbClr val="EFD2DE"/>
+                      <a:srgbClr val="F7D4E3"/>
                     </a:solidFill>
                   </a:tcPr>
                 </a:tc>
@@ -3750,25 +3750,25 @@
                   <a:tcPr anchor="ctr" marL="73152" marR="73152">
                     <a:lnL w="9525" cap="flat" cmpd="sng" algn="ctr">
                       <a:solidFill>
-                        <a:srgbClr val="EFD2DE"/>
+                        <a:srgbClr val="F7D4E3"/>
                       </a:solidFill>
                       <a:prstDash val="solid"/>
                     </a:lnL>
                     <a:lnR w="9525" cap="flat" cmpd="sng" algn="ctr">
                       <a:solidFill>
-                        <a:srgbClr val="EFD2DE"/>
+                        <a:srgbClr val="F7D4E3"/>
                       </a:solidFill>
                       <a:prstDash val="solid"/>
                     </a:lnR>
                     <a:lnT w="9525" cap="flat" cmpd="sng" algn="ctr">
                       <a:solidFill>
-                        <a:srgbClr val="EFD2DE"/>
+                        <a:srgbClr val="F7D4E3"/>
                       </a:solidFill>
                       <a:prstDash val="solid"/>
                     </a:lnT>
                     <a:lnB w="9525" cap="flat" cmpd="sng" algn="ctr">
                       <a:solidFill>
-                        <a:srgbClr val="EFD2DE"/>
+                        <a:srgbClr val="F7D4E3"/>
                       </a:solidFill>
                       <a:prstDash val="solid"/>
                     </a:lnB>
@@ -3788,7 +3788,7 @@
                       <a:r>
                         <a:rPr sz="1600" b="1">
                           <a:solidFill>
-                            <a:srgbClr val="742F4C"/>
+                            <a:srgbClr val="6F1F41"/>
                           </a:solidFill>
                         </a:rPr>
                         <a:t>나이</a:t>
@@ -3798,30 +3798,30 @@
                   <a:tcPr anchor="ctr" marL="73152" marR="73152">
                     <a:lnL w="9525" cap="flat" cmpd="sng" algn="ctr">
                       <a:solidFill>
-                        <a:srgbClr val="EFD2DE"/>
+                        <a:srgbClr val="F7D4E3"/>
                       </a:solidFill>
                       <a:prstDash val="solid"/>
                     </a:lnL>
                     <a:lnR w="9525" cap="flat" cmpd="sng" algn="ctr">
                       <a:solidFill>
-                        <a:srgbClr val="EFD2DE"/>
+                        <a:srgbClr val="F7D4E3"/>
                       </a:solidFill>
                       <a:prstDash val="solid"/>
                     </a:lnR>
                     <a:lnT w="9525" cap="flat" cmpd="sng" algn="ctr">
                       <a:solidFill>
-                        <a:srgbClr val="EFD2DE"/>
+                        <a:srgbClr val="F7D4E3"/>
                       </a:solidFill>
                       <a:prstDash val="solid"/>
                     </a:lnT>
                     <a:lnB w="9525" cap="flat" cmpd="sng" algn="ctr">
                       <a:solidFill>
-                        <a:srgbClr val="EFD2DE"/>
+                        <a:srgbClr val="F7D4E3"/>
                       </a:solidFill>
                       <a:prstDash val="solid"/>
                     </a:lnB>
                     <a:solidFill>
-                      <a:srgbClr val="EFD2DE"/>
+                      <a:srgbClr val="F7D4E3"/>
                     </a:solidFill>
                   </a:tcPr>
                 </a:tc>
@@ -3844,30 +3844,30 @@
                   <a:tcPr anchor="ctr" marL="73152" marR="73152">
                     <a:lnL w="9525" cap="flat" cmpd="sng" algn="ctr">
                       <a:solidFill>
-                        <a:srgbClr val="EFD2DE"/>
+                        <a:srgbClr val="F7D4E3"/>
                       </a:solidFill>
                       <a:prstDash val="solid"/>
                     </a:lnL>
                     <a:lnR w="9525" cap="flat" cmpd="sng" algn="ctr">
                       <a:solidFill>
-                        <a:srgbClr val="EFD2DE"/>
+                        <a:srgbClr val="F7D4E3"/>
                       </a:solidFill>
                       <a:prstDash val="solid"/>
                     </a:lnR>
                     <a:lnT w="9525" cap="flat" cmpd="sng" algn="ctr">
                       <a:solidFill>
-                        <a:srgbClr val="EFD2DE"/>
+                        <a:srgbClr val="F7D4E3"/>
                       </a:solidFill>
                       <a:prstDash val="solid"/>
                     </a:lnT>
                     <a:lnB w="9525" cap="flat" cmpd="sng" algn="ctr">
                       <a:solidFill>
-                        <a:srgbClr val="EFD2DE"/>
+                        <a:srgbClr val="F7D4E3"/>
                       </a:solidFill>
                       <a:prstDash val="solid"/>
                     </a:lnB>
                     <a:solidFill>
-                      <a:srgbClr val="F9F1F4"/>
+                      <a:srgbClr val="FCF3F7"/>
                     </a:solidFill>
                   </a:tcPr>
                 </a:tc>
@@ -3882,7 +3882,7 @@
                       <a:r>
                         <a:rPr sz="1600" b="1">
                           <a:solidFill>
-                            <a:srgbClr val="742F4C"/>
+                            <a:srgbClr val="6F1F41"/>
                           </a:solidFill>
                         </a:rPr>
                         <a:t>직업</a:t>
@@ -3892,30 +3892,30 @@
                   <a:tcPr anchor="ctr" marL="73152" marR="73152">
                     <a:lnL w="9525" cap="flat" cmpd="sng" algn="ctr">
                       <a:solidFill>
-                        <a:srgbClr val="EFD2DE"/>
+                        <a:srgbClr val="F7D4E3"/>
                       </a:solidFill>
                       <a:prstDash val="solid"/>
                     </a:lnL>
                     <a:lnR w="9525" cap="flat" cmpd="sng" algn="ctr">
                       <a:solidFill>
-                        <a:srgbClr val="EFD2DE"/>
+                        <a:srgbClr val="F7D4E3"/>
                       </a:solidFill>
                       <a:prstDash val="solid"/>
                     </a:lnR>
                     <a:lnT w="9525" cap="flat" cmpd="sng" algn="ctr">
                       <a:solidFill>
-                        <a:srgbClr val="EFD2DE"/>
+                        <a:srgbClr val="F7D4E3"/>
                       </a:solidFill>
                       <a:prstDash val="solid"/>
                     </a:lnT>
                     <a:lnB w="9525" cap="flat" cmpd="sng" algn="ctr">
                       <a:solidFill>
-                        <a:srgbClr val="EFD2DE"/>
+                        <a:srgbClr val="F7D4E3"/>
                       </a:solidFill>
                       <a:prstDash val="solid"/>
                     </a:lnB>
                     <a:solidFill>
-                      <a:srgbClr val="EFD2DE"/>
+                      <a:srgbClr val="F7D4E3"/>
                     </a:solidFill>
                   </a:tcPr>
                 </a:tc>
@@ -3938,25 +3938,25 @@
                   <a:tcPr anchor="ctr" marL="73152" marR="73152">
                     <a:lnL w="9525" cap="flat" cmpd="sng" algn="ctr">
                       <a:solidFill>
-                        <a:srgbClr val="EFD2DE"/>
+                        <a:srgbClr val="F7D4E3"/>
                       </a:solidFill>
                       <a:prstDash val="solid"/>
                     </a:lnL>
                     <a:lnR w="9525" cap="flat" cmpd="sng" algn="ctr">
                       <a:solidFill>
-                        <a:srgbClr val="EFD2DE"/>
+                        <a:srgbClr val="F7D4E3"/>
                       </a:solidFill>
                       <a:prstDash val="solid"/>
                     </a:lnR>
                     <a:lnT w="9525" cap="flat" cmpd="sng" algn="ctr">
                       <a:solidFill>
-                        <a:srgbClr val="EFD2DE"/>
+                        <a:srgbClr val="F7D4E3"/>
                       </a:solidFill>
                       <a:prstDash val="solid"/>
                     </a:lnT>
                     <a:lnB w="9525" cap="flat" cmpd="sng" algn="ctr">
                       <a:solidFill>
-                        <a:srgbClr val="EFD2DE"/>
+                        <a:srgbClr val="F7D4E3"/>
                       </a:solidFill>
                       <a:prstDash val="solid"/>
                     </a:lnB>
@@ -3976,7 +3976,7 @@
                       <a:r>
                         <a:rPr sz="1600" b="1">
                           <a:solidFill>
-                            <a:srgbClr val="742F4C"/>
+                            <a:srgbClr val="6F1F41"/>
                           </a:solidFill>
                         </a:rPr>
                         <a:t>가족 구성</a:t>
@@ -3986,30 +3986,30 @@
                   <a:tcPr anchor="ctr" marL="73152" marR="73152">
                     <a:lnL w="9525" cap="flat" cmpd="sng" algn="ctr">
                       <a:solidFill>
-                        <a:srgbClr val="EFD2DE"/>
+                        <a:srgbClr val="F7D4E3"/>
                       </a:solidFill>
                       <a:prstDash val="solid"/>
                     </a:lnL>
                     <a:lnR w="9525" cap="flat" cmpd="sng" algn="ctr">
                       <a:solidFill>
-                        <a:srgbClr val="EFD2DE"/>
+                        <a:srgbClr val="F7D4E3"/>
                       </a:solidFill>
                       <a:prstDash val="solid"/>
                     </a:lnR>
                     <a:lnT w="9525" cap="flat" cmpd="sng" algn="ctr">
                       <a:solidFill>
-                        <a:srgbClr val="EFD2DE"/>
+                        <a:srgbClr val="F7D4E3"/>
                       </a:solidFill>
                       <a:prstDash val="solid"/>
                     </a:lnT>
                     <a:lnB w="9525" cap="flat" cmpd="sng" algn="ctr">
                       <a:solidFill>
-                        <a:srgbClr val="EFD2DE"/>
+                        <a:srgbClr val="F7D4E3"/>
                       </a:solidFill>
                       <a:prstDash val="solid"/>
                     </a:lnB>
                     <a:solidFill>
-                      <a:srgbClr val="EFD2DE"/>
+                      <a:srgbClr val="F7D4E3"/>
                     </a:solidFill>
                   </a:tcPr>
                 </a:tc>
@@ -4032,30 +4032,30 @@
                   <a:tcPr anchor="ctr" marL="73152" marR="73152">
                     <a:lnL w="9525" cap="flat" cmpd="sng" algn="ctr">
                       <a:solidFill>
-                        <a:srgbClr val="EFD2DE"/>
+                        <a:srgbClr val="F7D4E3"/>
                       </a:solidFill>
                       <a:prstDash val="solid"/>
                     </a:lnL>
                     <a:lnR w="9525" cap="flat" cmpd="sng" algn="ctr">
                       <a:solidFill>
-                        <a:srgbClr val="EFD2DE"/>
+                        <a:srgbClr val="F7D4E3"/>
                       </a:solidFill>
                       <a:prstDash val="solid"/>
                     </a:lnR>
                     <a:lnT w="9525" cap="flat" cmpd="sng" algn="ctr">
                       <a:solidFill>
-                        <a:srgbClr val="EFD2DE"/>
+                        <a:srgbClr val="F7D4E3"/>
                       </a:solidFill>
                       <a:prstDash val="solid"/>
                     </a:lnT>
                     <a:lnB w="9525" cap="flat" cmpd="sng" algn="ctr">
                       <a:solidFill>
-                        <a:srgbClr val="EFD2DE"/>
+                        <a:srgbClr val="F7D4E3"/>
                       </a:solidFill>
                       <a:prstDash val="solid"/>
                     </a:lnB>
                     <a:solidFill>
-                      <a:srgbClr val="F9F1F4"/>
+                      <a:srgbClr val="FCF3F7"/>
                     </a:solidFill>
                   </a:tcPr>
                 </a:tc>
@@ -4078,7 +4078,7 @@
     <p:bg>
       <p:bgPr>
         <a:solidFill>
-          <a:srgbClr val="F9F1F4"/>
+          <a:srgbClr val="FCF3F7"/>
         </a:solidFill>
         <a:effectLst/>
       </p:bgPr>
@@ -4105,7 +4105,7 @@
             <a:avLst/>
           </a:prstGeom>
           <a:solidFill>
-            <a:srgbClr val="B8517C"/>
+            <a:srgbClr val="CD4C82"/>
           </a:solidFill>
           <a:ln>
             <a:noFill/>
@@ -4134,7 +4134,7 @@
             <a:avLst/>
           </a:prstGeom>
           <a:solidFill>
-            <a:srgbClr val="3B9142"/>
+            <a:srgbClr val="339941"/>
           </a:solidFill>
           <a:ln>
             <a:noFill/>
@@ -4178,7 +4178,7 @@
             <a:r>
               <a:rPr sz="3000" b="1" i="0">
                 <a:solidFill>
-                  <a:srgbClr val="742F4C"/>
+                  <a:srgbClr val="6F1F41"/>
                 </a:solidFill>
               </a:rPr>
               <a:t>가입한 보험 목록</a:t>
@@ -4231,30 +4231,30 @@
                   <a:tcPr anchor="ctr" marL="73152" marR="73152">
                     <a:lnL w="9525" cap="flat" cmpd="sng" algn="ctr">
                       <a:solidFill>
-                        <a:srgbClr val="B8517C"/>
+                        <a:srgbClr val="CD4C82"/>
                       </a:solidFill>
                       <a:prstDash val="solid"/>
                     </a:lnL>
                     <a:lnR w="9525" cap="flat" cmpd="sng" algn="ctr">
                       <a:solidFill>
-                        <a:srgbClr val="B8517C"/>
+                        <a:srgbClr val="CD4C82"/>
                       </a:solidFill>
                       <a:prstDash val="solid"/>
                     </a:lnR>
                     <a:lnT w="9525" cap="flat" cmpd="sng" algn="ctr">
                       <a:solidFill>
-                        <a:srgbClr val="B8517C"/>
+                        <a:srgbClr val="CD4C82"/>
                       </a:solidFill>
                       <a:prstDash val="solid"/>
                     </a:lnT>
                     <a:lnB w="9525" cap="flat" cmpd="sng" algn="ctr">
                       <a:solidFill>
-                        <a:srgbClr val="B8517C"/>
+                        <a:srgbClr val="CD4C82"/>
                       </a:solidFill>
                       <a:prstDash val="solid"/>
                     </a:lnB>
                     <a:solidFill>
-                      <a:srgbClr val="B8517C"/>
+                      <a:srgbClr val="CD4C82"/>
                     </a:solidFill>
                   </a:tcPr>
                 </a:tc>
@@ -4277,30 +4277,30 @@
                   <a:tcPr anchor="ctr" marL="73152" marR="73152">
                     <a:lnL w="9525" cap="flat" cmpd="sng" algn="ctr">
                       <a:solidFill>
-                        <a:srgbClr val="B8517C"/>
+                        <a:srgbClr val="CD4C82"/>
                       </a:solidFill>
                       <a:prstDash val="solid"/>
                     </a:lnL>
                     <a:lnR w="9525" cap="flat" cmpd="sng" algn="ctr">
                       <a:solidFill>
-                        <a:srgbClr val="B8517C"/>
+                        <a:srgbClr val="CD4C82"/>
                       </a:solidFill>
                       <a:prstDash val="solid"/>
                     </a:lnR>
                     <a:lnT w="9525" cap="flat" cmpd="sng" algn="ctr">
                       <a:solidFill>
-                        <a:srgbClr val="B8517C"/>
+                        <a:srgbClr val="CD4C82"/>
                       </a:solidFill>
                       <a:prstDash val="solid"/>
                     </a:lnT>
                     <a:lnB w="9525" cap="flat" cmpd="sng" algn="ctr">
                       <a:solidFill>
-                        <a:srgbClr val="B8517C"/>
+                        <a:srgbClr val="CD4C82"/>
                       </a:solidFill>
                       <a:prstDash val="solid"/>
                     </a:lnB>
                     <a:solidFill>
-                      <a:srgbClr val="B8517C"/>
+                      <a:srgbClr val="CD4C82"/>
                     </a:solidFill>
                   </a:tcPr>
                 </a:tc>
@@ -4323,30 +4323,30 @@
                   <a:tcPr anchor="ctr" marL="73152" marR="73152">
                     <a:lnL w="9525" cap="flat" cmpd="sng" algn="ctr">
                       <a:solidFill>
-                        <a:srgbClr val="B8517C"/>
+                        <a:srgbClr val="CD4C82"/>
                       </a:solidFill>
                       <a:prstDash val="solid"/>
                     </a:lnL>
                     <a:lnR w="9525" cap="flat" cmpd="sng" algn="ctr">
                       <a:solidFill>
-                        <a:srgbClr val="B8517C"/>
+                        <a:srgbClr val="CD4C82"/>
                       </a:solidFill>
                       <a:prstDash val="solid"/>
                     </a:lnR>
                     <a:lnT w="9525" cap="flat" cmpd="sng" algn="ctr">
                       <a:solidFill>
-                        <a:srgbClr val="B8517C"/>
+                        <a:srgbClr val="CD4C82"/>
                       </a:solidFill>
                       <a:prstDash val="solid"/>
                     </a:lnT>
                     <a:lnB w="9525" cap="flat" cmpd="sng" algn="ctr">
                       <a:solidFill>
-                        <a:srgbClr val="B8517C"/>
+                        <a:srgbClr val="CD4C82"/>
                       </a:solidFill>
                       <a:prstDash val="solid"/>
                     </a:lnB>
                     <a:solidFill>
-                      <a:srgbClr val="B8517C"/>
+                      <a:srgbClr val="CD4C82"/>
                     </a:solidFill>
                   </a:tcPr>
                 </a:tc>
@@ -4369,30 +4369,30 @@
                   <a:tcPr anchor="ctr" marL="73152" marR="73152">
                     <a:lnL w="9525" cap="flat" cmpd="sng" algn="ctr">
                       <a:solidFill>
-                        <a:srgbClr val="B8517C"/>
+                        <a:srgbClr val="CD4C82"/>
                       </a:solidFill>
                       <a:prstDash val="solid"/>
                     </a:lnL>
                     <a:lnR w="9525" cap="flat" cmpd="sng" algn="ctr">
                       <a:solidFill>
-                        <a:srgbClr val="B8517C"/>
+                        <a:srgbClr val="CD4C82"/>
                       </a:solidFill>
                       <a:prstDash val="solid"/>
                     </a:lnR>
                     <a:lnT w="9525" cap="flat" cmpd="sng" algn="ctr">
                       <a:solidFill>
-                        <a:srgbClr val="B8517C"/>
+                        <a:srgbClr val="CD4C82"/>
                       </a:solidFill>
                       <a:prstDash val="solid"/>
                     </a:lnT>
                     <a:lnB w="9525" cap="flat" cmpd="sng" algn="ctr">
                       <a:solidFill>
-                        <a:srgbClr val="B8517C"/>
+                        <a:srgbClr val="CD4C82"/>
                       </a:solidFill>
                       <a:prstDash val="solid"/>
                     </a:lnB>
                     <a:solidFill>
-                      <a:srgbClr val="B8517C"/>
+                      <a:srgbClr val="CD4C82"/>
                     </a:solidFill>
                   </a:tcPr>
                 </a:tc>
@@ -4415,30 +4415,30 @@
                   <a:tcPr anchor="ctr" marL="73152" marR="73152">
                     <a:lnL w="9525" cap="flat" cmpd="sng" algn="ctr">
                       <a:solidFill>
-                        <a:srgbClr val="B8517C"/>
+                        <a:srgbClr val="CD4C82"/>
                       </a:solidFill>
                       <a:prstDash val="solid"/>
                     </a:lnL>
                     <a:lnR w="9525" cap="flat" cmpd="sng" algn="ctr">
                       <a:solidFill>
-                        <a:srgbClr val="B8517C"/>
+                        <a:srgbClr val="CD4C82"/>
                       </a:solidFill>
                       <a:prstDash val="solid"/>
                     </a:lnR>
                     <a:lnT w="9525" cap="flat" cmpd="sng" algn="ctr">
                       <a:solidFill>
-                        <a:srgbClr val="B8517C"/>
+                        <a:srgbClr val="CD4C82"/>
                       </a:solidFill>
                       <a:prstDash val="solid"/>
                     </a:lnT>
                     <a:lnB w="9525" cap="flat" cmpd="sng" algn="ctr">
                       <a:solidFill>
-                        <a:srgbClr val="B8517C"/>
+                        <a:srgbClr val="CD4C82"/>
                       </a:solidFill>
                       <a:prstDash val="solid"/>
                     </a:lnB>
                     <a:solidFill>
-                      <a:srgbClr val="B8517C"/>
+                      <a:srgbClr val="CD4C82"/>
                     </a:solidFill>
                   </a:tcPr>
                 </a:tc>
@@ -4463,25 +4463,25 @@
                   <a:tcPr anchor="ctr" marL="73152" marR="73152">
                     <a:lnL w="9525" cap="flat" cmpd="sng" algn="ctr">
                       <a:solidFill>
-                        <a:srgbClr val="EFD2DE"/>
+                        <a:srgbClr val="F7D4E3"/>
                       </a:solidFill>
                       <a:prstDash val="solid"/>
                     </a:lnL>
                     <a:lnR w="9525" cap="flat" cmpd="sng" algn="ctr">
                       <a:solidFill>
-                        <a:srgbClr val="EFD2DE"/>
+                        <a:srgbClr val="F7D4E3"/>
                       </a:solidFill>
                       <a:prstDash val="solid"/>
                     </a:lnR>
                     <a:lnT w="9525" cap="flat" cmpd="sng" algn="ctr">
                       <a:solidFill>
-                        <a:srgbClr val="EFD2DE"/>
+                        <a:srgbClr val="F7D4E3"/>
                       </a:solidFill>
                       <a:prstDash val="solid"/>
                     </a:lnT>
                     <a:lnB w="9525" cap="flat" cmpd="sng" algn="ctr">
                       <a:solidFill>
-                        <a:srgbClr val="EFD2DE"/>
+                        <a:srgbClr val="F7D4E3"/>
                       </a:solidFill>
                       <a:prstDash val="solid"/>
                     </a:lnB>
@@ -4509,25 +4509,25 @@
                   <a:tcPr anchor="ctr" marL="73152" marR="73152">
                     <a:lnL w="9525" cap="flat" cmpd="sng" algn="ctr">
                       <a:solidFill>
-                        <a:srgbClr val="EFD2DE"/>
+                        <a:srgbClr val="F7D4E3"/>
                       </a:solidFill>
                       <a:prstDash val="solid"/>
                     </a:lnL>
                     <a:lnR w="9525" cap="flat" cmpd="sng" algn="ctr">
                       <a:solidFill>
-                        <a:srgbClr val="EFD2DE"/>
+                        <a:srgbClr val="F7D4E3"/>
                       </a:solidFill>
                       <a:prstDash val="solid"/>
                     </a:lnR>
                     <a:lnT w="9525" cap="flat" cmpd="sng" algn="ctr">
                       <a:solidFill>
-                        <a:srgbClr val="EFD2DE"/>
+                        <a:srgbClr val="F7D4E3"/>
                       </a:solidFill>
                       <a:prstDash val="solid"/>
                     </a:lnT>
                     <a:lnB w="9525" cap="flat" cmpd="sng" algn="ctr">
                       <a:solidFill>
-                        <a:srgbClr val="EFD2DE"/>
+                        <a:srgbClr val="F7D4E3"/>
                       </a:solidFill>
                       <a:prstDash val="solid"/>
                     </a:lnB>
@@ -4555,25 +4555,25 @@
                   <a:tcPr anchor="ctr" marL="73152" marR="73152">
                     <a:lnL w="9525" cap="flat" cmpd="sng" algn="ctr">
                       <a:solidFill>
-                        <a:srgbClr val="EFD2DE"/>
+                        <a:srgbClr val="F7D4E3"/>
                       </a:solidFill>
                       <a:prstDash val="solid"/>
                     </a:lnL>
                     <a:lnR w="9525" cap="flat" cmpd="sng" algn="ctr">
                       <a:solidFill>
-                        <a:srgbClr val="EFD2DE"/>
+                        <a:srgbClr val="F7D4E3"/>
                       </a:solidFill>
                       <a:prstDash val="solid"/>
                     </a:lnR>
                     <a:lnT w="9525" cap="flat" cmpd="sng" algn="ctr">
                       <a:solidFill>
-                        <a:srgbClr val="EFD2DE"/>
+                        <a:srgbClr val="F7D4E3"/>
                       </a:solidFill>
                       <a:prstDash val="solid"/>
                     </a:lnT>
                     <a:lnB w="9525" cap="flat" cmpd="sng" algn="ctr">
                       <a:solidFill>
-                        <a:srgbClr val="EFD2DE"/>
+                        <a:srgbClr val="F7D4E3"/>
                       </a:solidFill>
                       <a:prstDash val="solid"/>
                     </a:lnB>
@@ -4601,25 +4601,25 @@
                   <a:tcPr anchor="ctr" marL="73152" marR="73152">
                     <a:lnL w="9525" cap="flat" cmpd="sng" algn="ctr">
                       <a:solidFill>
-                        <a:srgbClr val="EFD2DE"/>
+                        <a:srgbClr val="F7D4E3"/>
                       </a:solidFill>
                       <a:prstDash val="solid"/>
                     </a:lnL>
                     <a:lnR w="9525" cap="flat" cmpd="sng" algn="ctr">
                       <a:solidFill>
-                        <a:srgbClr val="EFD2DE"/>
+                        <a:srgbClr val="F7D4E3"/>
                       </a:solidFill>
                       <a:prstDash val="solid"/>
                     </a:lnR>
                     <a:lnT w="9525" cap="flat" cmpd="sng" algn="ctr">
                       <a:solidFill>
-                        <a:srgbClr val="EFD2DE"/>
+                        <a:srgbClr val="F7D4E3"/>
                       </a:solidFill>
                       <a:prstDash val="solid"/>
                     </a:lnT>
                     <a:lnB w="9525" cap="flat" cmpd="sng" algn="ctr">
                       <a:solidFill>
-                        <a:srgbClr val="EFD2DE"/>
+                        <a:srgbClr val="F7D4E3"/>
                       </a:solidFill>
                       <a:prstDash val="solid"/>
                     </a:lnB>
@@ -4647,25 +4647,25 @@
                   <a:tcPr anchor="ctr" marL="73152" marR="73152">
                     <a:lnL w="9525" cap="flat" cmpd="sng" algn="ctr">
                       <a:solidFill>
-                        <a:srgbClr val="EFD2DE"/>
+                        <a:srgbClr val="F7D4E3"/>
                       </a:solidFill>
                       <a:prstDash val="solid"/>
                     </a:lnL>
                     <a:lnR w="9525" cap="flat" cmpd="sng" algn="ctr">
                       <a:solidFill>
-                        <a:srgbClr val="EFD2DE"/>
+                        <a:srgbClr val="F7D4E3"/>
                       </a:solidFill>
                       <a:prstDash val="solid"/>
                     </a:lnR>
                     <a:lnT w="9525" cap="flat" cmpd="sng" algn="ctr">
                       <a:solidFill>
-                        <a:srgbClr val="EFD2DE"/>
+                        <a:srgbClr val="F7D4E3"/>
                       </a:solidFill>
                       <a:prstDash val="solid"/>
                     </a:lnT>
                     <a:lnB w="9525" cap="flat" cmpd="sng" algn="ctr">
                       <a:solidFill>
-                        <a:srgbClr val="EFD2DE"/>
+                        <a:srgbClr val="F7D4E3"/>
                       </a:solidFill>
                       <a:prstDash val="solid"/>
                     </a:lnB>
@@ -4695,30 +4695,30 @@
                   <a:tcPr anchor="ctr" marL="73152" marR="73152">
                     <a:lnL w="9525" cap="flat" cmpd="sng" algn="ctr">
                       <a:solidFill>
-                        <a:srgbClr val="EFD2DE"/>
+                        <a:srgbClr val="F7D4E3"/>
                       </a:solidFill>
                       <a:prstDash val="solid"/>
                     </a:lnL>
                     <a:lnR w="9525" cap="flat" cmpd="sng" algn="ctr">
                       <a:solidFill>
-                        <a:srgbClr val="EFD2DE"/>
+                        <a:srgbClr val="F7D4E3"/>
                       </a:solidFill>
                       <a:prstDash val="solid"/>
                     </a:lnR>
                     <a:lnT w="9525" cap="flat" cmpd="sng" algn="ctr">
                       <a:solidFill>
-                        <a:srgbClr val="EFD2DE"/>
+                        <a:srgbClr val="F7D4E3"/>
                       </a:solidFill>
                       <a:prstDash val="solid"/>
                     </a:lnT>
                     <a:lnB w="9525" cap="flat" cmpd="sng" algn="ctr">
                       <a:solidFill>
-                        <a:srgbClr val="EFD2DE"/>
+                        <a:srgbClr val="F7D4E3"/>
                       </a:solidFill>
                       <a:prstDash val="solid"/>
                     </a:lnB>
                     <a:solidFill>
-                      <a:srgbClr val="F9F1F4"/>
+                      <a:srgbClr val="FCF3F7"/>
                     </a:solidFill>
                   </a:tcPr>
                 </a:tc>
@@ -4741,30 +4741,30 @@
                   <a:tcPr anchor="ctr" marL="73152" marR="73152">
                     <a:lnL w="9525" cap="flat" cmpd="sng" algn="ctr">
                       <a:solidFill>
-                        <a:srgbClr val="EFD2DE"/>
+                        <a:srgbClr val="F7D4E3"/>
                       </a:solidFill>
                       <a:prstDash val="solid"/>
                     </a:lnL>
                     <a:lnR w="9525" cap="flat" cmpd="sng" algn="ctr">
                       <a:solidFill>
-                        <a:srgbClr val="EFD2DE"/>
+                        <a:srgbClr val="F7D4E3"/>
                       </a:solidFill>
                       <a:prstDash val="solid"/>
                     </a:lnR>
                     <a:lnT w="9525" cap="flat" cmpd="sng" algn="ctr">
                       <a:solidFill>
-                        <a:srgbClr val="EFD2DE"/>
+                        <a:srgbClr val="F7D4E3"/>
                       </a:solidFill>
                       <a:prstDash val="solid"/>
                     </a:lnT>
                     <a:lnB w="9525" cap="flat" cmpd="sng" algn="ctr">
                       <a:solidFill>
-                        <a:srgbClr val="EFD2DE"/>
+                        <a:srgbClr val="F7D4E3"/>
                       </a:solidFill>
                       <a:prstDash val="solid"/>
                     </a:lnB>
                     <a:solidFill>
-                      <a:srgbClr val="F9F1F4"/>
+                      <a:srgbClr val="FCF3F7"/>
                     </a:solidFill>
                   </a:tcPr>
                 </a:tc>
@@ -4787,30 +4787,30 @@
                   <a:tcPr anchor="ctr" marL="73152" marR="73152">
                     <a:lnL w="9525" cap="flat" cmpd="sng" algn="ctr">
                       <a:solidFill>
-                        <a:srgbClr val="EFD2DE"/>
+                        <a:srgbClr val="F7D4E3"/>
                       </a:solidFill>
                       <a:prstDash val="solid"/>
                     </a:lnL>
                     <a:lnR w="9525" cap="flat" cmpd="sng" algn="ctr">
                       <a:solidFill>
-                        <a:srgbClr val="EFD2DE"/>
+                        <a:srgbClr val="F7D4E3"/>
                       </a:solidFill>
                       <a:prstDash val="solid"/>
                     </a:lnR>
                     <a:lnT w="9525" cap="flat" cmpd="sng" algn="ctr">
                       <a:solidFill>
-                        <a:srgbClr val="EFD2DE"/>
+                        <a:srgbClr val="F7D4E3"/>
                       </a:solidFill>
                       <a:prstDash val="solid"/>
                     </a:lnT>
                     <a:lnB w="9525" cap="flat" cmpd="sng" algn="ctr">
                       <a:solidFill>
-                        <a:srgbClr val="EFD2DE"/>
+                        <a:srgbClr val="F7D4E3"/>
                       </a:solidFill>
                       <a:prstDash val="solid"/>
                     </a:lnB>
                     <a:solidFill>
-                      <a:srgbClr val="F9F1F4"/>
+                      <a:srgbClr val="FCF3F7"/>
                     </a:solidFill>
                   </a:tcPr>
                 </a:tc>
@@ -4833,30 +4833,30 @@
                   <a:tcPr anchor="ctr" marL="73152" marR="73152">
                     <a:lnL w="9525" cap="flat" cmpd="sng" algn="ctr">
                       <a:solidFill>
-                        <a:srgbClr val="EFD2DE"/>
+                        <a:srgbClr val="F7D4E3"/>
                       </a:solidFill>
                       <a:prstDash val="solid"/>
                     </a:lnL>
                     <a:lnR w="9525" cap="flat" cmpd="sng" algn="ctr">
                       <a:solidFill>
-                        <a:srgbClr val="EFD2DE"/>
+                        <a:srgbClr val="F7D4E3"/>
                       </a:solidFill>
                       <a:prstDash val="solid"/>
                     </a:lnR>
                     <a:lnT w="9525" cap="flat" cmpd="sng" algn="ctr">
                       <a:solidFill>
-                        <a:srgbClr val="EFD2DE"/>
+                        <a:srgbClr val="F7D4E3"/>
                       </a:solidFill>
                       <a:prstDash val="solid"/>
                     </a:lnT>
                     <a:lnB w="9525" cap="flat" cmpd="sng" algn="ctr">
                       <a:solidFill>
-                        <a:srgbClr val="EFD2DE"/>
+                        <a:srgbClr val="F7D4E3"/>
                       </a:solidFill>
                       <a:prstDash val="solid"/>
                     </a:lnB>
                     <a:solidFill>
-                      <a:srgbClr val="F9F1F4"/>
+                      <a:srgbClr val="FCF3F7"/>
                     </a:solidFill>
                   </a:tcPr>
                 </a:tc>
@@ -4879,30 +4879,30 @@
                   <a:tcPr anchor="ctr" marL="73152" marR="73152">
                     <a:lnL w="9525" cap="flat" cmpd="sng" algn="ctr">
                       <a:solidFill>
-                        <a:srgbClr val="EFD2DE"/>
+                        <a:srgbClr val="F7D4E3"/>
                       </a:solidFill>
                       <a:prstDash val="solid"/>
                     </a:lnL>
                     <a:lnR w="9525" cap="flat" cmpd="sng" algn="ctr">
                       <a:solidFill>
-                        <a:srgbClr val="EFD2DE"/>
+                        <a:srgbClr val="F7D4E3"/>
                       </a:solidFill>
                       <a:prstDash val="solid"/>
                     </a:lnR>
                     <a:lnT w="9525" cap="flat" cmpd="sng" algn="ctr">
                       <a:solidFill>
-                        <a:srgbClr val="EFD2DE"/>
+                        <a:srgbClr val="F7D4E3"/>
                       </a:solidFill>
                       <a:prstDash val="solid"/>
                     </a:lnT>
                     <a:lnB w="9525" cap="flat" cmpd="sng" algn="ctr">
                       <a:solidFill>
-                        <a:srgbClr val="EFD2DE"/>
+                        <a:srgbClr val="F7D4E3"/>
                       </a:solidFill>
                       <a:prstDash val="solid"/>
                     </a:lnB>
                     <a:solidFill>
-                      <a:srgbClr val="F9F1F4"/>
+                      <a:srgbClr val="FCF3F7"/>
                     </a:solidFill>
                   </a:tcPr>
                 </a:tc>
@@ -4927,25 +4927,25 @@
                   <a:tcPr anchor="ctr" marL="73152" marR="73152">
                     <a:lnL w="9525" cap="flat" cmpd="sng" algn="ctr">
                       <a:solidFill>
-                        <a:srgbClr val="EFD2DE"/>
+                        <a:srgbClr val="F7D4E3"/>
                       </a:solidFill>
                       <a:prstDash val="solid"/>
                     </a:lnL>
                     <a:lnR w="9525" cap="flat" cmpd="sng" algn="ctr">
                       <a:solidFill>
-                        <a:srgbClr val="EFD2DE"/>
+                        <a:srgbClr val="F7D4E3"/>
                       </a:solidFill>
                       <a:prstDash val="solid"/>
                     </a:lnR>
                     <a:lnT w="9525" cap="flat" cmpd="sng" algn="ctr">
                       <a:solidFill>
-                        <a:srgbClr val="EFD2DE"/>
+                        <a:srgbClr val="F7D4E3"/>
                       </a:solidFill>
                       <a:prstDash val="solid"/>
                     </a:lnT>
                     <a:lnB w="9525" cap="flat" cmpd="sng" algn="ctr">
                       <a:solidFill>
-                        <a:srgbClr val="EFD2DE"/>
+                        <a:srgbClr val="F7D4E3"/>
                       </a:solidFill>
                       <a:prstDash val="solid"/>
                     </a:lnB>
@@ -4973,25 +4973,25 @@
                   <a:tcPr anchor="ctr" marL="73152" marR="73152">
                     <a:lnL w="9525" cap="flat" cmpd="sng" algn="ctr">
                       <a:solidFill>
-                        <a:srgbClr val="EFD2DE"/>
+                        <a:srgbClr val="F7D4E3"/>
                       </a:solidFill>
                       <a:prstDash val="solid"/>
                     </a:lnL>
                     <a:lnR w="9525" cap="flat" cmpd="sng" algn="ctr">
                       <a:solidFill>
-                        <a:srgbClr val="EFD2DE"/>
+                        <a:srgbClr val="F7D4E3"/>
                       </a:solidFill>
                       <a:prstDash val="solid"/>
                     </a:lnR>
                     <a:lnT w="9525" cap="flat" cmpd="sng" algn="ctr">
                       <a:solidFill>
-                        <a:srgbClr val="EFD2DE"/>
+                        <a:srgbClr val="F7D4E3"/>
                       </a:solidFill>
                       <a:prstDash val="solid"/>
                     </a:lnT>
                     <a:lnB w="9525" cap="flat" cmpd="sng" algn="ctr">
                       <a:solidFill>
-                        <a:srgbClr val="EFD2DE"/>
+                        <a:srgbClr val="F7D4E3"/>
                       </a:solidFill>
                       <a:prstDash val="solid"/>
                     </a:lnB>
@@ -5019,25 +5019,25 @@
                   <a:tcPr anchor="ctr" marL="73152" marR="73152">
                     <a:lnL w="9525" cap="flat" cmpd="sng" algn="ctr">
                       <a:solidFill>
-                        <a:srgbClr val="EFD2DE"/>
+                        <a:srgbClr val="F7D4E3"/>
                       </a:solidFill>
                       <a:prstDash val="solid"/>
                     </a:lnL>
                     <a:lnR w="9525" cap="flat" cmpd="sng" algn="ctr">
                       <a:solidFill>
-                        <a:srgbClr val="EFD2DE"/>
+                        <a:srgbClr val="F7D4E3"/>
                       </a:solidFill>
                       <a:prstDash val="solid"/>
                     </a:lnR>
                     <a:lnT w="9525" cap="flat" cmpd="sng" algn="ctr">
                       <a:solidFill>
-                        <a:srgbClr val="EFD2DE"/>
+                        <a:srgbClr val="F7D4E3"/>
                       </a:solidFill>
                       <a:prstDash val="solid"/>
                     </a:lnT>
                     <a:lnB w="9525" cap="flat" cmpd="sng" algn="ctr">
                       <a:solidFill>
-                        <a:srgbClr val="EFD2DE"/>
+                        <a:srgbClr val="F7D4E3"/>
                       </a:solidFill>
                       <a:prstDash val="solid"/>
                     </a:lnB>
@@ -5065,25 +5065,25 @@
                   <a:tcPr anchor="ctr" marL="73152" marR="73152">
                     <a:lnL w="9525" cap="flat" cmpd="sng" algn="ctr">
                       <a:solidFill>
-                        <a:srgbClr val="EFD2DE"/>
+                        <a:srgbClr val="F7D4E3"/>
                       </a:solidFill>
                       <a:prstDash val="solid"/>
                     </a:lnL>
                     <a:lnR w="9525" cap="flat" cmpd="sng" algn="ctr">
                       <a:solidFill>
-                        <a:srgbClr val="EFD2DE"/>
+                        <a:srgbClr val="F7D4E3"/>
                       </a:solidFill>
                       <a:prstDash val="solid"/>
                     </a:lnR>
                     <a:lnT w="9525" cap="flat" cmpd="sng" algn="ctr">
                       <a:solidFill>
-                        <a:srgbClr val="EFD2DE"/>
+                        <a:srgbClr val="F7D4E3"/>
                       </a:solidFill>
                       <a:prstDash val="solid"/>
                     </a:lnT>
                     <a:lnB w="9525" cap="flat" cmpd="sng" algn="ctr">
                       <a:solidFill>
-                        <a:srgbClr val="EFD2DE"/>
+                        <a:srgbClr val="F7D4E3"/>
                       </a:solidFill>
                       <a:prstDash val="solid"/>
                     </a:lnB>
@@ -5111,25 +5111,25 @@
                   <a:tcPr anchor="ctr" marL="73152" marR="73152">
                     <a:lnL w="9525" cap="flat" cmpd="sng" algn="ctr">
                       <a:solidFill>
-                        <a:srgbClr val="EFD2DE"/>
+                        <a:srgbClr val="F7D4E3"/>
                       </a:solidFill>
                       <a:prstDash val="solid"/>
                     </a:lnL>
                     <a:lnR w="9525" cap="flat" cmpd="sng" algn="ctr">
                       <a:solidFill>
-                        <a:srgbClr val="EFD2DE"/>
+                        <a:srgbClr val="F7D4E3"/>
                       </a:solidFill>
                       <a:prstDash val="solid"/>
                     </a:lnR>
                     <a:lnT w="9525" cap="flat" cmpd="sng" algn="ctr">
                       <a:solidFill>
-                        <a:srgbClr val="EFD2DE"/>
+                        <a:srgbClr val="F7D4E3"/>
                       </a:solidFill>
                       <a:prstDash val="solid"/>
                     </a:lnT>
                     <a:lnB w="9525" cap="flat" cmpd="sng" algn="ctr">
                       <a:solidFill>
-                        <a:srgbClr val="EFD2DE"/>
+                        <a:srgbClr val="F7D4E3"/>
                       </a:solidFill>
                       <a:prstDash val="solid"/>
                     </a:lnB>
@@ -5159,30 +5159,30 @@
                   <a:tcPr anchor="ctr" marL="73152" marR="73152">
                     <a:lnL w="9525" cap="flat" cmpd="sng" algn="ctr">
                       <a:solidFill>
-                        <a:srgbClr val="EFD2DE"/>
+                        <a:srgbClr val="F7D4E3"/>
                       </a:solidFill>
                       <a:prstDash val="solid"/>
                     </a:lnL>
                     <a:lnR w="9525" cap="flat" cmpd="sng" algn="ctr">
                       <a:solidFill>
-                        <a:srgbClr val="EFD2DE"/>
+                        <a:srgbClr val="F7D4E3"/>
                       </a:solidFill>
                       <a:prstDash val="solid"/>
                     </a:lnR>
                     <a:lnT w="9525" cap="flat" cmpd="sng" algn="ctr">
                       <a:solidFill>
-                        <a:srgbClr val="EFD2DE"/>
+                        <a:srgbClr val="F7D4E3"/>
                       </a:solidFill>
                       <a:prstDash val="solid"/>
                     </a:lnT>
                     <a:lnB w="9525" cap="flat" cmpd="sng" algn="ctr">
                       <a:solidFill>
-                        <a:srgbClr val="EFD2DE"/>
+                        <a:srgbClr val="F7D4E3"/>
                       </a:solidFill>
                       <a:prstDash val="solid"/>
                     </a:lnB>
                     <a:solidFill>
-                      <a:srgbClr val="F9F1F4"/>
+                      <a:srgbClr val="FCF3F7"/>
                     </a:solidFill>
                   </a:tcPr>
                 </a:tc>
@@ -5205,30 +5205,30 @@
                   <a:tcPr anchor="ctr" marL="73152" marR="73152">
                     <a:lnL w="9525" cap="flat" cmpd="sng" algn="ctr">
                       <a:solidFill>
-                        <a:srgbClr val="EFD2DE"/>
+                        <a:srgbClr val="F7D4E3"/>
                       </a:solidFill>
                       <a:prstDash val="solid"/>
                     </a:lnL>
                     <a:lnR w="9525" cap="flat" cmpd="sng" algn="ctr">
                       <a:solidFill>
-                        <a:srgbClr val="EFD2DE"/>
+                        <a:srgbClr val="F7D4E3"/>
                       </a:solidFill>
                       <a:prstDash val="solid"/>
                     </a:lnR>
                     <a:lnT w="9525" cap="flat" cmpd="sng" algn="ctr">
                       <a:solidFill>
-                        <a:srgbClr val="EFD2DE"/>
+                        <a:srgbClr val="F7D4E3"/>
                       </a:solidFill>
                       <a:prstDash val="solid"/>
                     </a:lnT>
                     <a:lnB w="9525" cap="flat" cmpd="sng" algn="ctr">
                       <a:solidFill>
-                        <a:srgbClr val="EFD2DE"/>
+                        <a:srgbClr val="F7D4E3"/>
                       </a:solidFill>
                       <a:prstDash val="solid"/>
                     </a:lnB>
                     <a:solidFill>
-                      <a:srgbClr val="F9F1F4"/>
+                      <a:srgbClr val="FCF3F7"/>
                     </a:solidFill>
                   </a:tcPr>
                 </a:tc>
@@ -5251,30 +5251,30 @@
                   <a:tcPr anchor="ctr" marL="73152" marR="73152">
                     <a:lnL w="9525" cap="flat" cmpd="sng" algn="ctr">
                       <a:solidFill>
-                        <a:srgbClr val="EFD2DE"/>
+                        <a:srgbClr val="F7D4E3"/>
                       </a:solidFill>
                       <a:prstDash val="solid"/>
                     </a:lnL>
                     <a:lnR w="9525" cap="flat" cmpd="sng" algn="ctr">
                       <a:solidFill>
-                        <a:srgbClr val="EFD2DE"/>
+                        <a:srgbClr val="F7D4E3"/>
                       </a:solidFill>
                       <a:prstDash val="solid"/>
                     </a:lnR>
                     <a:lnT w="9525" cap="flat" cmpd="sng" algn="ctr">
                       <a:solidFill>
-                        <a:srgbClr val="EFD2DE"/>
+                        <a:srgbClr val="F7D4E3"/>
                       </a:solidFill>
                       <a:prstDash val="solid"/>
                     </a:lnT>
                     <a:lnB w="9525" cap="flat" cmpd="sng" algn="ctr">
                       <a:solidFill>
-                        <a:srgbClr val="EFD2DE"/>
+                        <a:srgbClr val="F7D4E3"/>
                       </a:solidFill>
                       <a:prstDash val="solid"/>
                     </a:lnB>
                     <a:solidFill>
-                      <a:srgbClr val="F9F1F4"/>
+                      <a:srgbClr val="FCF3F7"/>
                     </a:solidFill>
                   </a:tcPr>
                 </a:tc>
@@ -5297,30 +5297,30 @@
                   <a:tcPr anchor="ctr" marL="73152" marR="73152">
                     <a:lnL w="9525" cap="flat" cmpd="sng" algn="ctr">
                       <a:solidFill>
-                        <a:srgbClr val="EFD2DE"/>
+                        <a:srgbClr val="F7D4E3"/>
                       </a:solidFill>
                       <a:prstDash val="solid"/>
                     </a:lnL>
                     <a:lnR w="9525" cap="flat" cmpd="sng" algn="ctr">
                       <a:solidFill>
-                        <a:srgbClr val="EFD2DE"/>
+                        <a:srgbClr val="F7D4E3"/>
                       </a:solidFill>
                       <a:prstDash val="solid"/>
                     </a:lnR>
                     <a:lnT w="9525" cap="flat" cmpd="sng" algn="ctr">
                       <a:solidFill>
-                        <a:srgbClr val="EFD2DE"/>
+                        <a:srgbClr val="F7D4E3"/>
                       </a:solidFill>
                       <a:prstDash val="solid"/>
                     </a:lnT>
                     <a:lnB w="9525" cap="flat" cmpd="sng" algn="ctr">
                       <a:solidFill>
-                        <a:srgbClr val="EFD2DE"/>
+                        <a:srgbClr val="F7D4E3"/>
                       </a:solidFill>
                       <a:prstDash val="solid"/>
                     </a:lnB>
                     <a:solidFill>
-                      <a:srgbClr val="F9F1F4"/>
+                      <a:srgbClr val="FCF3F7"/>
                     </a:solidFill>
                   </a:tcPr>
                 </a:tc>
@@ -5343,30 +5343,30 @@
                   <a:tcPr anchor="ctr" marL="73152" marR="73152">
                     <a:lnL w="9525" cap="flat" cmpd="sng" algn="ctr">
                       <a:solidFill>
-                        <a:srgbClr val="EFD2DE"/>
+                        <a:srgbClr val="F7D4E3"/>
                       </a:solidFill>
                       <a:prstDash val="solid"/>
                     </a:lnL>
                     <a:lnR w="9525" cap="flat" cmpd="sng" algn="ctr">
                       <a:solidFill>
-                        <a:srgbClr val="EFD2DE"/>
+                        <a:srgbClr val="F7D4E3"/>
                       </a:solidFill>
                       <a:prstDash val="solid"/>
                     </a:lnR>
                     <a:lnT w="9525" cap="flat" cmpd="sng" algn="ctr">
                       <a:solidFill>
-                        <a:srgbClr val="EFD2DE"/>
+                        <a:srgbClr val="F7D4E3"/>
                       </a:solidFill>
                       <a:prstDash val="solid"/>
                     </a:lnT>
                     <a:lnB w="9525" cap="flat" cmpd="sng" algn="ctr">
                       <a:solidFill>
-                        <a:srgbClr val="EFD2DE"/>
+                        <a:srgbClr val="F7D4E3"/>
                       </a:solidFill>
                       <a:prstDash val="solid"/>
                     </a:lnB>
                     <a:solidFill>
-                      <a:srgbClr val="F9F1F4"/>
+                      <a:srgbClr val="FCF3F7"/>
                     </a:solidFill>
                   </a:tcPr>
                 </a:tc>
@@ -5391,25 +5391,25 @@
                   <a:tcPr anchor="ctr" marL="73152" marR="73152">
                     <a:lnL w="9525" cap="flat" cmpd="sng" algn="ctr">
                       <a:solidFill>
-                        <a:srgbClr val="EFD2DE"/>
+                        <a:srgbClr val="F7D4E3"/>
                       </a:solidFill>
                       <a:prstDash val="solid"/>
                     </a:lnL>
                     <a:lnR w="9525" cap="flat" cmpd="sng" algn="ctr">
                       <a:solidFill>
-                        <a:srgbClr val="EFD2DE"/>
+                        <a:srgbClr val="F7D4E3"/>
                       </a:solidFill>
                       <a:prstDash val="solid"/>
                     </a:lnR>
                     <a:lnT w="9525" cap="flat" cmpd="sng" algn="ctr">
                       <a:solidFill>
-                        <a:srgbClr val="EFD2DE"/>
+                        <a:srgbClr val="F7D4E3"/>
                       </a:solidFill>
                       <a:prstDash val="solid"/>
                     </a:lnT>
                     <a:lnB w="9525" cap="flat" cmpd="sng" algn="ctr">
                       <a:solidFill>
-                        <a:srgbClr val="EFD2DE"/>
+                        <a:srgbClr val="F7D4E3"/>
                       </a:solidFill>
                       <a:prstDash val="solid"/>
                     </a:lnB>
@@ -5437,25 +5437,25 @@
                   <a:tcPr anchor="ctr" marL="73152" marR="73152">
                     <a:lnL w="9525" cap="flat" cmpd="sng" algn="ctr">
                       <a:solidFill>
-                        <a:srgbClr val="EFD2DE"/>
+                        <a:srgbClr val="F7D4E3"/>
                       </a:solidFill>
                       <a:prstDash val="solid"/>
                     </a:lnL>
                     <a:lnR w="9525" cap="flat" cmpd="sng" algn="ctr">
                       <a:solidFill>
-                        <a:srgbClr val="EFD2DE"/>
+                        <a:srgbClr val="F7D4E3"/>
                       </a:solidFill>
                       <a:prstDash val="solid"/>
                     </a:lnR>
                     <a:lnT w="9525" cap="flat" cmpd="sng" algn="ctr">
                       <a:solidFill>
-                        <a:srgbClr val="EFD2DE"/>
+                        <a:srgbClr val="F7D4E3"/>
                       </a:solidFill>
                       <a:prstDash val="solid"/>
                     </a:lnT>
                     <a:lnB w="9525" cap="flat" cmpd="sng" algn="ctr">
                       <a:solidFill>
-                        <a:srgbClr val="EFD2DE"/>
+                        <a:srgbClr val="F7D4E3"/>
                       </a:solidFill>
                       <a:prstDash val="solid"/>
                     </a:lnB>
@@ -5483,25 +5483,25 @@
                   <a:tcPr anchor="ctr" marL="73152" marR="73152">
                     <a:lnL w="9525" cap="flat" cmpd="sng" algn="ctr">
                       <a:solidFill>
-                        <a:srgbClr val="EFD2DE"/>
+                        <a:srgbClr val="F7D4E3"/>
                       </a:solidFill>
                       <a:prstDash val="solid"/>
                     </a:lnL>
                     <a:lnR w="9525" cap="flat" cmpd="sng" algn="ctr">
                       <a:solidFill>
-                        <a:srgbClr val="EFD2DE"/>
+                        <a:srgbClr val="F7D4E3"/>
                       </a:solidFill>
                       <a:prstDash val="solid"/>
                     </a:lnR>
                     <a:lnT w="9525" cap="flat" cmpd="sng" algn="ctr">
                       <a:solidFill>
-                        <a:srgbClr val="EFD2DE"/>
+                        <a:srgbClr val="F7D4E3"/>
                       </a:solidFill>
                       <a:prstDash val="solid"/>
                     </a:lnT>
                     <a:lnB w="9525" cap="flat" cmpd="sng" algn="ctr">
                       <a:solidFill>
-                        <a:srgbClr val="EFD2DE"/>
+                        <a:srgbClr val="F7D4E3"/>
                       </a:solidFill>
                       <a:prstDash val="solid"/>
                     </a:lnB>
@@ -5529,25 +5529,25 @@
                   <a:tcPr anchor="ctr" marL="73152" marR="73152">
                     <a:lnL w="9525" cap="flat" cmpd="sng" algn="ctr">
                       <a:solidFill>
-                        <a:srgbClr val="EFD2DE"/>
+                        <a:srgbClr val="F7D4E3"/>
                       </a:solidFill>
                       <a:prstDash val="solid"/>
                     </a:lnL>
                     <a:lnR w="9525" cap="flat" cmpd="sng" algn="ctr">
                       <a:solidFill>
-                        <a:srgbClr val="EFD2DE"/>
+                        <a:srgbClr val="F7D4E3"/>
                       </a:solidFill>
                       <a:prstDash val="solid"/>
                     </a:lnR>
                     <a:lnT w="9525" cap="flat" cmpd="sng" algn="ctr">
                       <a:solidFill>
-                        <a:srgbClr val="EFD2DE"/>
+                        <a:srgbClr val="F7D4E3"/>
                       </a:solidFill>
                       <a:prstDash val="solid"/>
                     </a:lnT>
                     <a:lnB w="9525" cap="flat" cmpd="sng" algn="ctr">
                       <a:solidFill>
-                        <a:srgbClr val="EFD2DE"/>
+                        <a:srgbClr val="F7D4E3"/>
                       </a:solidFill>
                       <a:prstDash val="solid"/>
                     </a:lnB>
@@ -5575,25 +5575,25 @@
                   <a:tcPr anchor="ctr" marL="73152" marR="73152">
                     <a:lnL w="9525" cap="flat" cmpd="sng" algn="ctr">
                       <a:solidFill>
-                        <a:srgbClr val="EFD2DE"/>
+                        <a:srgbClr val="F7D4E3"/>
                       </a:solidFill>
                       <a:prstDash val="solid"/>
                     </a:lnL>
                     <a:lnR w="9525" cap="flat" cmpd="sng" algn="ctr">
                       <a:solidFill>
-                        <a:srgbClr val="EFD2DE"/>
+                        <a:srgbClr val="F7D4E3"/>
                       </a:solidFill>
                       <a:prstDash val="solid"/>
                     </a:lnR>
                     <a:lnT w="9525" cap="flat" cmpd="sng" algn="ctr">
                       <a:solidFill>
-                        <a:srgbClr val="EFD2DE"/>
+                        <a:srgbClr val="F7D4E3"/>
                       </a:solidFill>
                       <a:prstDash val="solid"/>
                     </a:lnT>
                     <a:lnB w="9525" cap="flat" cmpd="sng" algn="ctr">
                       <a:solidFill>
-                        <a:srgbClr val="EFD2DE"/>
+                        <a:srgbClr val="F7D4E3"/>
                       </a:solidFill>
                       <a:prstDash val="solid"/>
                     </a:lnB>
@@ -5623,30 +5623,30 @@
                   <a:tcPr anchor="ctr" marL="73152" marR="73152">
                     <a:lnL w="9525" cap="flat" cmpd="sng" algn="ctr">
                       <a:solidFill>
-                        <a:srgbClr val="EFD2DE"/>
+                        <a:srgbClr val="F7D4E3"/>
                       </a:solidFill>
                       <a:prstDash val="solid"/>
                     </a:lnL>
                     <a:lnR w="9525" cap="flat" cmpd="sng" algn="ctr">
                       <a:solidFill>
-                        <a:srgbClr val="EFD2DE"/>
+                        <a:srgbClr val="F7D4E3"/>
                       </a:solidFill>
                       <a:prstDash val="solid"/>
                     </a:lnR>
                     <a:lnT w="9525" cap="flat" cmpd="sng" algn="ctr">
                       <a:solidFill>
-                        <a:srgbClr val="EFD2DE"/>
+                        <a:srgbClr val="F7D4E3"/>
                       </a:solidFill>
                       <a:prstDash val="solid"/>
                     </a:lnT>
                     <a:lnB w="9525" cap="flat" cmpd="sng" algn="ctr">
                       <a:solidFill>
-                        <a:srgbClr val="EFD2DE"/>
+                        <a:srgbClr val="F7D4E3"/>
                       </a:solidFill>
                       <a:prstDash val="solid"/>
                     </a:lnB>
                     <a:solidFill>
-                      <a:srgbClr val="F9F1F4"/>
+                      <a:srgbClr val="FCF3F7"/>
                     </a:solidFill>
                   </a:tcPr>
                 </a:tc>
@@ -5669,30 +5669,30 @@
                   <a:tcPr anchor="ctr" marL="73152" marR="73152">
                     <a:lnL w="9525" cap="flat" cmpd="sng" algn="ctr">
                       <a:solidFill>
-                        <a:srgbClr val="EFD2DE"/>
+                        <a:srgbClr val="F7D4E3"/>
                       </a:solidFill>
                       <a:prstDash val="solid"/>
                     </a:lnL>
                     <a:lnR w="9525" cap="flat" cmpd="sng" algn="ctr">
                       <a:solidFill>
-                        <a:srgbClr val="EFD2DE"/>
+                        <a:srgbClr val="F7D4E3"/>
                       </a:solidFill>
                       <a:prstDash val="solid"/>
                     </a:lnR>
                     <a:lnT w="9525" cap="flat" cmpd="sng" algn="ctr">
                       <a:solidFill>
-                        <a:srgbClr val="EFD2DE"/>
+                        <a:srgbClr val="F7D4E3"/>
                       </a:solidFill>
                       <a:prstDash val="solid"/>
                     </a:lnT>
                     <a:lnB w="9525" cap="flat" cmpd="sng" algn="ctr">
                       <a:solidFill>
-                        <a:srgbClr val="EFD2DE"/>
+                        <a:srgbClr val="F7D4E3"/>
                       </a:solidFill>
                       <a:prstDash val="solid"/>
                     </a:lnB>
                     <a:solidFill>
-                      <a:srgbClr val="F9F1F4"/>
+                      <a:srgbClr val="FCF3F7"/>
                     </a:solidFill>
                   </a:tcPr>
                 </a:tc>
@@ -5715,30 +5715,30 @@
                   <a:tcPr anchor="ctr" marL="73152" marR="73152">
                     <a:lnL w="9525" cap="flat" cmpd="sng" algn="ctr">
                       <a:solidFill>
-                        <a:srgbClr val="EFD2DE"/>
+                        <a:srgbClr val="F7D4E3"/>
                       </a:solidFill>
                       <a:prstDash val="solid"/>
                     </a:lnL>
                     <a:lnR w="9525" cap="flat" cmpd="sng" algn="ctr">
                       <a:solidFill>
-                        <a:srgbClr val="EFD2DE"/>
+                        <a:srgbClr val="F7D4E3"/>
                       </a:solidFill>
                       <a:prstDash val="solid"/>
                     </a:lnR>
                     <a:lnT w="9525" cap="flat" cmpd="sng" algn="ctr">
                       <a:solidFill>
-                        <a:srgbClr val="EFD2DE"/>
+                        <a:srgbClr val="F7D4E3"/>
                       </a:solidFill>
                       <a:prstDash val="solid"/>
                     </a:lnT>
                     <a:lnB w="9525" cap="flat" cmpd="sng" algn="ctr">
                       <a:solidFill>
-                        <a:srgbClr val="EFD2DE"/>
+                        <a:srgbClr val="F7D4E3"/>
                       </a:solidFill>
                       <a:prstDash val="solid"/>
                     </a:lnB>
                     <a:solidFill>
-                      <a:srgbClr val="F9F1F4"/>
+                      <a:srgbClr val="FCF3F7"/>
                     </a:solidFill>
                   </a:tcPr>
                 </a:tc>
@@ -5761,30 +5761,30 @@
                   <a:tcPr anchor="ctr" marL="73152" marR="73152">
                     <a:lnL w="9525" cap="flat" cmpd="sng" algn="ctr">
                       <a:solidFill>
-                        <a:srgbClr val="EFD2DE"/>
+                        <a:srgbClr val="F7D4E3"/>
                       </a:solidFill>
                       <a:prstDash val="solid"/>
                     </a:lnL>
                     <a:lnR w="9525" cap="flat" cmpd="sng" algn="ctr">
                       <a:solidFill>
-                        <a:srgbClr val="EFD2DE"/>
+                        <a:srgbClr val="F7D4E3"/>
                       </a:solidFill>
                       <a:prstDash val="solid"/>
                     </a:lnR>
                     <a:lnT w="9525" cap="flat" cmpd="sng" algn="ctr">
                       <a:solidFill>
-                        <a:srgbClr val="EFD2DE"/>
+                        <a:srgbClr val="F7D4E3"/>
                       </a:solidFill>
                       <a:prstDash val="solid"/>
                     </a:lnT>
                     <a:lnB w="9525" cap="flat" cmpd="sng" algn="ctr">
                       <a:solidFill>
-                        <a:srgbClr val="EFD2DE"/>
+                        <a:srgbClr val="F7D4E3"/>
                       </a:solidFill>
                       <a:prstDash val="solid"/>
                     </a:lnB>
                     <a:solidFill>
-                      <a:srgbClr val="F9F1F4"/>
+                      <a:srgbClr val="FCF3F7"/>
                     </a:solidFill>
                   </a:tcPr>
                 </a:tc>
@@ -5807,30 +5807,30 @@
                   <a:tcPr anchor="ctr" marL="73152" marR="73152">
                     <a:lnL w="9525" cap="flat" cmpd="sng" algn="ctr">
                       <a:solidFill>
-                        <a:srgbClr val="EFD2DE"/>
+                        <a:srgbClr val="F7D4E3"/>
                       </a:solidFill>
                       <a:prstDash val="solid"/>
                     </a:lnL>
                     <a:lnR w="9525" cap="flat" cmpd="sng" algn="ctr">
                       <a:solidFill>
-                        <a:srgbClr val="EFD2DE"/>
+                        <a:srgbClr val="F7D4E3"/>
                       </a:solidFill>
                       <a:prstDash val="solid"/>
                     </a:lnR>
                     <a:lnT w="9525" cap="flat" cmpd="sng" algn="ctr">
                       <a:solidFill>
-                        <a:srgbClr val="EFD2DE"/>
+                        <a:srgbClr val="F7D4E3"/>
                       </a:solidFill>
                       <a:prstDash val="solid"/>
                     </a:lnT>
                     <a:lnB w="9525" cap="flat" cmpd="sng" algn="ctr">
                       <a:solidFill>
-                        <a:srgbClr val="EFD2DE"/>
+                        <a:srgbClr val="F7D4E3"/>
                       </a:solidFill>
                       <a:prstDash val="solid"/>
                     </a:lnB>
                     <a:solidFill>
-                      <a:srgbClr val="F9F1F4"/>
+                      <a:srgbClr val="FCF3F7"/>
                     </a:solidFill>
                   </a:tcPr>
                 </a:tc>
@@ -5853,7 +5853,7 @@
     <p:bg>
       <p:bgPr>
         <a:solidFill>
-          <a:srgbClr val="F9F1F4"/>
+          <a:srgbClr val="FCF3F7"/>
         </a:solidFill>
         <a:effectLst/>
       </p:bgPr>
@@ -5880,7 +5880,7 @@
             <a:avLst/>
           </a:prstGeom>
           <a:solidFill>
-            <a:srgbClr val="B8517C"/>
+            <a:srgbClr val="CD4C82"/>
           </a:solidFill>
           <a:ln>
             <a:noFill/>
@@ -5909,7 +5909,7 @@
             <a:avLst/>
           </a:prstGeom>
           <a:solidFill>
-            <a:srgbClr val="3B9142"/>
+            <a:srgbClr val="339941"/>
           </a:solidFill>
           <a:ln>
             <a:noFill/>
@@ -5953,7 +5953,7 @@
             <a:r>
               <a:rPr sz="3000" b="1" i="0">
                 <a:solidFill>
-                  <a:srgbClr val="742F4C"/>
+                  <a:srgbClr val="6F1F41"/>
                 </a:solidFill>
               </a:rPr>
               <a:t>보장 항목 체크</a:t>
@@ -6005,30 +6005,30 @@
                   <a:tcPr anchor="ctr" marL="73152" marR="73152">
                     <a:lnL w="9525" cap="flat" cmpd="sng" algn="ctr">
                       <a:solidFill>
-                        <a:srgbClr val="B8517C"/>
+                        <a:srgbClr val="CD4C82"/>
                       </a:solidFill>
                       <a:prstDash val="solid"/>
                     </a:lnL>
                     <a:lnR w="9525" cap="flat" cmpd="sng" algn="ctr">
                       <a:solidFill>
-                        <a:srgbClr val="B8517C"/>
+                        <a:srgbClr val="CD4C82"/>
                       </a:solidFill>
                       <a:prstDash val="solid"/>
                     </a:lnR>
                     <a:lnT w="9525" cap="flat" cmpd="sng" algn="ctr">
                       <a:solidFill>
-                        <a:srgbClr val="B8517C"/>
+                        <a:srgbClr val="CD4C82"/>
                       </a:solidFill>
                       <a:prstDash val="solid"/>
                     </a:lnT>
                     <a:lnB w="9525" cap="flat" cmpd="sng" algn="ctr">
                       <a:solidFill>
-                        <a:srgbClr val="B8517C"/>
+                        <a:srgbClr val="CD4C82"/>
                       </a:solidFill>
                       <a:prstDash val="solid"/>
                     </a:lnB>
                     <a:solidFill>
-                      <a:srgbClr val="B8517C"/>
+                      <a:srgbClr val="CD4C82"/>
                     </a:solidFill>
                   </a:tcPr>
                 </a:tc>
@@ -6051,30 +6051,30 @@
                   <a:tcPr anchor="ctr" marL="73152" marR="73152">
                     <a:lnL w="9525" cap="flat" cmpd="sng" algn="ctr">
                       <a:solidFill>
-                        <a:srgbClr val="B8517C"/>
+                        <a:srgbClr val="CD4C82"/>
                       </a:solidFill>
                       <a:prstDash val="solid"/>
                     </a:lnL>
                     <a:lnR w="9525" cap="flat" cmpd="sng" algn="ctr">
                       <a:solidFill>
-                        <a:srgbClr val="B8517C"/>
+                        <a:srgbClr val="CD4C82"/>
                       </a:solidFill>
                       <a:prstDash val="solid"/>
                     </a:lnR>
                     <a:lnT w="9525" cap="flat" cmpd="sng" algn="ctr">
                       <a:solidFill>
-                        <a:srgbClr val="B8517C"/>
+                        <a:srgbClr val="CD4C82"/>
                       </a:solidFill>
                       <a:prstDash val="solid"/>
                     </a:lnT>
                     <a:lnB w="9525" cap="flat" cmpd="sng" algn="ctr">
                       <a:solidFill>
-                        <a:srgbClr val="B8517C"/>
+                        <a:srgbClr val="CD4C82"/>
                       </a:solidFill>
                       <a:prstDash val="solid"/>
                     </a:lnB>
                     <a:solidFill>
-                      <a:srgbClr val="B8517C"/>
+                      <a:srgbClr val="CD4C82"/>
                     </a:solidFill>
                   </a:tcPr>
                 </a:tc>
@@ -6097,30 +6097,30 @@
                   <a:tcPr anchor="ctr" marL="73152" marR="73152">
                     <a:lnL w="9525" cap="flat" cmpd="sng" algn="ctr">
                       <a:solidFill>
-                        <a:srgbClr val="B8517C"/>
+                        <a:srgbClr val="CD4C82"/>
                       </a:solidFill>
                       <a:prstDash val="solid"/>
                     </a:lnL>
                     <a:lnR w="9525" cap="flat" cmpd="sng" algn="ctr">
                       <a:solidFill>
-                        <a:srgbClr val="B8517C"/>
+                        <a:srgbClr val="CD4C82"/>
                       </a:solidFill>
                       <a:prstDash val="solid"/>
                     </a:lnR>
                     <a:lnT w="9525" cap="flat" cmpd="sng" algn="ctr">
                       <a:solidFill>
-                        <a:srgbClr val="B8517C"/>
+                        <a:srgbClr val="CD4C82"/>
                       </a:solidFill>
                       <a:prstDash val="solid"/>
                     </a:lnT>
                     <a:lnB w="9525" cap="flat" cmpd="sng" algn="ctr">
                       <a:solidFill>
-                        <a:srgbClr val="B8517C"/>
+                        <a:srgbClr val="CD4C82"/>
                       </a:solidFill>
                       <a:prstDash val="solid"/>
                     </a:lnB>
                     <a:solidFill>
-                      <a:srgbClr val="B8517C"/>
+                      <a:srgbClr val="CD4C82"/>
                     </a:solidFill>
                   </a:tcPr>
                 </a:tc>
@@ -6143,30 +6143,30 @@
                   <a:tcPr anchor="ctr" marL="73152" marR="73152">
                     <a:lnL w="9525" cap="flat" cmpd="sng" algn="ctr">
                       <a:solidFill>
-                        <a:srgbClr val="B8517C"/>
+                        <a:srgbClr val="CD4C82"/>
                       </a:solidFill>
                       <a:prstDash val="solid"/>
                     </a:lnL>
                     <a:lnR w="9525" cap="flat" cmpd="sng" algn="ctr">
                       <a:solidFill>
-                        <a:srgbClr val="B8517C"/>
+                        <a:srgbClr val="CD4C82"/>
                       </a:solidFill>
                       <a:prstDash val="solid"/>
                     </a:lnR>
                     <a:lnT w="9525" cap="flat" cmpd="sng" algn="ctr">
                       <a:solidFill>
-                        <a:srgbClr val="B8517C"/>
+                        <a:srgbClr val="CD4C82"/>
                       </a:solidFill>
                       <a:prstDash val="solid"/>
                     </a:lnT>
                     <a:lnB w="9525" cap="flat" cmpd="sng" algn="ctr">
                       <a:solidFill>
-                        <a:srgbClr val="B8517C"/>
+                        <a:srgbClr val="CD4C82"/>
                       </a:solidFill>
                       <a:prstDash val="solid"/>
                     </a:lnB>
                     <a:solidFill>
-                      <a:srgbClr val="B8517C"/>
+                      <a:srgbClr val="CD4C82"/>
                     </a:solidFill>
                   </a:tcPr>
                 </a:tc>
@@ -6181,7 +6181,7 @@
                       <a:r>
                         <a:rPr sz="1400" b="1">
                           <a:solidFill>
-                            <a:srgbClr val="742F4C"/>
+                            <a:srgbClr val="6F1F41"/>
                           </a:solidFill>
                         </a:rPr>
                         <a:t>사망·재해</a:t>
@@ -6191,30 +6191,30 @@
                   <a:tcPr anchor="ctr" marL="73152" marR="73152">
                     <a:lnL w="9525" cap="flat" cmpd="sng" algn="ctr">
                       <a:solidFill>
-                        <a:srgbClr val="EFD2DE"/>
+                        <a:srgbClr val="F7D4E3"/>
                       </a:solidFill>
                       <a:prstDash val="solid"/>
                     </a:lnL>
                     <a:lnR w="9525" cap="flat" cmpd="sng" algn="ctr">
                       <a:solidFill>
-                        <a:srgbClr val="EFD2DE"/>
+                        <a:srgbClr val="F7D4E3"/>
                       </a:solidFill>
                       <a:prstDash val="solid"/>
                     </a:lnR>
                     <a:lnT w="9525" cap="flat" cmpd="sng" algn="ctr">
                       <a:solidFill>
-                        <a:srgbClr val="EFD2DE"/>
+                        <a:srgbClr val="F7D4E3"/>
                       </a:solidFill>
                       <a:prstDash val="solid"/>
                     </a:lnT>
                     <a:lnB w="9525" cap="flat" cmpd="sng" algn="ctr">
                       <a:solidFill>
-                        <a:srgbClr val="EFD2DE"/>
+                        <a:srgbClr val="F7D4E3"/>
                       </a:solidFill>
                       <a:prstDash val="solid"/>
                     </a:lnB>
                     <a:solidFill>
-                      <a:srgbClr val="EFD2DE"/>
+                      <a:srgbClr val="F7D4E3"/>
                     </a:solidFill>
                   </a:tcPr>
                 </a:tc>
@@ -6237,25 +6237,25 @@
                   <a:tcPr anchor="ctr" marL="73152" marR="73152">
                     <a:lnL w="9525" cap="flat" cmpd="sng" algn="ctr">
                       <a:solidFill>
-                        <a:srgbClr val="EFD2DE"/>
+                        <a:srgbClr val="F7D4E3"/>
                       </a:solidFill>
                       <a:prstDash val="solid"/>
                     </a:lnL>
                     <a:lnR w="9525" cap="flat" cmpd="sng" algn="ctr">
                       <a:solidFill>
-                        <a:srgbClr val="EFD2DE"/>
+                        <a:srgbClr val="F7D4E3"/>
                       </a:solidFill>
                       <a:prstDash val="solid"/>
                     </a:lnR>
                     <a:lnT w="9525" cap="flat" cmpd="sng" algn="ctr">
                       <a:solidFill>
-                        <a:srgbClr val="EFD2DE"/>
+                        <a:srgbClr val="F7D4E3"/>
                       </a:solidFill>
                       <a:prstDash val="solid"/>
                     </a:lnT>
                     <a:lnB w="9525" cap="flat" cmpd="sng" algn="ctr">
                       <a:solidFill>
-                        <a:srgbClr val="EFD2DE"/>
+                        <a:srgbClr val="F7D4E3"/>
                       </a:solidFill>
                       <a:prstDash val="solid"/>
                     </a:lnB>
@@ -6283,25 +6283,25 @@
                   <a:tcPr anchor="ctr" marL="73152" marR="73152">
                     <a:lnL w="9525" cap="flat" cmpd="sng" algn="ctr">
                       <a:solidFill>
-                        <a:srgbClr val="EFD2DE"/>
+                        <a:srgbClr val="F7D4E3"/>
                       </a:solidFill>
                       <a:prstDash val="solid"/>
                     </a:lnL>
                     <a:lnR w="9525" cap="flat" cmpd="sng" algn="ctr">
                       <a:solidFill>
-                        <a:srgbClr val="EFD2DE"/>
+                        <a:srgbClr val="F7D4E3"/>
                       </a:solidFill>
                       <a:prstDash val="solid"/>
                     </a:lnR>
                     <a:lnT w="9525" cap="flat" cmpd="sng" algn="ctr">
                       <a:solidFill>
-                        <a:srgbClr val="EFD2DE"/>
+                        <a:srgbClr val="F7D4E3"/>
                       </a:solidFill>
                       <a:prstDash val="solid"/>
                     </a:lnT>
                     <a:lnB w="9525" cap="flat" cmpd="sng" algn="ctr">
                       <a:solidFill>
-                        <a:srgbClr val="EFD2DE"/>
+                        <a:srgbClr val="F7D4E3"/>
                       </a:solidFill>
                       <a:prstDash val="solid"/>
                     </a:lnB>
@@ -6329,25 +6329,25 @@
                   <a:tcPr anchor="ctr" marL="73152" marR="73152">
                     <a:lnL w="9525" cap="flat" cmpd="sng" algn="ctr">
                       <a:solidFill>
-                        <a:srgbClr val="EFD2DE"/>
+                        <a:srgbClr val="F7D4E3"/>
                       </a:solidFill>
                       <a:prstDash val="solid"/>
                     </a:lnL>
                     <a:lnR w="9525" cap="flat" cmpd="sng" algn="ctr">
                       <a:solidFill>
-                        <a:srgbClr val="EFD2DE"/>
+                        <a:srgbClr val="F7D4E3"/>
                       </a:solidFill>
                       <a:prstDash val="solid"/>
                     </a:lnR>
                     <a:lnT w="9525" cap="flat" cmpd="sng" algn="ctr">
                       <a:solidFill>
-                        <a:srgbClr val="EFD2DE"/>
+                        <a:srgbClr val="F7D4E3"/>
                       </a:solidFill>
                       <a:prstDash val="solid"/>
                     </a:lnT>
                     <a:lnB w="9525" cap="flat" cmpd="sng" algn="ctr">
                       <a:solidFill>
-                        <a:srgbClr val="EFD2DE"/>
+                        <a:srgbClr val="F7D4E3"/>
                       </a:solidFill>
                       <a:prstDash val="solid"/>
                     </a:lnB>
@@ -6367,7 +6367,7 @@
                       <a:r>
                         <a:rPr sz="1400" b="1">
                           <a:solidFill>
-                            <a:srgbClr val="742F4C"/>
+                            <a:srgbClr val="6F1F41"/>
                           </a:solidFill>
                         </a:rPr>
                         <a:t>질병 진단</a:t>
@@ -6377,30 +6377,30 @@
                   <a:tcPr anchor="ctr" marL="73152" marR="73152">
                     <a:lnL w="9525" cap="flat" cmpd="sng" algn="ctr">
                       <a:solidFill>
-                        <a:srgbClr val="EFD2DE"/>
+                        <a:srgbClr val="F7D4E3"/>
                       </a:solidFill>
                       <a:prstDash val="solid"/>
                     </a:lnL>
                     <a:lnR w="9525" cap="flat" cmpd="sng" algn="ctr">
                       <a:solidFill>
-                        <a:srgbClr val="EFD2DE"/>
+                        <a:srgbClr val="F7D4E3"/>
                       </a:solidFill>
                       <a:prstDash val="solid"/>
                     </a:lnR>
                     <a:lnT w="9525" cap="flat" cmpd="sng" algn="ctr">
                       <a:solidFill>
-                        <a:srgbClr val="EFD2DE"/>
+                        <a:srgbClr val="F7D4E3"/>
                       </a:solidFill>
                       <a:prstDash val="solid"/>
                     </a:lnT>
                     <a:lnB w="9525" cap="flat" cmpd="sng" algn="ctr">
                       <a:solidFill>
-                        <a:srgbClr val="EFD2DE"/>
+                        <a:srgbClr val="F7D4E3"/>
                       </a:solidFill>
                       <a:prstDash val="solid"/>
                     </a:lnB>
                     <a:solidFill>
-                      <a:srgbClr val="EFD2DE"/>
+                      <a:srgbClr val="F7D4E3"/>
                     </a:solidFill>
                   </a:tcPr>
                 </a:tc>
@@ -6423,30 +6423,30 @@
                   <a:tcPr anchor="ctr" marL="73152" marR="73152">
                     <a:lnL w="9525" cap="flat" cmpd="sng" algn="ctr">
                       <a:solidFill>
-                        <a:srgbClr val="EFD2DE"/>
+                        <a:srgbClr val="F7D4E3"/>
                       </a:solidFill>
                       <a:prstDash val="solid"/>
                     </a:lnL>
                     <a:lnR w="9525" cap="flat" cmpd="sng" algn="ctr">
                       <a:solidFill>
-                        <a:srgbClr val="EFD2DE"/>
+                        <a:srgbClr val="F7D4E3"/>
                       </a:solidFill>
                       <a:prstDash val="solid"/>
                     </a:lnR>
                     <a:lnT w="9525" cap="flat" cmpd="sng" algn="ctr">
                       <a:solidFill>
-                        <a:srgbClr val="EFD2DE"/>
+                        <a:srgbClr val="F7D4E3"/>
                       </a:solidFill>
                       <a:prstDash val="solid"/>
                     </a:lnT>
                     <a:lnB w="9525" cap="flat" cmpd="sng" algn="ctr">
                       <a:solidFill>
-                        <a:srgbClr val="EFD2DE"/>
+                        <a:srgbClr val="F7D4E3"/>
                       </a:solidFill>
                       <a:prstDash val="solid"/>
                     </a:lnB>
                     <a:solidFill>
-                      <a:srgbClr val="F9F1F4"/>
+                      <a:srgbClr val="FCF3F7"/>
                     </a:solidFill>
                   </a:tcPr>
                 </a:tc>
@@ -6469,30 +6469,30 @@
                   <a:tcPr anchor="ctr" marL="73152" marR="73152">
                     <a:lnL w="9525" cap="flat" cmpd="sng" algn="ctr">
                       <a:solidFill>
-                        <a:srgbClr val="EFD2DE"/>
+                        <a:srgbClr val="F7D4E3"/>
                       </a:solidFill>
                       <a:prstDash val="solid"/>
                     </a:lnL>
                     <a:lnR w="9525" cap="flat" cmpd="sng" algn="ctr">
                       <a:solidFill>
-                        <a:srgbClr val="EFD2DE"/>
+                        <a:srgbClr val="F7D4E3"/>
                       </a:solidFill>
                       <a:prstDash val="solid"/>
                     </a:lnR>
                     <a:lnT w="9525" cap="flat" cmpd="sng" algn="ctr">
                       <a:solidFill>
-                        <a:srgbClr val="EFD2DE"/>
+                        <a:srgbClr val="F7D4E3"/>
                       </a:solidFill>
                       <a:prstDash val="solid"/>
                     </a:lnT>
                     <a:lnB w="9525" cap="flat" cmpd="sng" algn="ctr">
                       <a:solidFill>
-                        <a:srgbClr val="EFD2DE"/>
+                        <a:srgbClr val="F7D4E3"/>
                       </a:solidFill>
                       <a:prstDash val="solid"/>
                     </a:lnB>
                     <a:solidFill>
-                      <a:srgbClr val="F9F1F4"/>
+                      <a:srgbClr val="FCF3F7"/>
                     </a:solidFill>
                   </a:tcPr>
                 </a:tc>
@@ -6515,30 +6515,30 @@
                   <a:tcPr anchor="ctr" marL="73152" marR="73152">
                     <a:lnL w="9525" cap="flat" cmpd="sng" algn="ctr">
                       <a:solidFill>
-                        <a:srgbClr val="EFD2DE"/>
+                        <a:srgbClr val="F7D4E3"/>
                       </a:solidFill>
                       <a:prstDash val="solid"/>
                     </a:lnL>
                     <a:lnR w="9525" cap="flat" cmpd="sng" algn="ctr">
                       <a:solidFill>
-                        <a:srgbClr val="EFD2DE"/>
+                        <a:srgbClr val="F7D4E3"/>
                       </a:solidFill>
                       <a:prstDash val="solid"/>
                     </a:lnR>
                     <a:lnT w="9525" cap="flat" cmpd="sng" algn="ctr">
                       <a:solidFill>
-                        <a:srgbClr val="EFD2DE"/>
+                        <a:srgbClr val="F7D4E3"/>
                       </a:solidFill>
                       <a:prstDash val="solid"/>
                     </a:lnT>
                     <a:lnB w="9525" cap="flat" cmpd="sng" algn="ctr">
                       <a:solidFill>
-                        <a:srgbClr val="EFD2DE"/>
+                        <a:srgbClr val="F7D4E3"/>
                       </a:solidFill>
                       <a:prstDash val="solid"/>
                     </a:lnB>
                     <a:solidFill>
-                      <a:srgbClr val="F9F1F4"/>
+                      <a:srgbClr val="FCF3F7"/>
                     </a:solidFill>
                   </a:tcPr>
                 </a:tc>
@@ -6553,7 +6553,7 @@
                       <a:r>
                         <a:rPr sz="1400" b="1">
                           <a:solidFill>
-                            <a:srgbClr val="742F4C"/>
+                            <a:srgbClr val="6F1F41"/>
                           </a:solidFill>
                         </a:rPr>
                         <a:t>암</a:t>
@@ -6563,30 +6563,30 @@
                   <a:tcPr anchor="ctr" marL="73152" marR="73152">
                     <a:lnL w="9525" cap="flat" cmpd="sng" algn="ctr">
                       <a:solidFill>
-                        <a:srgbClr val="EFD2DE"/>
+                        <a:srgbClr val="F7D4E3"/>
                       </a:solidFill>
                       <a:prstDash val="solid"/>
                     </a:lnL>
                     <a:lnR w="9525" cap="flat" cmpd="sng" algn="ctr">
                       <a:solidFill>
-                        <a:srgbClr val="EFD2DE"/>
+                        <a:srgbClr val="F7D4E3"/>
                       </a:solidFill>
                       <a:prstDash val="solid"/>
                     </a:lnR>
                     <a:lnT w="9525" cap="flat" cmpd="sng" algn="ctr">
                       <a:solidFill>
-                        <a:srgbClr val="EFD2DE"/>
+                        <a:srgbClr val="F7D4E3"/>
                       </a:solidFill>
                       <a:prstDash val="solid"/>
                     </a:lnT>
                     <a:lnB w="9525" cap="flat" cmpd="sng" algn="ctr">
                       <a:solidFill>
-                        <a:srgbClr val="EFD2DE"/>
+                        <a:srgbClr val="F7D4E3"/>
                       </a:solidFill>
                       <a:prstDash val="solid"/>
                     </a:lnB>
                     <a:solidFill>
-                      <a:srgbClr val="EFD2DE"/>
+                      <a:srgbClr val="F7D4E3"/>
                     </a:solidFill>
                   </a:tcPr>
                 </a:tc>
@@ -6609,25 +6609,25 @@
                   <a:tcPr anchor="ctr" marL="73152" marR="73152">
                     <a:lnL w="9525" cap="flat" cmpd="sng" algn="ctr">
                       <a:solidFill>
-                        <a:srgbClr val="EFD2DE"/>
+                        <a:srgbClr val="F7D4E3"/>
                       </a:solidFill>
                       <a:prstDash val="solid"/>
                     </a:lnL>
                     <a:lnR w="9525" cap="flat" cmpd="sng" algn="ctr">
                       <a:solidFill>
-                        <a:srgbClr val="EFD2DE"/>
+                        <a:srgbClr val="F7D4E3"/>
                       </a:solidFill>
                       <a:prstDash val="solid"/>
                     </a:lnR>
                     <a:lnT w="9525" cap="flat" cmpd="sng" algn="ctr">
                       <a:solidFill>
-                        <a:srgbClr val="EFD2DE"/>
+                        <a:srgbClr val="F7D4E3"/>
                       </a:solidFill>
                       <a:prstDash val="solid"/>
                     </a:lnT>
                     <a:lnB w="9525" cap="flat" cmpd="sng" algn="ctr">
                       <a:solidFill>
-                        <a:srgbClr val="EFD2DE"/>
+                        <a:srgbClr val="F7D4E3"/>
                       </a:solidFill>
                       <a:prstDash val="solid"/>
                     </a:lnB>
@@ -6655,25 +6655,25 @@
                   <a:tcPr anchor="ctr" marL="73152" marR="73152">
                     <a:lnL w="9525" cap="flat" cmpd="sng" algn="ctr">
                       <a:solidFill>
-                        <a:srgbClr val="EFD2DE"/>
+                        <a:srgbClr val="F7D4E3"/>
                       </a:solidFill>
                       <a:prstDash val="solid"/>
                     </a:lnL>
                     <a:lnR w="9525" cap="flat" cmpd="sng" algn="ctr">
                       <a:solidFill>
-                        <a:srgbClr val="EFD2DE"/>
+                        <a:srgbClr val="F7D4E3"/>
                       </a:solidFill>
                       <a:prstDash val="solid"/>
                     </a:lnR>
                     <a:lnT w="9525" cap="flat" cmpd="sng" algn="ctr">
                       <a:solidFill>
-                        <a:srgbClr val="EFD2DE"/>
+                        <a:srgbClr val="F7D4E3"/>
                       </a:solidFill>
                       <a:prstDash val="solid"/>
                     </a:lnT>
                     <a:lnB w="9525" cap="flat" cmpd="sng" algn="ctr">
                       <a:solidFill>
-                        <a:srgbClr val="EFD2DE"/>
+                        <a:srgbClr val="F7D4E3"/>
                       </a:solidFill>
                       <a:prstDash val="solid"/>
                     </a:lnB>
@@ -6701,25 +6701,25 @@
                   <a:tcPr anchor="ctr" marL="73152" marR="73152">
                     <a:lnL w="9525" cap="flat" cmpd="sng" algn="ctr">
                       <a:solidFill>
-                        <a:srgbClr val="EFD2DE"/>
+                        <a:srgbClr val="F7D4E3"/>
                       </a:solidFill>
                       <a:prstDash val="solid"/>
                     </a:lnL>
                     <a:lnR w="9525" cap="flat" cmpd="sng" algn="ctr">
                       <a:solidFill>
-                        <a:srgbClr val="EFD2DE"/>
+                        <a:srgbClr val="F7D4E3"/>
                       </a:solidFill>
                       <a:prstDash val="solid"/>
                     </a:lnR>
                     <a:lnT w="9525" cap="flat" cmpd="sng" algn="ctr">
                       <a:solidFill>
-                        <a:srgbClr val="EFD2DE"/>
+                        <a:srgbClr val="F7D4E3"/>
                       </a:solidFill>
                       <a:prstDash val="solid"/>
                     </a:lnT>
                     <a:lnB w="9525" cap="flat" cmpd="sng" algn="ctr">
                       <a:solidFill>
-                        <a:srgbClr val="EFD2DE"/>
+                        <a:srgbClr val="F7D4E3"/>
                       </a:solidFill>
                       <a:prstDash val="solid"/>
                     </a:lnB>
@@ -6739,7 +6739,7 @@
                       <a:r>
                         <a:rPr sz="1400" b="1">
                           <a:solidFill>
-                            <a:srgbClr val="742F4C"/>
+                            <a:srgbClr val="6F1F41"/>
                           </a:solidFill>
                         </a:rPr>
                         <a:t>뇌·심장</a:t>
@@ -6749,30 +6749,30 @@
                   <a:tcPr anchor="ctr" marL="73152" marR="73152">
                     <a:lnL w="9525" cap="flat" cmpd="sng" algn="ctr">
                       <a:solidFill>
-                        <a:srgbClr val="EFD2DE"/>
+                        <a:srgbClr val="F7D4E3"/>
                       </a:solidFill>
                       <a:prstDash val="solid"/>
                     </a:lnL>
                     <a:lnR w="9525" cap="flat" cmpd="sng" algn="ctr">
                       <a:solidFill>
-                        <a:srgbClr val="EFD2DE"/>
+                        <a:srgbClr val="F7D4E3"/>
                       </a:solidFill>
                       <a:prstDash val="solid"/>
                     </a:lnR>
                     <a:lnT w="9525" cap="flat" cmpd="sng" algn="ctr">
                       <a:solidFill>
-                        <a:srgbClr val="EFD2DE"/>
+                        <a:srgbClr val="F7D4E3"/>
                       </a:solidFill>
                       <a:prstDash val="solid"/>
                     </a:lnT>
                     <a:lnB w="9525" cap="flat" cmpd="sng" algn="ctr">
                       <a:solidFill>
-                        <a:srgbClr val="EFD2DE"/>
+                        <a:srgbClr val="F7D4E3"/>
                       </a:solidFill>
                       <a:prstDash val="solid"/>
                     </a:lnB>
                     <a:solidFill>
-                      <a:srgbClr val="EFD2DE"/>
+                      <a:srgbClr val="F7D4E3"/>
                     </a:solidFill>
                   </a:tcPr>
                 </a:tc>
@@ -6795,30 +6795,30 @@
                   <a:tcPr anchor="ctr" marL="73152" marR="73152">
                     <a:lnL w="9525" cap="flat" cmpd="sng" algn="ctr">
                       <a:solidFill>
-                        <a:srgbClr val="EFD2DE"/>
+                        <a:srgbClr val="F7D4E3"/>
                       </a:solidFill>
                       <a:prstDash val="solid"/>
                     </a:lnL>
                     <a:lnR w="9525" cap="flat" cmpd="sng" algn="ctr">
                       <a:solidFill>
-                        <a:srgbClr val="EFD2DE"/>
+                        <a:srgbClr val="F7D4E3"/>
                       </a:solidFill>
                       <a:prstDash val="solid"/>
                     </a:lnR>
                     <a:lnT w="9525" cap="flat" cmpd="sng" algn="ctr">
                       <a:solidFill>
-                        <a:srgbClr val="EFD2DE"/>
+                        <a:srgbClr val="F7D4E3"/>
                       </a:solidFill>
                       <a:prstDash val="solid"/>
                     </a:lnT>
                     <a:lnB w="9525" cap="flat" cmpd="sng" algn="ctr">
                       <a:solidFill>
-                        <a:srgbClr val="EFD2DE"/>
+                        <a:srgbClr val="F7D4E3"/>
                       </a:solidFill>
                       <a:prstDash val="solid"/>
                     </a:lnB>
                     <a:solidFill>
-                      <a:srgbClr val="F9F1F4"/>
+                      <a:srgbClr val="FCF3F7"/>
                     </a:solidFill>
                   </a:tcPr>
                 </a:tc>
@@ -6841,30 +6841,30 @@
                   <a:tcPr anchor="ctr" marL="73152" marR="73152">
                     <a:lnL w="9525" cap="flat" cmpd="sng" algn="ctr">
                       <a:solidFill>
-                        <a:srgbClr val="EFD2DE"/>
+                        <a:srgbClr val="F7D4E3"/>
                       </a:solidFill>
                       <a:prstDash val="solid"/>
                     </a:lnL>
                     <a:lnR w="9525" cap="flat" cmpd="sng" algn="ctr">
                       <a:solidFill>
-                        <a:srgbClr val="EFD2DE"/>
+                        <a:srgbClr val="F7D4E3"/>
                       </a:solidFill>
                       <a:prstDash val="solid"/>
                     </a:lnR>
                     <a:lnT w="9525" cap="flat" cmpd="sng" algn="ctr">
                       <a:solidFill>
-                        <a:srgbClr val="EFD2DE"/>
+                        <a:srgbClr val="F7D4E3"/>
                       </a:solidFill>
                       <a:prstDash val="solid"/>
                     </a:lnT>
                     <a:lnB w="9525" cap="flat" cmpd="sng" algn="ctr">
                       <a:solidFill>
-                        <a:srgbClr val="EFD2DE"/>
+                        <a:srgbClr val="F7D4E3"/>
                       </a:solidFill>
                       <a:prstDash val="solid"/>
                     </a:lnB>
                     <a:solidFill>
-                      <a:srgbClr val="F9F1F4"/>
+                      <a:srgbClr val="FCF3F7"/>
                     </a:solidFill>
                   </a:tcPr>
                 </a:tc>
@@ -6887,30 +6887,30 @@
                   <a:tcPr anchor="ctr" marL="73152" marR="73152">
                     <a:lnL w="9525" cap="flat" cmpd="sng" algn="ctr">
                       <a:solidFill>
-                        <a:srgbClr val="EFD2DE"/>
+                        <a:srgbClr val="F7D4E3"/>
                       </a:solidFill>
                       <a:prstDash val="solid"/>
                     </a:lnL>
                     <a:lnR w="9525" cap="flat" cmpd="sng" algn="ctr">
                       <a:solidFill>
-                        <a:srgbClr val="EFD2DE"/>
+                        <a:srgbClr val="F7D4E3"/>
                       </a:solidFill>
                       <a:prstDash val="solid"/>
                     </a:lnR>
                     <a:lnT w="9525" cap="flat" cmpd="sng" algn="ctr">
                       <a:solidFill>
-                        <a:srgbClr val="EFD2DE"/>
+                        <a:srgbClr val="F7D4E3"/>
                       </a:solidFill>
                       <a:prstDash val="solid"/>
                     </a:lnT>
                     <a:lnB w="9525" cap="flat" cmpd="sng" algn="ctr">
                       <a:solidFill>
-                        <a:srgbClr val="EFD2DE"/>
+                        <a:srgbClr val="F7D4E3"/>
                       </a:solidFill>
                       <a:prstDash val="solid"/>
                     </a:lnB>
                     <a:solidFill>
-                      <a:srgbClr val="F9F1F4"/>
+                      <a:srgbClr val="FCF3F7"/>
                     </a:solidFill>
                   </a:tcPr>
                 </a:tc>
@@ -6925,7 +6925,7 @@
                       <a:r>
                         <a:rPr sz="1400" b="1">
                           <a:solidFill>
-                            <a:srgbClr val="742F4C"/>
+                            <a:srgbClr val="6F1F41"/>
                           </a:solidFill>
                         </a:rPr>
                         <a:t>입원·수술</a:t>
@@ -6935,30 +6935,30 @@
                   <a:tcPr anchor="ctr" marL="73152" marR="73152">
                     <a:lnL w="9525" cap="flat" cmpd="sng" algn="ctr">
                       <a:solidFill>
-                        <a:srgbClr val="EFD2DE"/>
+                        <a:srgbClr val="F7D4E3"/>
                       </a:solidFill>
                       <a:prstDash val="solid"/>
                     </a:lnL>
                     <a:lnR w="9525" cap="flat" cmpd="sng" algn="ctr">
                       <a:solidFill>
-                        <a:srgbClr val="EFD2DE"/>
+                        <a:srgbClr val="F7D4E3"/>
                       </a:solidFill>
                       <a:prstDash val="solid"/>
                     </a:lnR>
                     <a:lnT w="9525" cap="flat" cmpd="sng" algn="ctr">
                       <a:solidFill>
-                        <a:srgbClr val="EFD2DE"/>
+                        <a:srgbClr val="F7D4E3"/>
                       </a:solidFill>
                       <a:prstDash val="solid"/>
                     </a:lnT>
                     <a:lnB w="9525" cap="flat" cmpd="sng" algn="ctr">
                       <a:solidFill>
-                        <a:srgbClr val="EFD2DE"/>
+                        <a:srgbClr val="F7D4E3"/>
                       </a:solidFill>
                       <a:prstDash val="solid"/>
                     </a:lnB>
                     <a:solidFill>
-                      <a:srgbClr val="EFD2DE"/>
+                      <a:srgbClr val="F7D4E3"/>
                     </a:solidFill>
                   </a:tcPr>
                 </a:tc>
@@ -6981,25 +6981,25 @@
                   <a:tcPr anchor="ctr" marL="73152" marR="73152">
                     <a:lnL w="9525" cap="flat" cmpd="sng" algn="ctr">
                       <a:solidFill>
-                        <a:srgbClr val="EFD2DE"/>
+                        <a:srgbClr val="F7D4E3"/>
                       </a:solidFill>
                       <a:prstDash val="solid"/>
                     </a:lnL>
                     <a:lnR w="9525" cap="flat" cmpd="sng" algn="ctr">
                       <a:solidFill>
-                        <a:srgbClr val="EFD2DE"/>
+                        <a:srgbClr val="F7D4E3"/>
                       </a:solidFill>
                       <a:prstDash val="solid"/>
                     </a:lnR>
                     <a:lnT w="9525" cap="flat" cmpd="sng" algn="ctr">
                       <a:solidFill>
-                        <a:srgbClr val="EFD2DE"/>
+                        <a:srgbClr val="F7D4E3"/>
                       </a:solidFill>
                       <a:prstDash val="solid"/>
                     </a:lnT>
                     <a:lnB w="9525" cap="flat" cmpd="sng" algn="ctr">
                       <a:solidFill>
-                        <a:srgbClr val="EFD2DE"/>
+                        <a:srgbClr val="F7D4E3"/>
                       </a:solidFill>
                       <a:prstDash val="solid"/>
                     </a:lnB>
@@ -7027,25 +7027,25 @@
                   <a:tcPr anchor="ctr" marL="73152" marR="73152">
                     <a:lnL w="9525" cap="flat" cmpd="sng" algn="ctr">
                       <a:solidFill>
-                        <a:srgbClr val="EFD2DE"/>
+                        <a:srgbClr val="F7D4E3"/>
                       </a:solidFill>
                       <a:prstDash val="solid"/>
                     </a:lnL>
                     <a:lnR w="9525" cap="flat" cmpd="sng" algn="ctr">
                       <a:solidFill>
-                        <a:srgbClr val="EFD2DE"/>
+                        <a:srgbClr val="F7D4E3"/>
                       </a:solidFill>
                       <a:prstDash val="solid"/>
                     </a:lnR>
                     <a:lnT w="9525" cap="flat" cmpd="sng" algn="ctr">
                       <a:solidFill>
-                        <a:srgbClr val="EFD2DE"/>
+                        <a:srgbClr val="F7D4E3"/>
                       </a:solidFill>
                       <a:prstDash val="solid"/>
                     </a:lnT>
                     <a:lnB w="9525" cap="flat" cmpd="sng" algn="ctr">
                       <a:solidFill>
-                        <a:srgbClr val="EFD2DE"/>
+                        <a:srgbClr val="F7D4E3"/>
                       </a:solidFill>
                       <a:prstDash val="solid"/>
                     </a:lnB>
@@ -7073,25 +7073,25 @@
                   <a:tcPr anchor="ctr" marL="73152" marR="73152">
                     <a:lnL w="9525" cap="flat" cmpd="sng" algn="ctr">
                       <a:solidFill>
-                        <a:srgbClr val="EFD2DE"/>
+                        <a:srgbClr val="F7D4E3"/>
                       </a:solidFill>
                       <a:prstDash val="solid"/>
                     </a:lnL>
                     <a:lnR w="9525" cap="flat" cmpd="sng" algn="ctr">
                       <a:solidFill>
-                        <a:srgbClr val="EFD2DE"/>
+                        <a:srgbClr val="F7D4E3"/>
                       </a:solidFill>
                       <a:prstDash val="solid"/>
                     </a:lnR>
                     <a:lnT w="9525" cap="flat" cmpd="sng" algn="ctr">
                       <a:solidFill>
-                        <a:srgbClr val="EFD2DE"/>
+                        <a:srgbClr val="F7D4E3"/>
                       </a:solidFill>
                       <a:prstDash val="solid"/>
                     </a:lnT>
                     <a:lnB w="9525" cap="flat" cmpd="sng" algn="ctr">
                       <a:solidFill>
-                        <a:srgbClr val="EFD2DE"/>
+                        <a:srgbClr val="F7D4E3"/>
                       </a:solidFill>
                       <a:prstDash val="solid"/>
                     </a:lnB>
@@ -7111,7 +7111,7 @@
                       <a:r>
                         <a:rPr sz="1400" b="1">
                           <a:solidFill>
-                            <a:srgbClr val="742F4C"/>
+                            <a:srgbClr val="6F1F41"/>
                           </a:solidFill>
                         </a:rPr>
                         <a:t>상해</a:t>
@@ -7121,30 +7121,30 @@
                   <a:tcPr anchor="ctr" marL="73152" marR="73152">
                     <a:lnL w="9525" cap="flat" cmpd="sng" algn="ctr">
                       <a:solidFill>
-                        <a:srgbClr val="EFD2DE"/>
+                        <a:srgbClr val="F7D4E3"/>
                       </a:solidFill>
                       <a:prstDash val="solid"/>
                     </a:lnL>
                     <a:lnR w="9525" cap="flat" cmpd="sng" algn="ctr">
                       <a:solidFill>
-                        <a:srgbClr val="EFD2DE"/>
+                        <a:srgbClr val="F7D4E3"/>
                       </a:solidFill>
                       <a:prstDash val="solid"/>
                     </a:lnR>
                     <a:lnT w="9525" cap="flat" cmpd="sng" algn="ctr">
                       <a:solidFill>
-                        <a:srgbClr val="EFD2DE"/>
+                        <a:srgbClr val="F7D4E3"/>
                       </a:solidFill>
                       <a:prstDash val="solid"/>
                     </a:lnT>
                     <a:lnB w="9525" cap="flat" cmpd="sng" algn="ctr">
                       <a:solidFill>
-                        <a:srgbClr val="EFD2DE"/>
+                        <a:srgbClr val="F7D4E3"/>
                       </a:solidFill>
                       <a:prstDash val="solid"/>
                     </a:lnB>
                     <a:solidFill>
-                      <a:srgbClr val="EFD2DE"/>
+                      <a:srgbClr val="F7D4E3"/>
                     </a:solidFill>
                   </a:tcPr>
                 </a:tc>
@@ -7167,30 +7167,30 @@
                   <a:tcPr anchor="ctr" marL="73152" marR="73152">
                     <a:lnL w="9525" cap="flat" cmpd="sng" algn="ctr">
                       <a:solidFill>
-                        <a:srgbClr val="EFD2DE"/>
+                        <a:srgbClr val="F7D4E3"/>
                       </a:solidFill>
                       <a:prstDash val="solid"/>
                     </a:lnL>
                     <a:lnR w="9525" cap="flat" cmpd="sng" algn="ctr">
                       <a:solidFill>
-                        <a:srgbClr val="EFD2DE"/>
+                        <a:srgbClr val="F7D4E3"/>
                       </a:solidFill>
                       <a:prstDash val="solid"/>
                     </a:lnR>
                     <a:lnT w="9525" cap="flat" cmpd="sng" algn="ctr">
                       <a:solidFill>
-                        <a:srgbClr val="EFD2DE"/>
+                        <a:srgbClr val="F7D4E3"/>
                       </a:solidFill>
                       <a:prstDash val="solid"/>
                     </a:lnT>
                     <a:lnB w="9525" cap="flat" cmpd="sng" algn="ctr">
                       <a:solidFill>
-                        <a:srgbClr val="EFD2DE"/>
+                        <a:srgbClr val="F7D4E3"/>
                       </a:solidFill>
                       <a:prstDash val="solid"/>
                     </a:lnB>
                     <a:solidFill>
-                      <a:srgbClr val="F9F1F4"/>
+                      <a:srgbClr val="FCF3F7"/>
                     </a:solidFill>
                   </a:tcPr>
                 </a:tc>
@@ -7213,30 +7213,30 @@
                   <a:tcPr anchor="ctr" marL="73152" marR="73152">
                     <a:lnL w="9525" cap="flat" cmpd="sng" algn="ctr">
                       <a:solidFill>
-                        <a:srgbClr val="EFD2DE"/>
+                        <a:srgbClr val="F7D4E3"/>
                       </a:solidFill>
                       <a:prstDash val="solid"/>
                     </a:lnL>
                     <a:lnR w="9525" cap="flat" cmpd="sng" algn="ctr">
                       <a:solidFill>
-                        <a:srgbClr val="EFD2DE"/>
+                        <a:srgbClr val="F7D4E3"/>
                       </a:solidFill>
                       <a:prstDash val="solid"/>
                     </a:lnR>
                     <a:lnT w="9525" cap="flat" cmpd="sng" algn="ctr">
                       <a:solidFill>
-                        <a:srgbClr val="EFD2DE"/>
+                        <a:srgbClr val="F7D4E3"/>
                       </a:solidFill>
                       <a:prstDash val="solid"/>
                     </a:lnT>
                     <a:lnB w="9525" cap="flat" cmpd="sng" algn="ctr">
                       <a:solidFill>
-                        <a:srgbClr val="EFD2DE"/>
+                        <a:srgbClr val="F7D4E3"/>
                       </a:solidFill>
                       <a:prstDash val="solid"/>
                     </a:lnB>
                     <a:solidFill>
-                      <a:srgbClr val="F9F1F4"/>
+                      <a:srgbClr val="FCF3F7"/>
                     </a:solidFill>
                   </a:tcPr>
                 </a:tc>
@@ -7259,30 +7259,30 @@
                   <a:tcPr anchor="ctr" marL="73152" marR="73152">
                     <a:lnL w="9525" cap="flat" cmpd="sng" algn="ctr">
                       <a:solidFill>
-                        <a:srgbClr val="EFD2DE"/>
+                        <a:srgbClr val="F7D4E3"/>
                       </a:solidFill>
                       <a:prstDash val="solid"/>
                     </a:lnL>
                     <a:lnR w="9525" cap="flat" cmpd="sng" algn="ctr">
                       <a:solidFill>
-                        <a:srgbClr val="EFD2DE"/>
+                        <a:srgbClr val="F7D4E3"/>
                       </a:solidFill>
                       <a:prstDash val="solid"/>
                     </a:lnR>
                     <a:lnT w="9525" cap="flat" cmpd="sng" algn="ctr">
                       <a:solidFill>
-                        <a:srgbClr val="EFD2DE"/>
+                        <a:srgbClr val="F7D4E3"/>
                       </a:solidFill>
                       <a:prstDash val="solid"/>
                     </a:lnT>
                     <a:lnB w="9525" cap="flat" cmpd="sng" algn="ctr">
                       <a:solidFill>
-                        <a:srgbClr val="EFD2DE"/>
+                        <a:srgbClr val="F7D4E3"/>
                       </a:solidFill>
                       <a:prstDash val="solid"/>
                     </a:lnB>
                     <a:solidFill>
-                      <a:srgbClr val="F9F1F4"/>
+                      <a:srgbClr val="FCF3F7"/>
                     </a:solidFill>
                   </a:tcPr>
                 </a:tc>
@@ -7297,7 +7297,7 @@
                       <a:r>
                         <a:rPr sz="1400" b="1">
                           <a:solidFill>
-                            <a:srgbClr val="742F4C"/>
+                            <a:srgbClr val="6F1F41"/>
                           </a:solidFill>
                         </a:rPr>
                         <a:t>실손의료</a:t>
@@ -7307,30 +7307,30 @@
                   <a:tcPr anchor="ctr" marL="73152" marR="73152">
                     <a:lnL w="9525" cap="flat" cmpd="sng" algn="ctr">
                       <a:solidFill>
-                        <a:srgbClr val="EFD2DE"/>
+                        <a:srgbClr val="F7D4E3"/>
                       </a:solidFill>
                       <a:prstDash val="solid"/>
                     </a:lnL>
                     <a:lnR w="9525" cap="flat" cmpd="sng" algn="ctr">
                       <a:solidFill>
-                        <a:srgbClr val="EFD2DE"/>
+                        <a:srgbClr val="F7D4E3"/>
                       </a:solidFill>
                       <a:prstDash val="solid"/>
                     </a:lnR>
                     <a:lnT w="9525" cap="flat" cmpd="sng" algn="ctr">
                       <a:solidFill>
-                        <a:srgbClr val="EFD2DE"/>
+                        <a:srgbClr val="F7D4E3"/>
                       </a:solidFill>
                       <a:prstDash val="solid"/>
                     </a:lnT>
                     <a:lnB w="9525" cap="flat" cmpd="sng" algn="ctr">
                       <a:solidFill>
-                        <a:srgbClr val="EFD2DE"/>
+                        <a:srgbClr val="F7D4E3"/>
                       </a:solidFill>
                       <a:prstDash val="solid"/>
                     </a:lnB>
                     <a:solidFill>
-                      <a:srgbClr val="EFD2DE"/>
+                      <a:srgbClr val="F7D4E3"/>
                     </a:solidFill>
                   </a:tcPr>
                 </a:tc>
@@ -7353,25 +7353,25 @@
                   <a:tcPr anchor="ctr" marL="73152" marR="73152">
                     <a:lnL w="9525" cap="flat" cmpd="sng" algn="ctr">
                       <a:solidFill>
-                        <a:srgbClr val="EFD2DE"/>
+                        <a:srgbClr val="F7D4E3"/>
                       </a:solidFill>
                       <a:prstDash val="solid"/>
                     </a:lnL>
                     <a:lnR w="9525" cap="flat" cmpd="sng" algn="ctr">
                       <a:solidFill>
-                        <a:srgbClr val="EFD2DE"/>
+                        <a:srgbClr val="F7D4E3"/>
                       </a:solidFill>
                       <a:prstDash val="solid"/>
                     </a:lnR>
                     <a:lnT w="9525" cap="flat" cmpd="sng" algn="ctr">
                       <a:solidFill>
-                        <a:srgbClr val="EFD2DE"/>
+                        <a:srgbClr val="F7D4E3"/>
                       </a:solidFill>
                       <a:prstDash val="solid"/>
                     </a:lnT>
                     <a:lnB w="9525" cap="flat" cmpd="sng" algn="ctr">
                       <a:solidFill>
-                        <a:srgbClr val="EFD2DE"/>
+                        <a:srgbClr val="F7D4E3"/>
                       </a:solidFill>
                       <a:prstDash val="solid"/>
                     </a:lnB>
@@ -7399,25 +7399,25 @@
                   <a:tcPr anchor="ctr" marL="73152" marR="73152">
                     <a:lnL w="9525" cap="flat" cmpd="sng" algn="ctr">
                       <a:solidFill>
-                        <a:srgbClr val="EFD2DE"/>
+                        <a:srgbClr val="F7D4E3"/>
                       </a:solidFill>
                       <a:prstDash val="solid"/>
                     </a:lnL>
                     <a:lnR w="9525" cap="flat" cmpd="sng" algn="ctr">
                       <a:solidFill>
-                        <a:srgbClr val="EFD2DE"/>
+                        <a:srgbClr val="F7D4E3"/>
                       </a:solidFill>
                       <a:prstDash val="solid"/>
                     </a:lnR>
                     <a:lnT w="9525" cap="flat" cmpd="sng" algn="ctr">
                       <a:solidFill>
-                        <a:srgbClr val="EFD2DE"/>
+                        <a:srgbClr val="F7D4E3"/>
                       </a:solidFill>
                       <a:prstDash val="solid"/>
                     </a:lnT>
                     <a:lnB w="9525" cap="flat" cmpd="sng" algn="ctr">
                       <a:solidFill>
-                        <a:srgbClr val="EFD2DE"/>
+                        <a:srgbClr val="F7D4E3"/>
                       </a:solidFill>
                       <a:prstDash val="solid"/>
                     </a:lnB>
@@ -7445,25 +7445,25 @@
                   <a:tcPr anchor="ctr" marL="73152" marR="73152">
                     <a:lnL w="9525" cap="flat" cmpd="sng" algn="ctr">
                       <a:solidFill>
-                        <a:srgbClr val="EFD2DE"/>
+                        <a:srgbClr val="F7D4E3"/>
                       </a:solidFill>
                       <a:prstDash val="solid"/>
                     </a:lnL>
                     <a:lnR w="9525" cap="flat" cmpd="sng" algn="ctr">
                       <a:solidFill>
-                        <a:srgbClr val="EFD2DE"/>
+                        <a:srgbClr val="F7D4E3"/>
                       </a:solidFill>
                       <a:prstDash val="solid"/>
                     </a:lnR>
                     <a:lnT w="9525" cap="flat" cmpd="sng" algn="ctr">
                       <a:solidFill>
-                        <a:srgbClr val="EFD2DE"/>
+                        <a:srgbClr val="F7D4E3"/>
                       </a:solidFill>
                       <a:prstDash val="solid"/>
                     </a:lnT>
                     <a:lnB w="9525" cap="flat" cmpd="sng" algn="ctr">
                       <a:solidFill>
-                        <a:srgbClr val="EFD2DE"/>
+                        <a:srgbClr val="F7D4E3"/>
                       </a:solidFill>
                       <a:prstDash val="solid"/>
                     </a:lnB>
@@ -7483,7 +7483,7 @@
                       <a:r>
                         <a:rPr sz="1400" b="1">
                           <a:solidFill>
-                            <a:srgbClr val="742F4C"/>
+                            <a:srgbClr val="6F1F41"/>
                           </a:solidFill>
                         </a:rPr>
                         <a:t>연금·노후자금</a:t>
@@ -7493,30 +7493,30 @@
                   <a:tcPr anchor="ctr" marL="73152" marR="73152">
                     <a:lnL w="9525" cap="flat" cmpd="sng" algn="ctr">
                       <a:solidFill>
-                        <a:srgbClr val="EFD2DE"/>
+                        <a:srgbClr val="F7D4E3"/>
                       </a:solidFill>
                       <a:prstDash val="solid"/>
                     </a:lnL>
                     <a:lnR w="9525" cap="flat" cmpd="sng" algn="ctr">
                       <a:solidFill>
-                        <a:srgbClr val="EFD2DE"/>
+                        <a:srgbClr val="F7D4E3"/>
                       </a:solidFill>
                       <a:prstDash val="solid"/>
                     </a:lnR>
                     <a:lnT w="9525" cap="flat" cmpd="sng" algn="ctr">
                       <a:solidFill>
-                        <a:srgbClr val="EFD2DE"/>
+                        <a:srgbClr val="F7D4E3"/>
                       </a:solidFill>
                       <a:prstDash val="solid"/>
                     </a:lnT>
                     <a:lnB w="9525" cap="flat" cmpd="sng" algn="ctr">
                       <a:solidFill>
-                        <a:srgbClr val="EFD2DE"/>
+                        <a:srgbClr val="F7D4E3"/>
                       </a:solidFill>
                       <a:prstDash val="solid"/>
                     </a:lnB>
                     <a:solidFill>
-                      <a:srgbClr val="EFD2DE"/>
+                      <a:srgbClr val="F7D4E3"/>
                     </a:solidFill>
                   </a:tcPr>
                 </a:tc>
@@ -7539,30 +7539,30 @@
                   <a:tcPr anchor="ctr" marL="73152" marR="73152">
                     <a:lnL w="9525" cap="flat" cmpd="sng" algn="ctr">
                       <a:solidFill>
-                        <a:srgbClr val="EFD2DE"/>
+                        <a:srgbClr val="F7D4E3"/>
                       </a:solidFill>
                       <a:prstDash val="solid"/>
                     </a:lnL>
                     <a:lnR w="9525" cap="flat" cmpd="sng" algn="ctr">
                       <a:solidFill>
-                        <a:srgbClr val="EFD2DE"/>
+                        <a:srgbClr val="F7D4E3"/>
                       </a:solidFill>
                       <a:prstDash val="solid"/>
                     </a:lnR>
                     <a:lnT w="9525" cap="flat" cmpd="sng" algn="ctr">
                       <a:solidFill>
-                        <a:srgbClr val="EFD2DE"/>
+                        <a:srgbClr val="F7D4E3"/>
                       </a:solidFill>
                       <a:prstDash val="solid"/>
                     </a:lnT>
                     <a:lnB w="9525" cap="flat" cmpd="sng" algn="ctr">
                       <a:solidFill>
-                        <a:srgbClr val="EFD2DE"/>
+                        <a:srgbClr val="F7D4E3"/>
                       </a:solidFill>
                       <a:prstDash val="solid"/>
                     </a:lnB>
                     <a:solidFill>
-                      <a:srgbClr val="F9F1F4"/>
+                      <a:srgbClr val="FCF3F7"/>
                     </a:solidFill>
                   </a:tcPr>
                 </a:tc>
@@ -7585,30 +7585,30 @@
                   <a:tcPr anchor="ctr" marL="73152" marR="73152">
                     <a:lnL w="9525" cap="flat" cmpd="sng" algn="ctr">
                       <a:solidFill>
-                        <a:srgbClr val="EFD2DE"/>
+                        <a:srgbClr val="F7D4E3"/>
                       </a:solidFill>
                       <a:prstDash val="solid"/>
                     </a:lnL>
                     <a:lnR w="9525" cap="flat" cmpd="sng" algn="ctr">
                       <a:solidFill>
-                        <a:srgbClr val="EFD2DE"/>
+                        <a:srgbClr val="F7D4E3"/>
                       </a:solidFill>
                       <a:prstDash val="solid"/>
                     </a:lnR>
                     <a:lnT w="9525" cap="flat" cmpd="sng" algn="ctr">
                       <a:solidFill>
-                        <a:srgbClr val="EFD2DE"/>
+                        <a:srgbClr val="F7D4E3"/>
                       </a:solidFill>
                       <a:prstDash val="solid"/>
                     </a:lnT>
                     <a:lnB w="9525" cap="flat" cmpd="sng" algn="ctr">
                       <a:solidFill>
-                        <a:srgbClr val="EFD2DE"/>
+                        <a:srgbClr val="F7D4E3"/>
                       </a:solidFill>
                       <a:prstDash val="solid"/>
                     </a:lnB>
                     <a:solidFill>
-                      <a:srgbClr val="F9F1F4"/>
+                      <a:srgbClr val="FCF3F7"/>
                     </a:solidFill>
                   </a:tcPr>
                 </a:tc>
@@ -7631,30 +7631,30 @@
                   <a:tcPr anchor="ctr" marL="73152" marR="73152">
                     <a:lnL w="9525" cap="flat" cmpd="sng" algn="ctr">
                       <a:solidFill>
-                        <a:srgbClr val="EFD2DE"/>
+                        <a:srgbClr val="F7D4E3"/>
                       </a:solidFill>
                       <a:prstDash val="solid"/>
                     </a:lnL>
                     <a:lnR w="9525" cap="flat" cmpd="sng" algn="ctr">
                       <a:solidFill>
-                        <a:srgbClr val="EFD2DE"/>
+                        <a:srgbClr val="F7D4E3"/>
                       </a:solidFill>
                       <a:prstDash val="solid"/>
                     </a:lnR>
                     <a:lnT w="9525" cap="flat" cmpd="sng" algn="ctr">
                       <a:solidFill>
-                        <a:srgbClr val="EFD2DE"/>
+                        <a:srgbClr val="F7D4E3"/>
                       </a:solidFill>
                       <a:prstDash val="solid"/>
                     </a:lnT>
                     <a:lnB w="9525" cap="flat" cmpd="sng" algn="ctr">
                       <a:solidFill>
-                        <a:srgbClr val="EFD2DE"/>
+                        <a:srgbClr val="F7D4E3"/>
                       </a:solidFill>
                       <a:prstDash val="solid"/>
                     </a:lnB>
                     <a:solidFill>
-                      <a:srgbClr val="F9F1F4"/>
+                      <a:srgbClr val="FCF3F7"/>
                     </a:solidFill>
                   </a:tcPr>
                 </a:tc>
@@ -7677,7 +7677,7 @@
     <p:bg>
       <p:bgPr>
         <a:solidFill>
-          <a:srgbClr val="F9F1F4"/>
+          <a:srgbClr val="FCF3F7"/>
         </a:solidFill>
         <a:effectLst/>
       </p:bgPr>
@@ -7704,7 +7704,7 @@
             <a:avLst/>
           </a:prstGeom>
           <a:solidFill>
-            <a:srgbClr val="B8517C"/>
+            <a:srgbClr val="CD4C82"/>
           </a:solidFill>
           <a:ln>
             <a:noFill/>
@@ -7733,7 +7733,7 @@
             <a:avLst/>
           </a:prstGeom>
           <a:solidFill>
-            <a:srgbClr val="3B9142"/>
+            <a:srgbClr val="339941"/>
           </a:solidFill>
           <a:ln>
             <a:noFill/>
@@ -7777,7 +7777,7 @@
             <a:r>
               <a:rPr sz="3000" b="1" i="0">
                 <a:solidFill>
-                  <a:srgbClr val="742F4C"/>
+                  <a:srgbClr val="6F1F41"/>
                 </a:solidFill>
               </a:rPr>
               <a:t>월 보험료 한눈에</a:t>
@@ -7802,11 +7802,11 @@
             </a:avLst>
           </a:prstGeom>
           <a:solidFill>
-            <a:srgbClr val="F9F1F4"/>
+            <a:srgbClr val="FCF3F7"/>
           </a:solidFill>
           <a:ln w="15875">
             <a:solidFill>
-              <a:srgbClr val="EFD2DE"/>
+              <a:srgbClr val="F7D4E3"/>
             </a:solidFill>
           </a:ln>
         </p:spPr>
@@ -7833,7 +7833,7 @@
             <a:avLst/>
           </a:prstGeom>
           <a:solidFill>
-            <a:srgbClr val="B8517C"/>
+            <a:srgbClr val="CD4C82"/>
           </a:solidFill>
           <a:ln>
             <a:noFill/>
@@ -7891,7 +7891,7 @@
             <a:r>
               <a:rPr sz="1700" b="1" i="0">
                 <a:solidFill>
-                  <a:srgbClr val="742F4C"/>
+                  <a:srgbClr val="6F1F41"/>
                 </a:solidFill>
               </a:rPr>
               <a:t>월 보험료 합계</a:t>
@@ -7954,11 +7954,11 @@
             </a:avLst>
           </a:prstGeom>
           <a:solidFill>
-            <a:srgbClr val="F9F1F4"/>
+            <a:srgbClr val="FCF3F7"/>
           </a:solidFill>
           <a:ln w="15875">
             <a:solidFill>
-              <a:srgbClr val="EFD2DE"/>
+              <a:srgbClr val="F7D4E3"/>
             </a:solidFill>
           </a:ln>
         </p:spPr>
@@ -7985,7 +7985,7 @@
             <a:avLst/>
           </a:prstGeom>
           <a:solidFill>
-            <a:srgbClr val="B8517C"/>
+            <a:srgbClr val="CD4C82"/>
           </a:solidFill>
           <a:ln>
             <a:noFill/>
@@ -8043,7 +8043,7 @@
             <a:r>
               <a:rPr sz="1700" b="1" i="0">
                 <a:solidFill>
-                  <a:srgbClr val="742F4C"/>
+                  <a:srgbClr val="6F1F41"/>
                 </a:solidFill>
               </a:rPr>
               <a:t>연 보험료 합계</a:t>
@@ -8106,11 +8106,11 @@
             </a:avLst>
           </a:prstGeom>
           <a:solidFill>
-            <a:srgbClr val="F9F1F4"/>
+            <a:srgbClr val="FCF3F7"/>
           </a:solidFill>
           <a:ln w="15875">
             <a:solidFill>
-              <a:srgbClr val="EFD2DE"/>
+              <a:srgbClr val="F7D4E3"/>
             </a:solidFill>
           </a:ln>
         </p:spPr>
@@ -8137,7 +8137,7 @@
             <a:avLst/>
           </a:prstGeom>
           <a:solidFill>
-            <a:srgbClr val="B8517C"/>
+            <a:srgbClr val="CD4C82"/>
           </a:solidFill>
           <a:ln>
             <a:noFill/>
@@ -8195,7 +8195,7 @@
             <a:r>
               <a:rPr sz="1700" b="1" i="0">
                 <a:solidFill>
-                  <a:srgbClr val="742F4C"/>
+                  <a:srgbClr val="6F1F41"/>
                 </a:solidFill>
               </a:rPr>
               <a:t>월 소득 대비</a:t>
@@ -8293,7 +8293,7 @@
     <p:bg>
       <p:bgPr>
         <a:solidFill>
-          <a:srgbClr val="F9F1F4"/>
+          <a:srgbClr val="FCF3F7"/>
         </a:solidFill>
         <a:effectLst/>
       </p:bgPr>
@@ -8320,7 +8320,7 @@
             <a:avLst/>
           </a:prstGeom>
           <a:solidFill>
-            <a:srgbClr val="B8517C"/>
+            <a:srgbClr val="CD4C82"/>
           </a:solidFill>
           <a:ln>
             <a:noFill/>
@@ -8349,7 +8349,7 @@
             <a:avLst/>
           </a:prstGeom>
           <a:solidFill>
-            <a:srgbClr val="3B9142"/>
+            <a:srgbClr val="339941"/>
           </a:solidFill>
           <a:ln>
             <a:noFill/>
@@ -8393,7 +8393,7 @@
             <a:r>
               <a:rPr sz="3000" b="1" i="0">
                 <a:solidFill>
-                  <a:srgbClr val="742F4C"/>
+                  <a:srgbClr val="6F1F41"/>
                 </a:solidFill>
               </a:rPr>
               <a:t>점검 메모와 다음 할 일</a:t>
@@ -8418,11 +8418,11 @@
             </a:avLst>
           </a:prstGeom>
           <a:solidFill>
-            <a:srgbClr val="F9F1F4"/>
+            <a:srgbClr val="FCF3F7"/>
           </a:solidFill>
           <a:ln w="15875">
             <a:solidFill>
-              <a:srgbClr val="EFD2DE"/>
+              <a:srgbClr val="F7D4E3"/>
             </a:solidFill>
           </a:ln>
         </p:spPr>
@@ -8449,7 +8449,7 @@
             <a:avLst/>
           </a:prstGeom>
           <a:solidFill>
-            <a:srgbClr val="B8517C"/>
+            <a:srgbClr val="CD4C82"/>
           </a:solidFill>
           <a:ln>
             <a:noFill/>
@@ -8507,7 +8507,7 @@
             <a:r>
               <a:rPr sz="1800" b="1" i="0">
                 <a:solidFill>
-                  <a:srgbClr val="742F4C"/>
+                  <a:srgbClr val="6F1F41"/>
                 </a:solidFill>
               </a:rPr>
               <a:t>확인할 것</a:t>
@@ -8570,11 +8570,11 @@
             </a:avLst>
           </a:prstGeom>
           <a:solidFill>
-            <a:srgbClr val="F9F1F4"/>
+            <a:srgbClr val="FCF3F7"/>
           </a:solidFill>
           <a:ln w="15875">
             <a:solidFill>
-              <a:srgbClr val="EFD2DE"/>
+              <a:srgbClr val="F7D4E3"/>
             </a:solidFill>
           </a:ln>
         </p:spPr>
@@ -8601,7 +8601,7 @@
             <a:avLst/>
           </a:prstGeom>
           <a:solidFill>
-            <a:srgbClr val="B8517C"/>
+            <a:srgbClr val="CD4C82"/>
           </a:solidFill>
           <a:ln>
             <a:noFill/>
@@ -8659,7 +8659,7 @@
             <a:r>
               <a:rPr sz="1800" b="1" i="0">
                 <a:solidFill>
-                  <a:srgbClr val="742F4C"/>
+                  <a:srgbClr val="6F1F41"/>
                 </a:solidFill>
               </a:rPr>
               <a:t>문의할 것</a:t>
@@ -8722,11 +8722,11 @@
             </a:avLst>
           </a:prstGeom>
           <a:solidFill>
-            <a:srgbClr val="F9F1F4"/>
+            <a:srgbClr val="FCF3F7"/>
           </a:solidFill>
           <a:ln w="15875">
             <a:solidFill>
-              <a:srgbClr val="EFD2DE"/>
+              <a:srgbClr val="F7D4E3"/>
             </a:solidFill>
           </a:ln>
         </p:spPr>
@@ -8753,7 +8753,7 @@
             <a:avLst/>
           </a:prstGeom>
           <a:solidFill>
-            <a:srgbClr val="B8517C"/>
+            <a:srgbClr val="CD4C82"/>
           </a:solidFill>
           <a:ln>
             <a:noFill/>
@@ -8811,7 +8811,7 @@
             <a:r>
               <a:rPr sz="1800" b="1" i="0">
                 <a:solidFill>
-                  <a:srgbClr val="742F4C"/>
+                  <a:srgbClr val="6F1F41"/>
                 </a:solidFill>
               </a:rPr>
               <a:t>정리할 날짜</a:t>
@@ -8914,34 +8914,34 @@
         <a:sysClr val="window" lastClr="FFFFFF"/>
       </a:lt1>
       <a:dk2>
-        <a:srgbClr val="742F4C"/>
+        <a:srgbClr val="6F1F41"/>
       </a:dk2>
       <a:lt2>
-        <a:srgbClr val="F9F1F4"/>
+        <a:srgbClr val="FCF3F7"/>
       </a:lt2>
       <a:accent1>
-        <a:srgbClr val="B8517C"/>
+        <a:srgbClr val="CD4C82"/>
       </a:accent1>
       <a:accent2>
-        <a:srgbClr val="3B9142"/>
+        <a:srgbClr val="339941"/>
       </a:accent2>
       <a:accent3>
-        <a:srgbClr val="742F4C"/>
+        <a:srgbClr val="6F1F41"/>
       </a:accent3>
       <a:accent4>
-        <a:srgbClr val="EFD2DE"/>
+        <a:srgbClr val="F7D4E3"/>
       </a:accent4>
       <a:accent5>
-        <a:srgbClr val="7A715F"/>
+        <a:srgbClr val="807262"/>
       </a:accent5>
       <a:accent6>
-        <a:srgbClr val="AC8294"/>
+        <a:srgbClr val="A9798D"/>
       </a:accent6>
       <a:hlink>
-        <a:srgbClr val="B8517C"/>
+        <a:srgbClr val="CD4C82"/>
       </a:hlink>
       <a:folHlink>
-        <a:srgbClr val="742F4C"/>
+        <a:srgbClr val="6F1F41"/>
       </a:folHlink>
     </a:clrScheme>
     <a:fontScheme name="Office">

--- a/public/fun/pack/pptx/review/보장점검양식_01_본인점검_외갓집매화.pptx
+++ b/public/fun/pack/pptx/review/보장점검양식_01_본인점검_외갓집매화.pptx
@@ -3286,6 +3286,14 @@
 <file path=ppt/slides/slide1.xml><?xml version="1.0" encoding="utf-8"?>
 <p:sld xmlns:a="http://schemas.openxmlformats.org/drawingml/2006/main" xmlns:p="http://schemas.openxmlformats.org/presentationml/2006/main" xmlns:r="http://schemas.openxmlformats.org/officeDocument/2006/relationships">
   <p:cSld>
+    <p:bg>
+      <p:bgPr>
+        <a:solidFill>
+          <a:srgbClr val="FDEAF2"/>
+        </a:solidFill>
+        <a:effectLst/>
+      </p:bgPr>
+    </p:bg>
     <p:spTree>
       <p:nvGrpSpPr>
         <p:cNvPr id="1" name=""/>
@@ -3293,30 +3301,102 @@
         <p:nvPr/>
       </p:nvGrpSpPr>
       <p:grpSpPr/>
-      <p:pic>
-        <p:nvPicPr>
-          <p:cNvPr id="3" name="표지 그림" descr="review-01.jpg"/>
-          <p:cNvPicPr>
-            <a:picLocks noChangeAspect="1"/>
-          </p:cNvPicPr>
+      <p:sp>
+        <p:nvSpPr>
+          <p:cNvPr id="3" name="장식"/>
+          <p:cNvSpPr/>
           <p:nvPr/>
-        </p:nvPicPr>
-        <p:blipFill>
-          <a:blip r:embed="rId2"/>
-          <a:stretch>
-            <a:fillRect/>
-          </a:stretch>
-        </p:blipFill>
-        <p:spPr>
-          <a:xfrm>
-            <a:off x="0" y="0"/>
-            <a:ext cx="12191695" cy="6858000"/>
+        </p:nvSpPr>
+        <p:spPr>
+          <a:xfrm>
+            <a:off x="7802684" y="0"/>
+            <a:ext cx="4389010" cy="6858000"/>
           </a:xfrm>
           <a:prstGeom prst="rect">
             <a:avLst/>
           </a:prstGeom>
-        </p:spPr>
-      </p:pic>
+          <a:solidFill>
+            <a:srgbClr val="ED97BB"/>
+          </a:solidFill>
+          <a:ln>
+            <a:noFill/>
+          </a:ln>
+        </p:spPr>
+        <p:txBody>
+          <a:bodyPr rtlCol="0" anchor="ctr"/>
+          <a:lstStyle/>
+          <a:p>
+            <a:pPr algn="ctr"/>
+          </a:p>
+        </p:txBody>
+      </p:sp>
+      <p:sp>
+        <p:nvSpPr>
+          <p:cNvPr id="4" name="장식"/>
+          <p:cNvSpPr/>
+          <p:nvPr/>
+        </p:nvSpPr>
+        <p:spPr>
+          <a:xfrm>
+            <a:off x="8168435" y="365760"/>
+            <a:ext cx="3657508" cy="6126480"/>
+          </a:xfrm>
+          <a:prstGeom prst="rect">
+            <a:avLst/>
+          </a:prstGeom>
+          <a:noFill/>
+          <a:ln w="9525">
+            <a:solidFill>
+              <a:srgbClr val="26231F"/>
+            </a:solidFill>
+          </a:ln>
+        </p:spPr>
+        <p:txBody>
+          <a:bodyPr rtlCol="0" anchor="ctr"/>
+          <a:lstStyle/>
+          <a:p>
+            <a:pPr algn="ctr"/>
+          </a:p>
+        </p:txBody>
+      </p:sp>
+      <p:sp>
+        <p:nvSpPr>
+          <p:cNvPr id="5" name="라벨"/>
+          <p:cNvSpPr txBox="1"/>
+          <p:nvPr/>
+        </p:nvSpPr>
+        <p:spPr>
+          <a:xfrm>
+            <a:off x="822960" y="2148840"/>
+            <a:ext cx="5608179" cy="274320"/>
+          </a:xfrm>
+          <a:prstGeom prst="rect">
+            <a:avLst/>
+          </a:prstGeom>
+          <a:noFill/>
+        </p:spPr>
+        <p:txBody>
+          <a:bodyPr wrap="square" lIns="54864" rIns="54864" tIns="27432" bIns="27432" anchor="t">
+            <a:noAutofit/>
+          </a:bodyPr>
+          <a:lstStyle/>
+          <a:p>
+            <a:pPr algn="l">
+              <a:lnSpc>
+                <a:spcPct val="115000"/>
+              </a:lnSpc>
+            </a:pPr>
+            <a:r>
+              <a:rPr sz="1000" b="1" i="0" spc="250">
+                <a:solidFill>
+                  <a:srgbClr val="26231F"/>
+                </a:solidFill>
+              </a:rPr>
+              <a:t>INSURANCE CHECK</a:t>
+            </a:r>
+          </a:p>
+        </p:txBody>
+      </p:sp>
       <p:sp>
         <p:nvSpPr>
           <p:cNvPr id="2" name="Title 1"/>
@@ -3329,8 +3409,8 @@
         </p:nvSpPr>
         <p:spPr>
           <a:xfrm>
-            <a:off x="853418" y="2057400"/>
-            <a:ext cx="6095847" cy="1554480"/>
+            <a:off x="822960" y="2606040"/>
+            <a:ext cx="5608179" cy="1188720"/>
           </a:xfrm>
         </p:spPr>
         <p:txBody>
@@ -3347,7 +3427,7 @@
             <a:r>
               <a:rPr sz="3600" b="1" i="0">
                 <a:solidFill>
-                  <a:srgbClr val="6F1F41"/>
+                  <a:srgbClr val="26231F"/>
                 </a:solidFill>
               </a:rPr>
               <a:t>우리 보험 점검 시간</a:t>
@@ -3357,14 +3437,14 @@
       </p:sp>
       <p:sp>
         <p:nvSpPr>
-          <p:cNvPr id="4" name="한 줄 문구"/>
+          <p:cNvPr id="6" name="한 줄 문구"/>
           <p:cNvSpPr txBox="1"/>
           <p:nvPr/>
         </p:nvSpPr>
         <p:spPr>
           <a:xfrm>
-            <a:off x="853418" y="3749039"/>
-            <a:ext cx="6095847" cy="822960"/>
+            <a:off x="822960" y="3886200"/>
+            <a:ext cx="5608179" cy="822960"/>
           </a:xfrm>
           <a:prstGeom prst="rect">
             <a:avLst/>
@@ -3383,9 +3463,9 @@
               </a:lnSpc>
             </a:pPr>
             <a:r>
-              <a:rPr sz="1700" b="0" i="1">
+              <a:rPr sz="1700" b="0" i="0">
                 <a:solidFill>
-                  <a:srgbClr val="6F1F41"/>
+                  <a:srgbClr val="26231F"/>
                 </a:solidFill>
               </a:rPr>
               <a:t>가입한 보험을 한자리에 모아 봅니다</a:t>
@@ -3395,14 +3475,14 @@
       </p:sp>
       <p:sp>
         <p:nvSpPr>
-          <p:cNvPr id="5" name="안내 문구"/>
+          <p:cNvPr id="7" name="안내 문구"/>
           <p:cNvSpPr txBox="1"/>
           <p:nvPr/>
         </p:nvSpPr>
         <p:spPr>
           <a:xfrm>
-            <a:off x="853418" y="4617720"/>
-            <a:ext cx="6095847" cy="914400"/>
+            <a:off x="822960" y="4754880"/>
+            <a:ext cx="5608179" cy="914400"/>
           </a:xfrm>
           <a:prstGeom prst="rect">
             <a:avLst/>
@@ -3423,10 +3503,10 @@
             <a:r>
               <a:rPr sz="1400" b="0" i="0">
                 <a:solidFill>
-                  <a:srgbClr val="666666"/>
+                  <a:srgbClr val="26231F"/>
                 </a:solidFill>
               </a:rPr>
-              <a:t>본인 점검 · 2027. 00. 00</a:t>
+              <a:t>본인 점검 · 날짜 입력</a:t>
             </a:r>
           </a:p>
           <a:p>
@@ -3438,7 +3518,7 @@
             <a:r>
               <a:rPr sz="1400" b="0" i="0">
                 <a:solidFill>
-                  <a:srgbClr val="666666"/>
+                  <a:srgbClr val="26231F"/>
                 </a:solidFill>
               </a:rPr>
               <a:t>가입 내용을 정리하고 함께 확인하는 양식</a:t>
@@ -3460,7 +3540,7 @@
     <p:bg>
       <p:bgPr>
         <a:solidFill>
-          <a:srgbClr val="FCF3F7"/>
+          <a:srgbClr val="FDFAFB"/>
         </a:solidFill>
         <a:effectLst/>
       </p:bgPr>
@@ -3474,20 +3554,49 @@
       <p:grpSpPr/>
       <p:sp>
         <p:nvSpPr>
-          <p:cNvPr id="3" name="장식"/>
+          <p:cNvPr id="3" name="포인트"/>
           <p:cNvSpPr/>
           <p:nvPr/>
         </p:nvSpPr>
         <p:spPr>
           <a:xfrm>
-            <a:off x="0" y="0"/>
-            <a:ext cx="12191695" cy="274320"/>
+            <a:off x="5958687" y="246888"/>
+            <a:ext cx="274320" cy="274320"/>
+          </a:xfrm>
+          <a:prstGeom prst="heart">
+            <a:avLst/>
+          </a:prstGeom>
+          <a:solidFill>
+            <a:srgbClr val="ED97BB"/>
+          </a:solidFill>
+          <a:ln>
+            <a:noFill/>
+          </a:ln>
+        </p:spPr>
+        <p:txBody>
+          <a:bodyPr rtlCol="0" anchor="ctr"/>
+          <a:lstStyle/>
+          <a:p>
+            <a:pPr algn="ctr"/>
+          </a:p>
+        </p:txBody>
+      </p:sp>
+      <p:sp>
+        <p:nvSpPr>
+          <p:cNvPr id="4" name="장식"/>
+          <p:cNvSpPr/>
+          <p:nvPr/>
+        </p:nvSpPr>
+        <p:spPr>
+          <a:xfrm>
+            <a:off x="5684367" y="1572768"/>
+            <a:ext cx="822960" cy="22860"/>
           </a:xfrm>
           <a:prstGeom prst="rect">
             <a:avLst/>
           </a:prstGeom>
           <a:solidFill>
-            <a:srgbClr val="CD4C82"/>
+            <a:srgbClr val="ED97BB"/>
           </a:solidFill>
           <a:ln>
             <a:noFill/>
@@ -3503,30 +3612,39 @@
       </p:sp>
       <p:sp>
         <p:nvSpPr>
-          <p:cNvPr id="4" name="장식"/>
-          <p:cNvSpPr/>
+          <p:cNvPr id="5" name="상단 라벨"/>
+          <p:cNvSpPr txBox="1"/>
           <p:nvPr/>
         </p:nvSpPr>
         <p:spPr>
           <a:xfrm>
-            <a:off x="0" y="274320"/>
-            <a:ext cx="12191695" cy="54864"/>
+            <a:off x="640080" y="182880"/>
+            <a:ext cx="3657600" cy="274320"/>
           </a:xfrm>
           <a:prstGeom prst="rect">
             <a:avLst/>
           </a:prstGeom>
-          <a:solidFill>
-            <a:srgbClr val="339941"/>
-          </a:solidFill>
-          <a:ln>
-            <a:noFill/>
-          </a:ln>
-        </p:spPr>
-        <p:txBody>
-          <a:bodyPr rtlCol="0" anchor="ctr"/>
-          <a:lstStyle/>
-          <a:p>
-            <a:pPr algn="ctr"/>
+          <a:noFill/>
+        </p:spPr>
+        <p:txBody>
+          <a:bodyPr wrap="square" lIns="54864" rIns="54864" tIns="27432" bIns="27432" anchor="ctr">
+            <a:noAutofit/>
+          </a:bodyPr>
+          <a:lstStyle/>
+          <a:p>
+            <a:pPr algn="l">
+              <a:lnSpc>
+                <a:spcPct val="115000"/>
+              </a:lnSpc>
+            </a:pPr>
+            <a:r>
+              <a:rPr sz="800" b="1" i="0" spc="250">
+                <a:solidFill>
+                  <a:srgbClr val="8E8780"/>
+                </a:solidFill>
+              </a:rPr>
+              <a:t>INSURANCE CHECK</a:t>
+            </a:r>
           </a:p>
         </p:txBody>
       </p:sp>
@@ -3542,8 +3660,8 @@
         </p:nvSpPr>
         <p:spPr>
           <a:xfrm>
-            <a:off x="640080" y="457200"/>
-            <a:ext cx="9722815" cy="868680"/>
+            <a:off x="1371600" y="640080"/>
+            <a:ext cx="9448495" cy="868680"/>
           </a:xfrm>
         </p:spPr>
         <p:txBody>
@@ -3552,7 +3670,7 @@
           </a:bodyPr>
           <a:lstStyle/>
           <a:p>
-            <a:pPr algn="l">
+            <a:pPr algn="ctr">
               <a:lnSpc>
                 <a:spcPct val="105000"/>
               </a:lnSpc>
@@ -3560,7 +3678,7 @@
             <a:r>
               <a:rPr sz="3000" b="1" i="0">
                 <a:solidFill>
-                  <a:srgbClr val="6F1F41"/>
+                  <a:srgbClr val="26231F"/>
                 </a:solidFill>
               </a:rPr>
               <a:t>점검 대상 현황</a:t>
@@ -3570,14 +3688,14 @@
       </p:sp>
       <p:graphicFrame>
         <p:nvGraphicFramePr>
-          <p:cNvPr id="5" name="표"/>
+          <p:cNvPr id="6" name="표"/>
           <p:cNvGraphicFramePr>
             <a:graphicFrameLocks noGrp="1"/>
           </p:cNvGraphicFramePr>
           <p:nvPr/>
         </p:nvGraphicFramePr>
         <p:xfrm>
-          <a:off x="640080" y="1600200"/>
+          <a:off x="640080" y="1783080"/>
           <a:ext cx="10911534" cy="3657600"/>
         </p:xfrm>
         <a:graphic>
@@ -3600,7 +3718,7 @@
                       <a:r>
                         <a:rPr sz="1600" b="1">
                           <a:solidFill>
-                            <a:srgbClr val="FFFFFF"/>
+                            <a:srgbClr val="26231F"/>
                           </a:solidFill>
                         </a:rPr>
                         <a:t>구분</a:t>
@@ -3610,30 +3728,30 @@
                   <a:tcPr anchor="ctr" marL="73152" marR="73152">
                     <a:lnL w="9525" cap="flat" cmpd="sng" algn="ctr">
                       <a:solidFill>
-                        <a:srgbClr val="CD4C82"/>
+                        <a:srgbClr val="ED97BB"/>
                       </a:solidFill>
                       <a:prstDash val="solid"/>
                     </a:lnL>
                     <a:lnR w="9525" cap="flat" cmpd="sng" algn="ctr">
                       <a:solidFill>
-                        <a:srgbClr val="CD4C82"/>
+                        <a:srgbClr val="ED97BB"/>
                       </a:solidFill>
                       <a:prstDash val="solid"/>
                     </a:lnR>
                     <a:lnT w="9525" cap="flat" cmpd="sng" algn="ctr">
                       <a:solidFill>
-                        <a:srgbClr val="CD4C82"/>
+                        <a:srgbClr val="ED97BB"/>
                       </a:solidFill>
                       <a:prstDash val="solid"/>
                     </a:lnT>
                     <a:lnB w="9525" cap="flat" cmpd="sng" algn="ctr">
                       <a:solidFill>
-                        <a:srgbClr val="CD4C82"/>
+                        <a:srgbClr val="ED97BB"/>
                       </a:solidFill>
                       <a:prstDash val="solid"/>
                     </a:lnB>
                     <a:solidFill>
-                      <a:srgbClr val="CD4C82"/>
+                      <a:srgbClr val="ED97BB"/>
                     </a:solidFill>
                   </a:tcPr>
                 </a:tc>
@@ -3646,7 +3764,7 @@
                       <a:r>
                         <a:rPr sz="1600" b="1">
                           <a:solidFill>
-                            <a:srgbClr val="FFFFFF"/>
+                            <a:srgbClr val="26231F"/>
                           </a:solidFill>
                         </a:rPr>
                         <a:t>내용</a:t>
@@ -3656,30 +3774,30 @@
                   <a:tcPr anchor="ctr" marL="73152" marR="73152">
                     <a:lnL w="9525" cap="flat" cmpd="sng" algn="ctr">
                       <a:solidFill>
-                        <a:srgbClr val="CD4C82"/>
+                        <a:srgbClr val="ED97BB"/>
                       </a:solidFill>
                       <a:prstDash val="solid"/>
                     </a:lnL>
                     <a:lnR w="9525" cap="flat" cmpd="sng" algn="ctr">
                       <a:solidFill>
-                        <a:srgbClr val="CD4C82"/>
+                        <a:srgbClr val="ED97BB"/>
                       </a:solidFill>
                       <a:prstDash val="solid"/>
                     </a:lnR>
                     <a:lnT w="9525" cap="flat" cmpd="sng" algn="ctr">
                       <a:solidFill>
-                        <a:srgbClr val="CD4C82"/>
+                        <a:srgbClr val="ED97BB"/>
                       </a:solidFill>
                       <a:prstDash val="solid"/>
                     </a:lnT>
                     <a:lnB w="9525" cap="flat" cmpd="sng" algn="ctr">
                       <a:solidFill>
-                        <a:srgbClr val="CD4C82"/>
+                        <a:srgbClr val="ED97BB"/>
                       </a:solidFill>
                       <a:prstDash val="solid"/>
                     </a:lnB>
                     <a:solidFill>
-                      <a:srgbClr val="CD4C82"/>
+                      <a:srgbClr val="ED97BB"/>
                     </a:solidFill>
                   </a:tcPr>
                 </a:tc>
@@ -3694,7 +3812,7 @@
                       <a:r>
                         <a:rPr sz="1600" b="1">
                           <a:solidFill>
-                            <a:srgbClr val="6F1F41"/>
+                            <a:srgbClr val="492735"/>
                           </a:solidFill>
                         </a:rPr>
                         <a:t>이름</a:t>
@@ -3704,30 +3822,30 @@
                   <a:tcPr anchor="ctr" marL="73152" marR="73152">
                     <a:lnL w="9525" cap="flat" cmpd="sng" algn="ctr">
                       <a:solidFill>
-                        <a:srgbClr val="F7D4E3"/>
+                        <a:srgbClr val="FAD1E2"/>
                       </a:solidFill>
                       <a:prstDash val="solid"/>
                     </a:lnL>
                     <a:lnR w="9525" cap="flat" cmpd="sng" algn="ctr">
                       <a:solidFill>
-                        <a:srgbClr val="F7D4E3"/>
+                        <a:srgbClr val="FAD1E2"/>
                       </a:solidFill>
                       <a:prstDash val="solid"/>
                     </a:lnR>
                     <a:lnT w="9525" cap="flat" cmpd="sng" algn="ctr">
                       <a:solidFill>
-                        <a:srgbClr val="F7D4E3"/>
+                        <a:srgbClr val="FAD1E2"/>
                       </a:solidFill>
                       <a:prstDash val="solid"/>
                     </a:lnT>
                     <a:lnB w="9525" cap="flat" cmpd="sng" algn="ctr">
                       <a:solidFill>
-                        <a:srgbClr val="F7D4E3"/>
+                        <a:srgbClr val="FAD1E2"/>
                       </a:solidFill>
                       <a:prstDash val="solid"/>
                     </a:lnB>
                     <a:solidFill>
-                      <a:srgbClr val="F7D4E3"/>
+                      <a:srgbClr val="FAD1E2"/>
                     </a:solidFill>
                   </a:tcPr>
                 </a:tc>
@@ -3740,7 +3858,7 @@
                       <a:r>
                         <a:rPr sz="1600" b="0">
                           <a:solidFill>
-                            <a:srgbClr val="2B2B2B"/>
+                            <a:srgbClr val="26231F"/>
                           </a:solidFill>
                         </a:rPr>
                         <a:t/>
@@ -3750,25 +3868,25 @@
                   <a:tcPr anchor="ctr" marL="73152" marR="73152">
                     <a:lnL w="9525" cap="flat" cmpd="sng" algn="ctr">
                       <a:solidFill>
-                        <a:srgbClr val="F7D4E3"/>
+                        <a:srgbClr val="FAD1E2"/>
                       </a:solidFill>
                       <a:prstDash val="solid"/>
                     </a:lnL>
                     <a:lnR w="9525" cap="flat" cmpd="sng" algn="ctr">
                       <a:solidFill>
-                        <a:srgbClr val="F7D4E3"/>
+                        <a:srgbClr val="FAD1E2"/>
                       </a:solidFill>
                       <a:prstDash val="solid"/>
                     </a:lnR>
                     <a:lnT w="9525" cap="flat" cmpd="sng" algn="ctr">
                       <a:solidFill>
-                        <a:srgbClr val="F7D4E3"/>
+                        <a:srgbClr val="FAD1E2"/>
                       </a:solidFill>
                       <a:prstDash val="solid"/>
                     </a:lnT>
                     <a:lnB w="9525" cap="flat" cmpd="sng" algn="ctr">
                       <a:solidFill>
-                        <a:srgbClr val="F7D4E3"/>
+                        <a:srgbClr val="FAD1E2"/>
                       </a:solidFill>
                       <a:prstDash val="solid"/>
                     </a:lnB>
@@ -3788,7 +3906,7 @@
                       <a:r>
                         <a:rPr sz="1600" b="1">
                           <a:solidFill>
-                            <a:srgbClr val="6F1F41"/>
+                            <a:srgbClr val="492735"/>
                           </a:solidFill>
                         </a:rPr>
                         <a:t>나이</a:t>
@@ -3798,30 +3916,30 @@
                   <a:tcPr anchor="ctr" marL="73152" marR="73152">
                     <a:lnL w="9525" cap="flat" cmpd="sng" algn="ctr">
                       <a:solidFill>
-                        <a:srgbClr val="F7D4E3"/>
+                        <a:srgbClr val="FAD1E2"/>
                       </a:solidFill>
                       <a:prstDash val="solid"/>
                     </a:lnL>
                     <a:lnR w="9525" cap="flat" cmpd="sng" algn="ctr">
                       <a:solidFill>
-                        <a:srgbClr val="F7D4E3"/>
+                        <a:srgbClr val="FAD1E2"/>
                       </a:solidFill>
                       <a:prstDash val="solid"/>
                     </a:lnR>
                     <a:lnT w="9525" cap="flat" cmpd="sng" algn="ctr">
                       <a:solidFill>
-                        <a:srgbClr val="F7D4E3"/>
+                        <a:srgbClr val="FAD1E2"/>
                       </a:solidFill>
                       <a:prstDash val="solid"/>
                     </a:lnT>
                     <a:lnB w="9525" cap="flat" cmpd="sng" algn="ctr">
                       <a:solidFill>
-                        <a:srgbClr val="F7D4E3"/>
+                        <a:srgbClr val="FAD1E2"/>
                       </a:solidFill>
                       <a:prstDash val="solid"/>
                     </a:lnB>
                     <a:solidFill>
-                      <a:srgbClr val="F7D4E3"/>
+                      <a:srgbClr val="FAD1E2"/>
                     </a:solidFill>
                   </a:tcPr>
                 </a:tc>
@@ -3834,7 +3952,7 @@
                       <a:r>
                         <a:rPr sz="1600" b="0">
                           <a:solidFill>
-                            <a:srgbClr val="2B2B2B"/>
+                            <a:srgbClr val="26231F"/>
                           </a:solidFill>
                         </a:rPr>
                         <a:t/>
@@ -3844,30 +3962,30 @@
                   <a:tcPr anchor="ctr" marL="73152" marR="73152">
                     <a:lnL w="9525" cap="flat" cmpd="sng" algn="ctr">
                       <a:solidFill>
-                        <a:srgbClr val="F7D4E3"/>
+                        <a:srgbClr val="FAD1E2"/>
                       </a:solidFill>
                       <a:prstDash val="solid"/>
                     </a:lnL>
                     <a:lnR w="9525" cap="flat" cmpd="sng" algn="ctr">
                       <a:solidFill>
-                        <a:srgbClr val="F7D4E3"/>
+                        <a:srgbClr val="FAD1E2"/>
                       </a:solidFill>
                       <a:prstDash val="solid"/>
                     </a:lnR>
                     <a:lnT w="9525" cap="flat" cmpd="sng" algn="ctr">
                       <a:solidFill>
-                        <a:srgbClr val="F7D4E3"/>
+                        <a:srgbClr val="FAD1E2"/>
                       </a:solidFill>
                       <a:prstDash val="solid"/>
                     </a:lnT>
                     <a:lnB w="9525" cap="flat" cmpd="sng" algn="ctr">
                       <a:solidFill>
-                        <a:srgbClr val="F7D4E3"/>
+                        <a:srgbClr val="FAD1E2"/>
                       </a:solidFill>
                       <a:prstDash val="solid"/>
                     </a:lnB>
                     <a:solidFill>
-                      <a:srgbClr val="FCF3F7"/>
+                      <a:srgbClr val="FDEAF2"/>
                     </a:solidFill>
                   </a:tcPr>
                 </a:tc>
@@ -3882,7 +4000,7 @@
                       <a:r>
                         <a:rPr sz="1600" b="1">
                           <a:solidFill>
-                            <a:srgbClr val="6F1F41"/>
+                            <a:srgbClr val="492735"/>
                           </a:solidFill>
                         </a:rPr>
                         <a:t>직업</a:t>
@@ -3892,30 +4010,30 @@
                   <a:tcPr anchor="ctr" marL="73152" marR="73152">
                     <a:lnL w="9525" cap="flat" cmpd="sng" algn="ctr">
                       <a:solidFill>
-                        <a:srgbClr val="F7D4E3"/>
+                        <a:srgbClr val="FAD1E2"/>
                       </a:solidFill>
                       <a:prstDash val="solid"/>
                     </a:lnL>
                     <a:lnR w="9525" cap="flat" cmpd="sng" algn="ctr">
                       <a:solidFill>
-                        <a:srgbClr val="F7D4E3"/>
+                        <a:srgbClr val="FAD1E2"/>
                       </a:solidFill>
                       <a:prstDash val="solid"/>
                     </a:lnR>
                     <a:lnT w="9525" cap="flat" cmpd="sng" algn="ctr">
                       <a:solidFill>
-                        <a:srgbClr val="F7D4E3"/>
+                        <a:srgbClr val="FAD1E2"/>
                       </a:solidFill>
                       <a:prstDash val="solid"/>
                     </a:lnT>
                     <a:lnB w="9525" cap="flat" cmpd="sng" algn="ctr">
                       <a:solidFill>
-                        <a:srgbClr val="F7D4E3"/>
+                        <a:srgbClr val="FAD1E2"/>
                       </a:solidFill>
                       <a:prstDash val="solid"/>
                     </a:lnB>
                     <a:solidFill>
-                      <a:srgbClr val="F7D4E3"/>
+                      <a:srgbClr val="FAD1E2"/>
                     </a:solidFill>
                   </a:tcPr>
                 </a:tc>
@@ -3928,7 +4046,7 @@
                       <a:r>
                         <a:rPr sz="1600" b="0">
                           <a:solidFill>
-                            <a:srgbClr val="2B2B2B"/>
+                            <a:srgbClr val="26231F"/>
                           </a:solidFill>
                         </a:rPr>
                         <a:t/>
@@ -3938,25 +4056,25 @@
                   <a:tcPr anchor="ctr" marL="73152" marR="73152">
                     <a:lnL w="9525" cap="flat" cmpd="sng" algn="ctr">
                       <a:solidFill>
-                        <a:srgbClr val="F7D4E3"/>
+                        <a:srgbClr val="FAD1E2"/>
                       </a:solidFill>
                       <a:prstDash val="solid"/>
                     </a:lnL>
                     <a:lnR w="9525" cap="flat" cmpd="sng" algn="ctr">
                       <a:solidFill>
-                        <a:srgbClr val="F7D4E3"/>
+                        <a:srgbClr val="FAD1E2"/>
                       </a:solidFill>
                       <a:prstDash val="solid"/>
                     </a:lnR>
                     <a:lnT w="9525" cap="flat" cmpd="sng" algn="ctr">
                       <a:solidFill>
-                        <a:srgbClr val="F7D4E3"/>
+                        <a:srgbClr val="FAD1E2"/>
                       </a:solidFill>
                       <a:prstDash val="solid"/>
                     </a:lnT>
                     <a:lnB w="9525" cap="flat" cmpd="sng" algn="ctr">
                       <a:solidFill>
-                        <a:srgbClr val="F7D4E3"/>
+                        <a:srgbClr val="FAD1E2"/>
                       </a:solidFill>
                       <a:prstDash val="solid"/>
                     </a:lnB>
@@ -3976,7 +4094,7 @@
                       <a:r>
                         <a:rPr sz="1600" b="1">
                           <a:solidFill>
-                            <a:srgbClr val="6F1F41"/>
+                            <a:srgbClr val="492735"/>
                           </a:solidFill>
                         </a:rPr>
                         <a:t>가족 구성</a:t>
@@ -3986,30 +4104,30 @@
                   <a:tcPr anchor="ctr" marL="73152" marR="73152">
                     <a:lnL w="9525" cap="flat" cmpd="sng" algn="ctr">
                       <a:solidFill>
-                        <a:srgbClr val="F7D4E3"/>
+                        <a:srgbClr val="FAD1E2"/>
                       </a:solidFill>
                       <a:prstDash val="solid"/>
                     </a:lnL>
                     <a:lnR w="9525" cap="flat" cmpd="sng" algn="ctr">
                       <a:solidFill>
-                        <a:srgbClr val="F7D4E3"/>
+                        <a:srgbClr val="FAD1E2"/>
                       </a:solidFill>
                       <a:prstDash val="solid"/>
                     </a:lnR>
                     <a:lnT w="9525" cap="flat" cmpd="sng" algn="ctr">
                       <a:solidFill>
-                        <a:srgbClr val="F7D4E3"/>
+                        <a:srgbClr val="FAD1E2"/>
                       </a:solidFill>
                       <a:prstDash val="solid"/>
                     </a:lnT>
                     <a:lnB w="9525" cap="flat" cmpd="sng" algn="ctr">
                       <a:solidFill>
-                        <a:srgbClr val="F7D4E3"/>
+                        <a:srgbClr val="FAD1E2"/>
                       </a:solidFill>
                       <a:prstDash val="solid"/>
                     </a:lnB>
                     <a:solidFill>
-                      <a:srgbClr val="F7D4E3"/>
+                      <a:srgbClr val="FAD1E2"/>
                     </a:solidFill>
                   </a:tcPr>
                 </a:tc>
@@ -4022,7 +4140,7 @@
                       <a:r>
                         <a:rPr sz="1600" b="0">
                           <a:solidFill>
-                            <a:srgbClr val="2B2B2B"/>
+                            <a:srgbClr val="26231F"/>
                           </a:solidFill>
                         </a:rPr>
                         <a:t/>
@@ -4032,30 +4150,30 @@
                   <a:tcPr anchor="ctr" marL="73152" marR="73152">
                     <a:lnL w="9525" cap="flat" cmpd="sng" algn="ctr">
                       <a:solidFill>
-                        <a:srgbClr val="F7D4E3"/>
+                        <a:srgbClr val="FAD1E2"/>
                       </a:solidFill>
                       <a:prstDash val="solid"/>
                     </a:lnL>
                     <a:lnR w="9525" cap="flat" cmpd="sng" algn="ctr">
                       <a:solidFill>
-                        <a:srgbClr val="F7D4E3"/>
+                        <a:srgbClr val="FAD1E2"/>
                       </a:solidFill>
                       <a:prstDash val="solid"/>
                     </a:lnR>
                     <a:lnT w="9525" cap="flat" cmpd="sng" algn="ctr">
                       <a:solidFill>
-                        <a:srgbClr val="F7D4E3"/>
+                        <a:srgbClr val="FAD1E2"/>
                       </a:solidFill>
                       <a:prstDash val="solid"/>
                     </a:lnT>
                     <a:lnB w="9525" cap="flat" cmpd="sng" algn="ctr">
                       <a:solidFill>
-                        <a:srgbClr val="F7D4E3"/>
+                        <a:srgbClr val="FAD1E2"/>
                       </a:solidFill>
                       <a:prstDash val="solid"/>
                     </a:lnB>
                     <a:solidFill>
-                      <a:srgbClr val="FCF3F7"/>
+                      <a:srgbClr val="FDEAF2"/>
                     </a:solidFill>
                   </a:tcPr>
                 </a:tc>
@@ -4078,7 +4196,7 @@
     <p:bg>
       <p:bgPr>
         <a:solidFill>
-          <a:srgbClr val="FCF3F7"/>
+          <a:srgbClr val="FDFAFB"/>
         </a:solidFill>
         <a:effectLst/>
       </p:bgPr>
@@ -4092,20 +4210,49 @@
       <p:grpSpPr/>
       <p:sp>
         <p:nvSpPr>
-          <p:cNvPr id="3" name="장식"/>
+          <p:cNvPr id="3" name="포인트"/>
           <p:cNvSpPr/>
           <p:nvPr/>
         </p:nvSpPr>
         <p:spPr>
           <a:xfrm>
-            <a:off x="0" y="0"/>
-            <a:ext cx="12191695" cy="274320"/>
+            <a:off x="5958687" y="246888"/>
+            <a:ext cx="274320" cy="274320"/>
+          </a:xfrm>
+          <a:prstGeom prst="heart">
+            <a:avLst/>
+          </a:prstGeom>
+          <a:solidFill>
+            <a:srgbClr val="ED97BB"/>
+          </a:solidFill>
+          <a:ln>
+            <a:noFill/>
+          </a:ln>
+        </p:spPr>
+        <p:txBody>
+          <a:bodyPr rtlCol="0" anchor="ctr"/>
+          <a:lstStyle/>
+          <a:p>
+            <a:pPr algn="ctr"/>
+          </a:p>
+        </p:txBody>
+      </p:sp>
+      <p:sp>
+        <p:nvSpPr>
+          <p:cNvPr id="4" name="장식"/>
+          <p:cNvSpPr/>
+          <p:nvPr/>
+        </p:nvSpPr>
+        <p:spPr>
+          <a:xfrm>
+            <a:off x="5684367" y="1572768"/>
+            <a:ext cx="822960" cy="22860"/>
           </a:xfrm>
           <a:prstGeom prst="rect">
             <a:avLst/>
           </a:prstGeom>
           <a:solidFill>
-            <a:srgbClr val="CD4C82"/>
+            <a:srgbClr val="ED97BB"/>
           </a:solidFill>
           <a:ln>
             <a:noFill/>
@@ -4121,30 +4268,39 @@
       </p:sp>
       <p:sp>
         <p:nvSpPr>
-          <p:cNvPr id="4" name="장식"/>
-          <p:cNvSpPr/>
+          <p:cNvPr id="5" name="상단 라벨"/>
+          <p:cNvSpPr txBox="1"/>
           <p:nvPr/>
         </p:nvSpPr>
         <p:spPr>
           <a:xfrm>
-            <a:off x="0" y="274320"/>
-            <a:ext cx="12191695" cy="54864"/>
+            <a:off x="640080" y="182880"/>
+            <a:ext cx="3657600" cy="274320"/>
           </a:xfrm>
           <a:prstGeom prst="rect">
             <a:avLst/>
           </a:prstGeom>
-          <a:solidFill>
-            <a:srgbClr val="339941"/>
-          </a:solidFill>
-          <a:ln>
-            <a:noFill/>
-          </a:ln>
-        </p:spPr>
-        <p:txBody>
-          <a:bodyPr rtlCol="0" anchor="ctr"/>
-          <a:lstStyle/>
-          <a:p>
-            <a:pPr algn="ctr"/>
+          <a:noFill/>
+        </p:spPr>
+        <p:txBody>
+          <a:bodyPr wrap="square" lIns="54864" rIns="54864" tIns="27432" bIns="27432" anchor="ctr">
+            <a:noAutofit/>
+          </a:bodyPr>
+          <a:lstStyle/>
+          <a:p>
+            <a:pPr algn="l">
+              <a:lnSpc>
+                <a:spcPct val="115000"/>
+              </a:lnSpc>
+            </a:pPr>
+            <a:r>
+              <a:rPr sz="800" b="1" i="0" spc="250">
+                <a:solidFill>
+                  <a:srgbClr val="8E8780"/>
+                </a:solidFill>
+              </a:rPr>
+              <a:t>INSURANCE CHECK</a:t>
+            </a:r>
           </a:p>
         </p:txBody>
       </p:sp>
@@ -4160,8 +4316,8 @@
         </p:nvSpPr>
         <p:spPr>
           <a:xfrm>
-            <a:off x="640080" y="457200"/>
-            <a:ext cx="9722815" cy="868680"/>
+            <a:off x="1371600" y="640080"/>
+            <a:ext cx="9448495" cy="868680"/>
           </a:xfrm>
         </p:spPr>
         <p:txBody>
@@ -4170,7 +4326,7 @@
           </a:bodyPr>
           <a:lstStyle/>
           <a:p>
-            <a:pPr algn="l">
+            <a:pPr algn="ctr">
               <a:lnSpc>
                 <a:spcPct val="105000"/>
               </a:lnSpc>
@@ -4178,7 +4334,7 @@
             <a:r>
               <a:rPr sz="3000" b="1" i="0">
                 <a:solidFill>
-                  <a:srgbClr val="6F1F41"/>
+                  <a:srgbClr val="26231F"/>
                 </a:solidFill>
               </a:rPr>
               <a:t>가입한 보험 목록</a:t>
@@ -4188,14 +4344,14 @@
       </p:sp>
       <p:graphicFrame>
         <p:nvGraphicFramePr>
-          <p:cNvPr id="5" name="표"/>
+          <p:cNvPr id="6" name="표"/>
           <p:cNvGraphicFramePr>
             <a:graphicFrameLocks noGrp="1"/>
           </p:cNvGraphicFramePr>
           <p:nvPr/>
         </p:nvGraphicFramePr>
         <p:xfrm>
-          <a:off x="640080" y="1600200"/>
+          <a:off x="640080" y="1783080"/>
           <a:ext cx="10911535" cy="4224528"/>
         </p:xfrm>
         <a:graphic>
@@ -4221,7 +4377,7 @@
                       <a:r>
                         <a:rPr sz="1400" b="1">
                           <a:solidFill>
-                            <a:srgbClr val="FFFFFF"/>
+                            <a:srgbClr val="26231F"/>
                           </a:solidFill>
                         </a:rPr>
                         <a:t>보험회사</a:t>
@@ -4231,30 +4387,30 @@
                   <a:tcPr anchor="ctr" marL="73152" marR="73152">
                     <a:lnL w="9525" cap="flat" cmpd="sng" algn="ctr">
                       <a:solidFill>
-                        <a:srgbClr val="CD4C82"/>
+                        <a:srgbClr val="ED97BB"/>
                       </a:solidFill>
                       <a:prstDash val="solid"/>
                     </a:lnL>
                     <a:lnR w="9525" cap="flat" cmpd="sng" algn="ctr">
                       <a:solidFill>
-                        <a:srgbClr val="CD4C82"/>
+                        <a:srgbClr val="ED97BB"/>
                       </a:solidFill>
                       <a:prstDash val="solid"/>
                     </a:lnR>
                     <a:lnT w="9525" cap="flat" cmpd="sng" algn="ctr">
                       <a:solidFill>
-                        <a:srgbClr val="CD4C82"/>
+                        <a:srgbClr val="ED97BB"/>
                       </a:solidFill>
                       <a:prstDash val="solid"/>
                     </a:lnT>
                     <a:lnB w="9525" cap="flat" cmpd="sng" algn="ctr">
                       <a:solidFill>
-                        <a:srgbClr val="CD4C82"/>
+                        <a:srgbClr val="ED97BB"/>
                       </a:solidFill>
                       <a:prstDash val="solid"/>
                     </a:lnB>
                     <a:solidFill>
-                      <a:srgbClr val="CD4C82"/>
+                      <a:srgbClr val="ED97BB"/>
                     </a:solidFill>
                   </a:tcPr>
                 </a:tc>
@@ -4267,7 +4423,7 @@
                       <a:r>
                         <a:rPr sz="1400" b="1">
                           <a:solidFill>
-                            <a:srgbClr val="FFFFFF"/>
+                            <a:srgbClr val="26231F"/>
                           </a:solidFill>
                         </a:rPr>
                         <a:t>상품명</a:t>
@@ -4277,30 +4433,30 @@
                   <a:tcPr anchor="ctr" marL="73152" marR="73152">
                     <a:lnL w="9525" cap="flat" cmpd="sng" algn="ctr">
                       <a:solidFill>
-                        <a:srgbClr val="CD4C82"/>
+                        <a:srgbClr val="ED97BB"/>
                       </a:solidFill>
                       <a:prstDash val="solid"/>
                     </a:lnL>
                     <a:lnR w="9525" cap="flat" cmpd="sng" algn="ctr">
                       <a:solidFill>
-                        <a:srgbClr val="CD4C82"/>
+                        <a:srgbClr val="ED97BB"/>
                       </a:solidFill>
                       <a:prstDash val="solid"/>
                     </a:lnR>
                     <a:lnT w="9525" cap="flat" cmpd="sng" algn="ctr">
                       <a:solidFill>
-                        <a:srgbClr val="CD4C82"/>
+                        <a:srgbClr val="ED97BB"/>
                       </a:solidFill>
                       <a:prstDash val="solid"/>
                     </a:lnT>
                     <a:lnB w="9525" cap="flat" cmpd="sng" algn="ctr">
                       <a:solidFill>
-                        <a:srgbClr val="CD4C82"/>
+                        <a:srgbClr val="ED97BB"/>
                       </a:solidFill>
                       <a:prstDash val="solid"/>
                     </a:lnB>
                     <a:solidFill>
-                      <a:srgbClr val="CD4C82"/>
+                      <a:srgbClr val="ED97BB"/>
                     </a:solidFill>
                   </a:tcPr>
                 </a:tc>
@@ -4313,7 +4469,7 @@
                       <a:r>
                         <a:rPr sz="1400" b="1">
                           <a:solidFill>
-                            <a:srgbClr val="FFFFFF"/>
+                            <a:srgbClr val="26231F"/>
                           </a:solidFill>
                         </a:rPr>
                         <a:t>종류</a:t>
@@ -4323,30 +4479,30 @@
                   <a:tcPr anchor="ctr" marL="73152" marR="73152">
                     <a:lnL w="9525" cap="flat" cmpd="sng" algn="ctr">
                       <a:solidFill>
-                        <a:srgbClr val="CD4C82"/>
+                        <a:srgbClr val="ED97BB"/>
                       </a:solidFill>
                       <a:prstDash val="solid"/>
                     </a:lnL>
                     <a:lnR w="9525" cap="flat" cmpd="sng" algn="ctr">
                       <a:solidFill>
-                        <a:srgbClr val="CD4C82"/>
+                        <a:srgbClr val="ED97BB"/>
                       </a:solidFill>
                       <a:prstDash val="solid"/>
                     </a:lnR>
                     <a:lnT w="9525" cap="flat" cmpd="sng" algn="ctr">
                       <a:solidFill>
-                        <a:srgbClr val="CD4C82"/>
+                        <a:srgbClr val="ED97BB"/>
                       </a:solidFill>
                       <a:prstDash val="solid"/>
                     </a:lnT>
                     <a:lnB w="9525" cap="flat" cmpd="sng" algn="ctr">
                       <a:solidFill>
-                        <a:srgbClr val="CD4C82"/>
+                        <a:srgbClr val="ED97BB"/>
                       </a:solidFill>
                       <a:prstDash val="solid"/>
                     </a:lnB>
                     <a:solidFill>
-                      <a:srgbClr val="CD4C82"/>
+                      <a:srgbClr val="ED97BB"/>
                     </a:solidFill>
                   </a:tcPr>
                 </a:tc>
@@ -4359,7 +4515,7 @@
                       <a:r>
                         <a:rPr sz="1400" b="1">
                           <a:solidFill>
-                            <a:srgbClr val="FFFFFF"/>
+                            <a:srgbClr val="26231F"/>
                           </a:solidFill>
                         </a:rPr>
                         <a:t>만기일</a:t>
@@ -4369,30 +4525,30 @@
                   <a:tcPr anchor="ctr" marL="73152" marR="73152">
                     <a:lnL w="9525" cap="flat" cmpd="sng" algn="ctr">
                       <a:solidFill>
-                        <a:srgbClr val="CD4C82"/>
+                        <a:srgbClr val="ED97BB"/>
                       </a:solidFill>
                       <a:prstDash val="solid"/>
                     </a:lnL>
                     <a:lnR w="9525" cap="flat" cmpd="sng" algn="ctr">
                       <a:solidFill>
-                        <a:srgbClr val="CD4C82"/>
+                        <a:srgbClr val="ED97BB"/>
                       </a:solidFill>
                       <a:prstDash val="solid"/>
                     </a:lnR>
                     <a:lnT w="9525" cap="flat" cmpd="sng" algn="ctr">
                       <a:solidFill>
-                        <a:srgbClr val="CD4C82"/>
+                        <a:srgbClr val="ED97BB"/>
                       </a:solidFill>
                       <a:prstDash val="solid"/>
                     </a:lnT>
                     <a:lnB w="9525" cap="flat" cmpd="sng" algn="ctr">
                       <a:solidFill>
-                        <a:srgbClr val="CD4C82"/>
+                        <a:srgbClr val="ED97BB"/>
                       </a:solidFill>
                       <a:prstDash val="solid"/>
                     </a:lnB>
                     <a:solidFill>
-                      <a:srgbClr val="CD4C82"/>
+                      <a:srgbClr val="ED97BB"/>
                     </a:solidFill>
                   </a:tcPr>
                 </a:tc>
@@ -4405,7 +4561,7 @@
                       <a:r>
                         <a:rPr sz="1400" b="1">
                           <a:solidFill>
-                            <a:srgbClr val="FFFFFF"/>
+                            <a:srgbClr val="26231F"/>
                           </a:solidFill>
                         </a:rPr>
                         <a:t>월 보험료</a:t>
@@ -4415,30 +4571,30 @@
                   <a:tcPr anchor="ctr" marL="73152" marR="73152">
                     <a:lnL w="9525" cap="flat" cmpd="sng" algn="ctr">
                       <a:solidFill>
-                        <a:srgbClr val="CD4C82"/>
+                        <a:srgbClr val="ED97BB"/>
                       </a:solidFill>
                       <a:prstDash val="solid"/>
                     </a:lnL>
                     <a:lnR w="9525" cap="flat" cmpd="sng" algn="ctr">
                       <a:solidFill>
-                        <a:srgbClr val="CD4C82"/>
+                        <a:srgbClr val="ED97BB"/>
                       </a:solidFill>
                       <a:prstDash val="solid"/>
                     </a:lnR>
                     <a:lnT w="9525" cap="flat" cmpd="sng" algn="ctr">
                       <a:solidFill>
-                        <a:srgbClr val="CD4C82"/>
+                        <a:srgbClr val="ED97BB"/>
                       </a:solidFill>
                       <a:prstDash val="solid"/>
                     </a:lnT>
                     <a:lnB w="9525" cap="flat" cmpd="sng" algn="ctr">
                       <a:solidFill>
-                        <a:srgbClr val="CD4C82"/>
+                        <a:srgbClr val="ED97BB"/>
                       </a:solidFill>
                       <a:prstDash val="solid"/>
                     </a:lnB>
                     <a:solidFill>
-                      <a:srgbClr val="CD4C82"/>
+                      <a:srgbClr val="ED97BB"/>
                     </a:solidFill>
                   </a:tcPr>
                 </a:tc>
@@ -4453,7 +4609,7 @@
                       <a:r>
                         <a:rPr sz="1400" b="0">
                           <a:solidFill>
-                            <a:srgbClr val="2B2B2B"/>
+                            <a:srgbClr val="26231F"/>
                           </a:solidFill>
                         </a:rPr>
                         <a:t/>
@@ -4463,25 +4619,25 @@
                   <a:tcPr anchor="ctr" marL="73152" marR="73152">
                     <a:lnL w="9525" cap="flat" cmpd="sng" algn="ctr">
                       <a:solidFill>
-                        <a:srgbClr val="F7D4E3"/>
+                        <a:srgbClr val="FAD1E2"/>
                       </a:solidFill>
                       <a:prstDash val="solid"/>
                     </a:lnL>
                     <a:lnR w="9525" cap="flat" cmpd="sng" algn="ctr">
                       <a:solidFill>
-                        <a:srgbClr val="F7D4E3"/>
+                        <a:srgbClr val="FAD1E2"/>
                       </a:solidFill>
                       <a:prstDash val="solid"/>
                     </a:lnR>
                     <a:lnT w="9525" cap="flat" cmpd="sng" algn="ctr">
                       <a:solidFill>
-                        <a:srgbClr val="F7D4E3"/>
+                        <a:srgbClr val="FAD1E2"/>
                       </a:solidFill>
                       <a:prstDash val="solid"/>
                     </a:lnT>
                     <a:lnB w="9525" cap="flat" cmpd="sng" algn="ctr">
                       <a:solidFill>
-                        <a:srgbClr val="F7D4E3"/>
+                        <a:srgbClr val="FAD1E2"/>
                       </a:solidFill>
                       <a:prstDash val="solid"/>
                     </a:lnB>
@@ -4499,7 +4655,7 @@
                       <a:r>
                         <a:rPr sz="1400" b="0">
                           <a:solidFill>
-                            <a:srgbClr val="2B2B2B"/>
+                            <a:srgbClr val="26231F"/>
                           </a:solidFill>
                         </a:rPr>
                         <a:t/>
@@ -4509,25 +4665,25 @@
                   <a:tcPr anchor="ctr" marL="73152" marR="73152">
                     <a:lnL w="9525" cap="flat" cmpd="sng" algn="ctr">
                       <a:solidFill>
-                        <a:srgbClr val="F7D4E3"/>
+                        <a:srgbClr val="FAD1E2"/>
                       </a:solidFill>
                       <a:prstDash val="solid"/>
                     </a:lnL>
                     <a:lnR w="9525" cap="flat" cmpd="sng" algn="ctr">
                       <a:solidFill>
-                        <a:srgbClr val="F7D4E3"/>
+                        <a:srgbClr val="FAD1E2"/>
                       </a:solidFill>
                       <a:prstDash val="solid"/>
                     </a:lnR>
                     <a:lnT w="9525" cap="flat" cmpd="sng" algn="ctr">
                       <a:solidFill>
-                        <a:srgbClr val="F7D4E3"/>
+                        <a:srgbClr val="FAD1E2"/>
                       </a:solidFill>
                       <a:prstDash val="solid"/>
                     </a:lnT>
                     <a:lnB w="9525" cap="flat" cmpd="sng" algn="ctr">
                       <a:solidFill>
-                        <a:srgbClr val="F7D4E3"/>
+                        <a:srgbClr val="FAD1E2"/>
                       </a:solidFill>
                       <a:prstDash val="solid"/>
                     </a:lnB>
@@ -4545,7 +4701,7 @@
                       <a:r>
                         <a:rPr sz="1400" b="0">
                           <a:solidFill>
-                            <a:srgbClr val="2B2B2B"/>
+                            <a:srgbClr val="26231F"/>
                           </a:solidFill>
                         </a:rPr>
                         <a:t/>
@@ -4555,25 +4711,25 @@
                   <a:tcPr anchor="ctr" marL="73152" marR="73152">
                     <a:lnL w="9525" cap="flat" cmpd="sng" algn="ctr">
                       <a:solidFill>
-                        <a:srgbClr val="F7D4E3"/>
+                        <a:srgbClr val="FAD1E2"/>
                       </a:solidFill>
                       <a:prstDash val="solid"/>
                     </a:lnL>
                     <a:lnR w="9525" cap="flat" cmpd="sng" algn="ctr">
                       <a:solidFill>
-                        <a:srgbClr val="F7D4E3"/>
+                        <a:srgbClr val="FAD1E2"/>
                       </a:solidFill>
                       <a:prstDash val="solid"/>
                     </a:lnR>
                     <a:lnT w="9525" cap="flat" cmpd="sng" algn="ctr">
                       <a:solidFill>
-                        <a:srgbClr val="F7D4E3"/>
+                        <a:srgbClr val="FAD1E2"/>
                       </a:solidFill>
                       <a:prstDash val="solid"/>
                     </a:lnT>
                     <a:lnB w="9525" cap="flat" cmpd="sng" algn="ctr">
                       <a:solidFill>
-                        <a:srgbClr val="F7D4E3"/>
+                        <a:srgbClr val="FAD1E2"/>
                       </a:solidFill>
                       <a:prstDash val="solid"/>
                     </a:lnB>
@@ -4591,7 +4747,7 @@
                       <a:r>
                         <a:rPr sz="1400" b="0">
                           <a:solidFill>
-                            <a:srgbClr val="2B2B2B"/>
+                            <a:srgbClr val="26231F"/>
                           </a:solidFill>
                         </a:rPr>
                         <a:t/>
@@ -4601,25 +4757,25 @@
                   <a:tcPr anchor="ctr" marL="73152" marR="73152">
                     <a:lnL w="9525" cap="flat" cmpd="sng" algn="ctr">
                       <a:solidFill>
-                        <a:srgbClr val="F7D4E3"/>
+                        <a:srgbClr val="FAD1E2"/>
                       </a:solidFill>
                       <a:prstDash val="solid"/>
                     </a:lnL>
                     <a:lnR w="9525" cap="flat" cmpd="sng" algn="ctr">
                       <a:solidFill>
-                        <a:srgbClr val="F7D4E3"/>
+                        <a:srgbClr val="FAD1E2"/>
                       </a:solidFill>
                       <a:prstDash val="solid"/>
                     </a:lnR>
                     <a:lnT w="9525" cap="flat" cmpd="sng" algn="ctr">
                       <a:solidFill>
-                        <a:srgbClr val="F7D4E3"/>
+                        <a:srgbClr val="FAD1E2"/>
                       </a:solidFill>
                       <a:prstDash val="solid"/>
                     </a:lnT>
                     <a:lnB w="9525" cap="flat" cmpd="sng" algn="ctr">
                       <a:solidFill>
-                        <a:srgbClr val="F7D4E3"/>
+                        <a:srgbClr val="FAD1E2"/>
                       </a:solidFill>
                       <a:prstDash val="solid"/>
                     </a:lnB>
@@ -4637,7 +4793,7 @@
                       <a:r>
                         <a:rPr sz="1400" b="0">
                           <a:solidFill>
-                            <a:srgbClr val="2B2B2B"/>
+                            <a:srgbClr val="26231F"/>
                           </a:solidFill>
                         </a:rPr>
                         <a:t/>
@@ -4647,25 +4803,25 @@
                   <a:tcPr anchor="ctr" marL="73152" marR="73152">
                     <a:lnL w="9525" cap="flat" cmpd="sng" algn="ctr">
                       <a:solidFill>
-                        <a:srgbClr val="F7D4E3"/>
+                        <a:srgbClr val="FAD1E2"/>
                       </a:solidFill>
                       <a:prstDash val="solid"/>
                     </a:lnL>
                     <a:lnR w="9525" cap="flat" cmpd="sng" algn="ctr">
                       <a:solidFill>
-                        <a:srgbClr val="F7D4E3"/>
+                        <a:srgbClr val="FAD1E2"/>
                       </a:solidFill>
                       <a:prstDash val="solid"/>
                     </a:lnR>
                     <a:lnT w="9525" cap="flat" cmpd="sng" algn="ctr">
                       <a:solidFill>
-                        <a:srgbClr val="F7D4E3"/>
+                        <a:srgbClr val="FAD1E2"/>
                       </a:solidFill>
                       <a:prstDash val="solid"/>
                     </a:lnT>
                     <a:lnB w="9525" cap="flat" cmpd="sng" algn="ctr">
                       <a:solidFill>
-                        <a:srgbClr val="F7D4E3"/>
+                        <a:srgbClr val="FAD1E2"/>
                       </a:solidFill>
                       <a:prstDash val="solid"/>
                     </a:lnB>
@@ -4685,7 +4841,7 @@
                       <a:r>
                         <a:rPr sz="1400" b="0">
                           <a:solidFill>
-                            <a:srgbClr val="2B2B2B"/>
+                            <a:srgbClr val="26231F"/>
                           </a:solidFill>
                         </a:rPr>
                         <a:t/>
@@ -4695,30 +4851,30 @@
                   <a:tcPr anchor="ctr" marL="73152" marR="73152">
                     <a:lnL w="9525" cap="flat" cmpd="sng" algn="ctr">
                       <a:solidFill>
-                        <a:srgbClr val="F7D4E3"/>
+                        <a:srgbClr val="FAD1E2"/>
                       </a:solidFill>
                       <a:prstDash val="solid"/>
                     </a:lnL>
                     <a:lnR w="9525" cap="flat" cmpd="sng" algn="ctr">
                       <a:solidFill>
-                        <a:srgbClr val="F7D4E3"/>
+                        <a:srgbClr val="FAD1E2"/>
                       </a:solidFill>
                       <a:prstDash val="solid"/>
                     </a:lnR>
                     <a:lnT w="9525" cap="flat" cmpd="sng" algn="ctr">
                       <a:solidFill>
-                        <a:srgbClr val="F7D4E3"/>
+                        <a:srgbClr val="FAD1E2"/>
                       </a:solidFill>
                       <a:prstDash val="solid"/>
                     </a:lnT>
                     <a:lnB w="9525" cap="flat" cmpd="sng" algn="ctr">
                       <a:solidFill>
-                        <a:srgbClr val="F7D4E3"/>
+                        <a:srgbClr val="FAD1E2"/>
                       </a:solidFill>
                       <a:prstDash val="solid"/>
                     </a:lnB>
                     <a:solidFill>
-                      <a:srgbClr val="FCF3F7"/>
+                      <a:srgbClr val="FDEAF2"/>
                     </a:solidFill>
                   </a:tcPr>
                 </a:tc>
@@ -4731,7 +4887,7 @@
                       <a:r>
                         <a:rPr sz="1400" b="0">
                           <a:solidFill>
-                            <a:srgbClr val="2B2B2B"/>
+                            <a:srgbClr val="26231F"/>
                           </a:solidFill>
                         </a:rPr>
                         <a:t/>
@@ -4741,30 +4897,30 @@
                   <a:tcPr anchor="ctr" marL="73152" marR="73152">
                     <a:lnL w="9525" cap="flat" cmpd="sng" algn="ctr">
                       <a:solidFill>
-                        <a:srgbClr val="F7D4E3"/>
+                        <a:srgbClr val="FAD1E2"/>
                       </a:solidFill>
                       <a:prstDash val="solid"/>
                     </a:lnL>
                     <a:lnR w="9525" cap="flat" cmpd="sng" algn="ctr">
                       <a:solidFill>
-                        <a:srgbClr val="F7D4E3"/>
+                        <a:srgbClr val="FAD1E2"/>
                       </a:solidFill>
                       <a:prstDash val="solid"/>
                     </a:lnR>
                     <a:lnT w="9525" cap="flat" cmpd="sng" algn="ctr">
                       <a:solidFill>
-                        <a:srgbClr val="F7D4E3"/>
+                        <a:srgbClr val="FAD1E2"/>
                       </a:solidFill>
                       <a:prstDash val="solid"/>
                     </a:lnT>
                     <a:lnB w="9525" cap="flat" cmpd="sng" algn="ctr">
                       <a:solidFill>
-                        <a:srgbClr val="F7D4E3"/>
+                        <a:srgbClr val="FAD1E2"/>
                       </a:solidFill>
                       <a:prstDash val="solid"/>
                     </a:lnB>
                     <a:solidFill>
-                      <a:srgbClr val="FCF3F7"/>
+                      <a:srgbClr val="FDEAF2"/>
                     </a:solidFill>
                   </a:tcPr>
                 </a:tc>
@@ -4777,7 +4933,7 @@
                       <a:r>
                         <a:rPr sz="1400" b="0">
                           <a:solidFill>
-                            <a:srgbClr val="2B2B2B"/>
+                            <a:srgbClr val="26231F"/>
                           </a:solidFill>
                         </a:rPr>
                         <a:t/>
@@ -4787,30 +4943,30 @@
                   <a:tcPr anchor="ctr" marL="73152" marR="73152">
                     <a:lnL w="9525" cap="flat" cmpd="sng" algn="ctr">
                       <a:solidFill>
-                        <a:srgbClr val="F7D4E3"/>
+                        <a:srgbClr val="FAD1E2"/>
                       </a:solidFill>
                       <a:prstDash val="solid"/>
                     </a:lnL>
                     <a:lnR w="9525" cap="flat" cmpd="sng" algn="ctr">
                       <a:solidFill>
-                        <a:srgbClr val="F7D4E3"/>
+                        <a:srgbClr val="FAD1E2"/>
                       </a:solidFill>
                       <a:prstDash val="solid"/>
                     </a:lnR>
                     <a:lnT w="9525" cap="flat" cmpd="sng" algn="ctr">
                       <a:solidFill>
-                        <a:srgbClr val="F7D4E3"/>
+                        <a:srgbClr val="FAD1E2"/>
                       </a:solidFill>
                       <a:prstDash val="solid"/>
                     </a:lnT>
                     <a:lnB w="9525" cap="flat" cmpd="sng" algn="ctr">
                       <a:solidFill>
-                        <a:srgbClr val="F7D4E3"/>
+                        <a:srgbClr val="FAD1E2"/>
                       </a:solidFill>
                       <a:prstDash val="solid"/>
                     </a:lnB>
                     <a:solidFill>
-                      <a:srgbClr val="FCF3F7"/>
+                      <a:srgbClr val="FDEAF2"/>
                     </a:solidFill>
                   </a:tcPr>
                 </a:tc>
@@ -4823,7 +4979,7 @@
                       <a:r>
                         <a:rPr sz="1400" b="0">
                           <a:solidFill>
-                            <a:srgbClr val="2B2B2B"/>
+                            <a:srgbClr val="26231F"/>
                           </a:solidFill>
                         </a:rPr>
                         <a:t/>
@@ -4833,30 +4989,30 @@
                   <a:tcPr anchor="ctr" marL="73152" marR="73152">
                     <a:lnL w="9525" cap="flat" cmpd="sng" algn="ctr">
                       <a:solidFill>
-                        <a:srgbClr val="F7D4E3"/>
+                        <a:srgbClr val="FAD1E2"/>
                       </a:solidFill>
                       <a:prstDash val="solid"/>
                     </a:lnL>
                     <a:lnR w="9525" cap="flat" cmpd="sng" algn="ctr">
                       <a:solidFill>
-                        <a:srgbClr val="F7D4E3"/>
+                        <a:srgbClr val="FAD1E2"/>
                       </a:solidFill>
                       <a:prstDash val="solid"/>
                     </a:lnR>
                     <a:lnT w="9525" cap="flat" cmpd="sng" algn="ctr">
                       <a:solidFill>
-                        <a:srgbClr val="F7D4E3"/>
+                        <a:srgbClr val="FAD1E2"/>
                       </a:solidFill>
                       <a:prstDash val="solid"/>
                     </a:lnT>
                     <a:lnB w="9525" cap="flat" cmpd="sng" algn="ctr">
                       <a:solidFill>
-                        <a:srgbClr val="F7D4E3"/>
+                        <a:srgbClr val="FAD1E2"/>
                       </a:solidFill>
                       <a:prstDash val="solid"/>
                     </a:lnB>
                     <a:solidFill>
-                      <a:srgbClr val="FCF3F7"/>
+                      <a:srgbClr val="FDEAF2"/>
                     </a:solidFill>
                   </a:tcPr>
                 </a:tc>
@@ -4869,7 +5025,7 @@
                       <a:r>
                         <a:rPr sz="1400" b="0">
                           <a:solidFill>
-                            <a:srgbClr val="2B2B2B"/>
+                            <a:srgbClr val="26231F"/>
                           </a:solidFill>
                         </a:rPr>
                         <a:t/>
@@ -4879,30 +5035,30 @@
                   <a:tcPr anchor="ctr" marL="73152" marR="73152">
                     <a:lnL w="9525" cap="flat" cmpd="sng" algn="ctr">
                       <a:solidFill>
-                        <a:srgbClr val="F7D4E3"/>
+                        <a:srgbClr val="FAD1E2"/>
                       </a:solidFill>
                       <a:prstDash val="solid"/>
                     </a:lnL>
                     <a:lnR w="9525" cap="flat" cmpd="sng" algn="ctr">
                       <a:solidFill>
-                        <a:srgbClr val="F7D4E3"/>
+                        <a:srgbClr val="FAD1E2"/>
                       </a:solidFill>
                       <a:prstDash val="solid"/>
                     </a:lnR>
                     <a:lnT w="9525" cap="flat" cmpd="sng" algn="ctr">
                       <a:solidFill>
-                        <a:srgbClr val="F7D4E3"/>
+                        <a:srgbClr val="FAD1E2"/>
                       </a:solidFill>
                       <a:prstDash val="solid"/>
                     </a:lnT>
                     <a:lnB w="9525" cap="flat" cmpd="sng" algn="ctr">
                       <a:solidFill>
-                        <a:srgbClr val="F7D4E3"/>
+                        <a:srgbClr val="FAD1E2"/>
                       </a:solidFill>
                       <a:prstDash val="solid"/>
                     </a:lnB>
                     <a:solidFill>
-                      <a:srgbClr val="FCF3F7"/>
+                      <a:srgbClr val="FDEAF2"/>
                     </a:solidFill>
                   </a:tcPr>
                 </a:tc>
@@ -4917,7 +5073,7 @@
                       <a:r>
                         <a:rPr sz="1400" b="0">
                           <a:solidFill>
-                            <a:srgbClr val="2B2B2B"/>
+                            <a:srgbClr val="26231F"/>
                           </a:solidFill>
                         </a:rPr>
                         <a:t/>
@@ -4927,25 +5083,25 @@
                   <a:tcPr anchor="ctr" marL="73152" marR="73152">
                     <a:lnL w="9525" cap="flat" cmpd="sng" algn="ctr">
                       <a:solidFill>
-                        <a:srgbClr val="F7D4E3"/>
+                        <a:srgbClr val="FAD1E2"/>
                       </a:solidFill>
                       <a:prstDash val="solid"/>
                     </a:lnL>
                     <a:lnR w="9525" cap="flat" cmpd="sng" algn="ctr">
                       <a:solidFill>
-                        <a:srgbClr val="F7D4E3"/>
+                        <a:srgbClr val="FAD1E2"/>
                       </a:solidFill>
                       <a:prstDash val="solid"/>
                     </a:lnR>
                     <a:lnT w="9525" cap="flat" cmpd="sng" algn="ctr">
                       <a:solidFill>
-                        <a:srgbClr val="F7D4E3"/>
+                        <a:srgbClr val="FAD1E2"/>
                       </a:solidFill>
                       <a:prstDash val="solid"/>
                     </a:lnT>
                     <a:lnB w="9525" cap="flat" cmpd="sng" algn="ctr">
                       <a:solidFill>
-                        <a:srgbClr val="F7D4E3"/>
+                        <a:srgbClr val="FAD1E2"/>
                       </a:solidFill>
                       <a:prstDash val="solid"/>
                     </a:lnB>
@@ -4963,7 +5119,7 @@
                       <a:r>
                         <a:rPr sz="1400" b="0">
                           <a:solidFill>
-                            <a:srgbClr val="2B2B2B"/>
+                            <a:srgbClr val="26231F"/>
                           </a:solidFill>
                         </a:rPr>
                         <a:t/>
@@ -4973,25 +5129,25 @@
                   <a:tcPr anchor="ctr" marL="73152" marR="73152">
                     <a:lnL w="9525" cap="flat" cmpd="sng" algn="ctr">
                       <a:solidFill>
-                        <a:srgbClr val="F7D4E3"/>
+                        <a:srgbClr val="FAD1E2"/>
                       </a:solidFill>
                       <a:prstDash val="solid"/>
                     </a:lnL>
                     <a:lnR w="9525" cap="flat" cmpd="sng" algn="ctr">
                       <a:solidFill>
-                        <a:srgbClr val="F7D4E3"/>
+                        <a:srgbClr val="FAD1E2"/>
                       </a:solidFill>
                       <a:prstDash val="solid"/>
                     </a:lnR>
                     <a:lnT w="9525" cap="flat" cmpd="sng" algn="ctr">
                       <a:solidFill>
-                        <a:srgbClr val="F7D4E3"/>
+                        <a:srgbClr val="FAD1E2"/>
                       </a:solidFill>
                       <a:prstDash val="solid"/>
                     </a:lnT>
                     <a:lnB w="9525" cap="flat" cmpd="sng" algn="ctr">
                       <a:solidFill>
-                        <a:srgbClr val="F7D4E3"/>
+                        <a:srgbClr val="FAD1E2"/>
                       </a:solidFill>
                       <a:prstDash val="solid"/>
                     </a:lnB>
@@ -5009,7 +5165,7 @@
                       <a:r>
                         <a:rPr sz="1400" b="0">
                           <a:solidFill>
-                            <a:srgbClr val="2B2B2B"/>
+                            <a:srgbClr val="26231F"/>
                           </a:solidFill>
                         </a:rPr>
                         <a:t/>
@@ -5019,25 +5175,25 @@
                   <a:tcPr anchor="ctr" marL="73152" marR="73152">
                     <a:lnL w="9525" cap="flat" cmpd="sng" algn="ctr">
                       <a:solidFill>
-                        <a:srgbClr val="F7D4E3"/>
+                        <a:srgbClr val="FAD1E2"/>
                       </a:solidFill>
                       <a:prstDash val="solid"/>
                     </a:lnL>
                     <a:lnR w="9525" cap="flat" cmpd="sng" algn="ctr">
                       <a:solidFill>
-                        <a:srgbClr val="F7D4E3"/>
+                        <a:srgbClr val="FAD1E2"/>
                       </a:solidFill>
                       <a:prstDash val="solid"/>
                     </a:lnR>
                     <a:lnT w="9525" cap="flat" cmpd="sng" algn="ctr">
                       <a:solidFill>
-                        <a:srgbClr val="F7D4E3"/>
+                        <a:srgbClr val="FAD1E2"/>
                       </a:solidFill>
                       <a:prstDash val="solid"/>
                     </a:lnT>
                     <a:lnB w="9525" cap="flat" cmpd="sng" algn="ctr">
                       <a:solidFill>
-                        <a:srgbClr val="F7D4E3"/>
+                        <a:srgbClr val="FAD1E2"/>
                       </a:solidFill>
                       <a:prstDash val="solid"/>
                     </a:lnB>
@@ -5055,7 +5211,7 @@
                       <a:r>
                         <a:rPr sz="1400" b="0">
                           <a:solidFill>
-                            <a:srgbClr val="2B2B2B"/>
+                            <a:srgbClr val="26231F"/>
                           </a:solidFill>
                         </a:rPr>
                         <a:t/>
@@ -5065,25 +5221,25 @@
                   <a:tcPr anchor="ctr" marL="73152" marR="73152">
                     <a:lnL w="9525" cap="flat" cmpd="sng" algn="ctr">
                       <a:solidFill>
-                        <a:srgbClr val="F7D4E3"/>
+                        <a:srgbClr val="FAD1E2"/>
                       </a:solidFill>
                       <a:prstDash val="solid"/>
                     </a:lnL>
                     <a:lnR w="9525" cap="flat" cmpd="sng" algn="ctr">
                       <a:solidFill>
-                        <a:srgbClr val="F7D4E3"/>
+                        <a:srgbClr val="FAD1E2"/>
                       </a:solidFill>
                       <a:prstDash val="solid"/>
                     </a:lnR>
                     <a:lnT w="9525" cap="flat" cmpd="sng" algn="ctr">
                       <a:solidFill>
-                        <a:srgbClr val="F7D4E3"/>
+                        <a:srgbClr val="FAD1E2"/>
                       </a:solidFill>
                       <a:prstDash val="solid"/>
                     </a:lnT>
                     <a:lnB w="9525" cap="flat" cmpd="sng" algn="ctr">
                       <a:solidFill>
-                        <a:srgbClr val="F7D4E3"/>
+                        <a:srgbClr val="FAD1E2"/>
                       </a:solidFill>
                       <a:prstDash val="solid"/>
                     </a:lnB>
@@ -5101,7 +5257,7 @@
                       <a:r>
                         <a:rPr sz="1400" b="0">
                           <a:solidFill>
-                            <a:srgbClr val="2B2B2B"/>
+                            <a:srgbClr val="26231F"/>
                           </a:solidFill>
                         </a:rPr>
                         <a:t/>
@@ -5111,25 +5267,25 @@
                   <a:tcPr anchor="ctr" marL="73152" marR="73152">
                     <a:lnL w="9525" cap="flat" cmpd="sng" algn="ctr">
                       <a:solidFill>
-                        <a:srgbClr val="F7D4E3"/>
+                        <a:srgbClr val="FAD1E2"/>
                       </a:solidFill>
                       <a:prstDash val="solid"/>
                     </a:lnL>
                     <a:lnR w="9525" cap="flat" cmpd="sng" algn="ctr">
                       <a:solidFill>
-                        <a:srgbClr val="F7D4E3"/>
+                        <a:srgbClr val="FAD1E2"/>
                       </a:solidFill>
                       <a:prstDash val="solid"/>
                     </a:lnR>
                     <a:lnT w="9525" cap="flat" cmpd="sng" algn="ctr">
                       <a:solidFill>
-                        <a:srgbClr val="F7D4E3"/>
+                        <a:srgbClr val="FAD1E2"/>
                       </a:solidFill>
                       <a:prstDash val="solid"/>
                     </a:lnT>
                     <a:lnB w="9525" cap="flat" cmpd="sng" algn="ctr">
                       <a:solidFill>
-                        <a:srgbClr val="F7D4E3"/>
+                        <a:srgbClr val="FAD1E2"/>
                       </a:solidFill>
                       <a:prstDash val="solid"/>
                     </a:lnB>
@@ -5149,7 +5305,7 @@
                       <a:r>
                         <a:rPr sz="1400" b="0">
                           <a:solidFill>
-                            <a:srgbClr val="2B2B2B"/>
+                            <a:srgbClr val="26231F"/>
                           </a:solidFill>
                         </a:rPr>
                         <a:t/>
@@ -5159,30 +5315,30 @@
                   <a:tcPr anchor="ctr" marL="73152" marR="73152">
                     <a:lnL w="9525" cap="flat" cmpd="sng" algn="ctr">
                       <a:solidFill>
-                        <a:srgbClr val="F7D4E3"/>
+                        <a:srgbClr val="FAD1E2"/>
                       </a:solidFill>
                       <a:prstDash val="solid"/>
                     </a:lnL>
                     <a:lnR w="9525" cap="flat" cmpd="sng" algn="ctr">
                       <a:solidFill>
-                        <a:srgbClr val="F7D4E3"/>
+                        <a:srgbClr val="FAD1E2"/>
                       </a:solidFill>
                       <a:prstDash val="solid"/>
                     </a:lnR>
                     <a:lnT w="9525" cap="flat" cmpd="sng" algn="ctr">
                       <a:solidFill>
-                        <a:srgbClr val="F7D4E3"/>
+                        <a:srgbClr val="FAD1E2"/>
                       </a:solidFill>
                       <a:prstDash val="solid"/>
                     </a:lnT>
                     <a:lnB w="9525" cap="flat" cmpd="sng" algn="ctr">
                       <a:solidFill>
-                        <a:srgbClr val="F7D4E3"/>
+                        <a:srgbClr val="FAD1E2"/>
                       </a:solidFill>
                       <a:prstDash val="solid"/>
                     </a:lnB>
                     <a:solidFill>
-                      <a:srgbClr val="FCF3F7"/>
+                      <a:srgbClr val="FDEAF2"/>
                     </a:solidFill>
                   </a:tcPr>
                 </a:tc>
@@ -5195,7 +5351,7 @@
                       <a:r>
                         <a:rPr sz="1400" b="0">
                           <a:solidFill>
-                            <a:srgbClr val="2B2B2B"/>
+                            <a:srgbClr val="26231F"/>
                           </a:solidFill>
                         </a:rPr>
                         <a:t/>
@@ -5205,30 +5361,30 @@
                   <a:tcPr anchor="ctr" marL="73152" marR="73152">
                     <a:lnL w="9525" cap="flat" cmpd="sng" algn="ctr">
                       <a:solidFill>
-                        <a:srgbClr val="F7D4E3"/>
+                        <a:srgbClr val="FAD1E2"/>
                       </a:solidFill>
                       <a:prstDash val="solid"/>
                     </a:lnL>
                     <a:lnR w="9525" cap="flat" cmpd="sng" algn="ctr">
                       <a:solidFill>
-                        <a:srgbClr val="F7D4E3"/>
+                        <a:srgbClr val="FAD1E2"/>
                       </a:solidFill>
                       <a:prstDash val="solid"/>
                     </a:lnR>
                     <a:lnT w="9525" cap="flat" cmpd="sng" algn="ctr">
                       <a:solidFill>
-                        <a:srgbClr val="F7D4E3"/>
+                        <a:srgbClr val="FAD1E2"/>
                       </a:solidFill>
                       <a:prstDash val="solid"/>
                     </a:lnT>
                     <a:lnB w="9525" cap="flat" cmpd="sng" algn="ctr">
                       <a:solidFill>
-                        <a:srgbClr val="F7D4E3"/>
+                        <a:srgbClr val="FAD1E2"/>
                       </a:solidFill>
                       <a:prstDash val="solid"/>
                     </a:lnB>
                     <a:solidFill>
-                      <a:srgbClr val="FCF3F7"/>
+                      <a:srgbClr val="FDEAF2"/>
                     </a:solidFill>
                   </a:tcPr>
                 </a:tc>
@@ -5241,7 +5397,7 @@
                       <a:r>
                         <a:rPr sz="1400" b="0">
                           <a:solidFill>
-                            <a:srgbClr val="2B2B2B"/>
+                            <a:srgbClr val="26231F"/>
                           </a:solidFill>
                         </a:rPr>
                         <a:t/>
@@ -5251,30 +5407,30 @@
                   <a:tcPr anchor="ctr" marL="73152" marR="73152">
                     <a:lnL w="9525" cap="flat" cmpd="sng" algn="ctr">
                       <a:solidFill>
-                        <a:srgbClr val="F7D4E3"/>
+                        <a:srgbClr val="FAD1E2"/>
                       </a:solidFill>
                       <a:prstDash val="solid"/>
                     </a:lnL>
                     <a:lnR w="9525" cap="flat" cmpd="sng" algn="ctr">
                       <a:solidFill>
-                        <a:srgbClr val="F7D4E3"/>
+                        <a:srgbClr val="FAD1E2"/>
                       </a:solidFill>
                       <a:prstDash val="solid"/>
                     </a:lnR>
                     <a:lnT w="9525" cap="flat" cmpd="sng" algn="ctr">
                       <a:solidFill>
-                        <a:srgbClr val="F7D4E3"/>
+                        <a:srgbClr val="FAD1E2"/>
                       </a:solidFill>
                       <a:prstDash val="solid"/>
                     </a:lnT>
                     <a:lnB w="9525" cap="flat" cmpd="sng" algn="ctr">
                       <a:solidFill>
-                        <a:srgbClr val="F7D4E3"/>
+                        <a:srgbClr val="FAD1E2"/>
                       </a:solidFill>
                       <a:prstDash val="solid"/>
                     </a:lnB>
                     <a:solidFill>
-                      <a:srgbClr val="FCF3F7"/>
+                      <a:srgbClr val="FDEAF2"/>
                     </a:solidFill>
                   </a:tcPr>
                 </a:tc>
@@ -5287,7 +5443,7 @@
                       <a:r>
                         <a:rPr sz="1400" b="0">
                           <a:solidFill>
-                            <a:srgbClr val="2B2B2B"/>
+                            <a:srgbClr val="26231F"/>
                           </a:solidFill>
                         </a:rPr>
                         <a:t/>
@@ -5297,30 +5453,30 @@
                   <a:tcPr anchor="ctr" marL="73152" marR="73152">
                     <a:lnL w="9525" cap="flat" cmpd="sng" algn="ctr">
                       <a:solidFill>
-                        <a:srgbClr val="F7D4E3"/>
+                        <a:srgbClr val="FAD1E2"/>
                       </a:solidFill>
                       <a:prstDash val="solid"/>
                     </a:lnL>
                     <a:lnR w="9525" cap="flat" cmpd="sng" algn="ctr">
                       <a:solidFill>
-                        <a:srgbClr val="F7D4E3"/>
+                        <a:srgbClr val="FAD1E2"/>
                       </a:solidFill>
                       <a:prstDash val="solid"/>
                     </a:lnR>
                     <a:lnT w="9525" cap="flat" cmpd="sng" algn="ctr">
                       <a:solidFill>
-                        <a:srgbClr val="F7D4E3"/>
+                        <a:srgbClr val="FAD1E2"/>
                       </a:solidFill>
                       <a:prstDash val="solid"/>
                     </a:lnT>
                     <a:lnB w="9525" cap="flat" cmpd="sng" algn="ctr">
                       <a:solidFill>
-                        <a:srgbClr val="F7D4E3"/>
+                        <a:srgbClr val="FAD1E2"/>
                       </a:solidFill>
                       <a:prstDash val="solid"/>
                     </a:lnB>
                     <a:solidFill>
-                      <a:srgbClr val="FCF3F7"/>
+                      <a:srgbClr val="FDEAF2"/>
                     </a:solidFill>
                   </a:tcPr>
                 </a:tc>
@@ -5333,7 +5489,7 @@
                       <a:r>
                         <a:rPr sz="1400" b="0">
                           <a:solidFill>
-                            <a:srgbClr val="2B2B2B"/>
+                            <a:srgbClr val="26231F"/>
                           </a:solidFill>
                         </a:rPr>
                         <a:t/>
@@ -5343,30 +5499,30 @@
                   <a:tcPr anchor="ctr" marL="73152" marR="73152">
                     <a:lnL w="9525" cap="flat" cmpd="sng" algn="ctr">
                       <a:solidFill>
-                        <a:srgbClr val="F7D4E3"/>
+                        <a:srgbClr val="FAD1E2"/>
                       </a:solidFill>
                       <a:prstDash val="solid"/>
                     </a:lnL>
                     <a:lnR w="9525" cap="flat" cmpd="sng" algn="ctr">
                       <a:solidFill>
-                        <a:srgbClr val="F7D4E3"/>
+                        <a:srgbClr val="FAD1E2"/>
                       </a:solidFill>
                       <a:prstDash val="solid"/>
                     </a:lnR>
                     <a:lnT w="9525" cap="flat" cmpd="sng" algn="ctr">
                       <a:solidFill>
-                        <a:srgbClr val="F7D4E3"/>
+                        <a:srgbClr val="FAD1E2"/>
                       </a:solidFill>
                       <a:prstDash val="solid"/>
                     </a:lnT>
                     <a:lnB w="9525" cap="flat" cmpd="sng" algn="ctr">
                       <a:solidFill>
-                        <a:srgbClr val="F7D4E3"/>
+                        <a:srgbClr val="FAD1E2"/>
                       </a:solidFill>
                       <a:prstDash val="solid"/>
                     </a:lnB>
                     <a:solidFill>
-                      <a:srgbClr val="FCF3F7"/>
+                      <a:srgbClr val="FDEAF2"/>
                     </a:solidFill>
                   </a:tcPr>
                 </a:tc>
@@ -5381,7 +5537,7 @@
                       <a:r>
                         <a:rPr sz="1400" b="0">
                           <a:solidFill>
-                            <a:srgbClr val="2B2B2B"/>
+                            <a:srgbClr val="26231F"/>
                           </a:solidFill>
                         </a:rPr>
                         <a:t/>
@@ -5391,25 +5547,25 @@
                   <a:tcPr anchor="ctr" marL="73152" marR="73152">
                     <a:lnL w="9525" cap="flat" cmpd="sng" algn="ctr">
                       <a:solidFill>
-                        <a:srgbClr val="F7D4E3"/>
+                        <a:srgbClr val="FAD1E2"/>
                       </a:solidFill>
                       <a:prstDash val="solid"/>
                     </a:lnL>
                     <a:lnR w="9525" cap="flat" cmpd="sng" algn="ctr">
                       <a:solidFill>
-                        <a:srgbClr val="F7D4E3"/>
+                        <a:srgbClr val="FAD1E2"/>
                       </a:solidFill>
                       <a:prstDash val="solid"/>
                     </a:lnR>
                     <a:lnT w="9525" cap="flat" cmpd="sng" algn="ctr">
                       <a:solidFill>
-                        <a:srgbClr val="F7D4E3"/>
+                        <a:srgbClr val="FAD1E2"/>
                       </a:solidFill>
                       <a:prstDash val="solid"/>
                     </a:lnT>
                     <a:lnB w="9525" cap="flat" cmpd="sng" algn="ctr">
                       <a:solidFill>
-                        <a:srgbClr val="F7D4E3"/>
+                        <a:srgbClr val="FAD1E2"/>
                       </a:solidFill>
                       <a:prstDash val="solid"/>
                     </a:lnB>
@@ -5427,7 +5583,7 @@
                       <a:r>
                         <a:rPr sz="1400" b="0">
                           <a:solidFill>
-                            <a:srgbClr val="2B2B2B"/>
+                            <a:srgbClr val="26231F"/>
                           </a:solidFill>
                         </a:rPr>
                         <a:t/>
@@ -5437,25 +5593,25 @@
                   <a:tcPr anchor="ctr" marL="73152" marR="73152">
                     <a:lnL w="9525" cap="flat" cmpd="sng" algn="ctr">
                       <a:solidFill>
-                        <a:srgbClr val="F7D4E3"/>
+                        <a:srgbClr val="FAD1E2"/>
                       </a:solidFill>
                       <a:prstDash val="solid"/>
                     </a:lnL>
                     <a:lnR w="9525" cap="flat" cmpd="sng" algn="ctr">
                       <a:solidFill>
-                        <a:srgbClr val="F7D4E3"/>
+                        <a:srgbClr val="FAD1E2"/>
                       </a:solidFill>
                       <a:prstDash val="solid"/>
                     </a:lnR>
                     <a:lnT w="9525" cap="flat" cmpd="sng" algn="ctr">
                       <a:solidFill>
-                        <a:srgbClr val="F7D4E3"/>
+                        <a:srgbClr val="FAD1E2"/>
                       </a:solidFill>
                       <a:prstDash val="solid"/>
                     </a:lnT>
                     <a:lnB w="9525" cap="flat" cmpd="sng" algn="ctr">
                       <a:solidFill>
-                        <a:srgbClr val="F7D4E3"/>
+                        <a:srgbClr val="FAD1E2"/>
                       </a:solidFill>
                       <a:prstDash val="solid"/>
                     </a:lnB>
@@ -5473,7 +5629,7 @@
                       <a:r>
                         <a:rPr sz="1400" b="0">
                           <a:solidFill>
-                            <a:srgbClr val="2B2B2B"/>
+                            <a:srgbClr val="26231F"/>
                           </a:solidFill>
                         </a:rPr>
                         <a:t/>
@@ -5483,25 +5639,25 @@
                   <a:tcPr anchor="ctr" marL="73152" marR="73152">
                     <a:lnL w="9525" cap="flat" cmpd="sng" algn="ctr">
                       <a:solidFill>
-                        <a:srgbClr val="F7D4E3"/>
+                        <a:srgbClr val="FAD1E2"/>
                       </a:solidFill>
                       <a:prstDash val="solid"/>
                     </a:lnL>
                     <a:lnR w="9525" cap="flat" cmpd="sng" algn="ctr">
                       <a:solidFill>
-                        <a:srgbClr val="F7D4E3"/>
+                        <a:srgbClr val="FAD1E2"/>
                       </a:solidFill>
                       <a:prstDash val="solid"/>
                     </a:lnR>
                     <a:lnT w="9525" cap="flat" cmpd="sng" algn="ctr">
                       <a:solidFill>
-                        <a:srgbClr val="F7D4E3"/>
+                        <a:srgbClr val="FAD1E2"/>
                       </a:solidFill>
                       <a:prstDash val="solid"/>
                     </a:lnT>
                     <a:lnB w="9525" cap="flat" cmpd="sng" algn="ctr">
                       <a:solidFill>
-                        <a:srgbClr val="F7D4E3"/>
+                        <a:srgbClr val="FAD1E2"/>
                       </a:solidFill>
                       <a:prstDash val="solid"/>
                     </a:lnB>
@@ -5519,7 +5675,7 @@
                       <a:r>
                         <a:rPr sz="1400" b="0">
                           <a:solidFill>
-                            <a:srgbClr val="2B2B2B"/>
+                            <a:srgbClr val="26231F"/>
                           </a:solidFill>
                         </a:rPr>
                         <a:t/>
@@ -5529,25 +5685,25 @@
                   <a:tcPr anchor="ctr" marL="73152" marR="73152">
                     <a:lnL w="9525" cap="flat" cmpd="sng" algn="ctr">
                       <a:solidFill>
-                        <a:srgbClr val="F7D4E3"/>
+                        <a:srgbClr val="FAD1E2"/>
                       </a:solidFill>
                       <a:prstDash val="solid"/>
                     </a:lnL>
                     <a:lnR w="9525" cap="flat" cmpd="sng" algn="ctr">
                       <a:solidFill>
-                        <a:srgbClr val="F7D4E3"/>
+                        <a:srgbClr val="FAD1E2"/>
                       </a:solidFill>
                       <a:prstDash val="solid"/>
                     </a:lnR>
                     <a:lnT w="9525" cap="flat" cmpd="sng" algn="ctr">
                       <a:solidFill>
-                        <a:srgbClr val="F7D4E3"/>
+                        <a:srgbClr val="FAD1E2"/>
                       </a:solidFill>
                       <a:prstDash val="solid"/>
                     </a:lnT>
                     <a:lnB w="9525" cap="flat" cmpd="sng" algn="ctr">
                       <a:solidFill>
-                        <a:srgbClr val="F7D4E3"/>
+                        <a:srgbClr val="FAD1E2"/>
                       </a:solidFill>
                       <a:prstDash val="solid"/>
                     </a:lnB>
@@ -5565,7 +5721,7 @@
                       <a:r>
                         <a:rPr sz="1400" b="0">
                           <a:solidFill>
-                            <a:srgbClr val="2B2B2B"/>
+                            <a:srgbClr val="26231F"/>
                           </a:solidFill>
                         </a:rPr>
                         <a:t/>
@@ -5575,25 +5731,25 @@
                   <a:tcPr anchor="ctr" marL="73152" marR="73152">
                     <a:lnL w="9525" cap="flat" cmpd="sng" algn="ctr">
                       <a:solidFill>
-                        <a:srgbClr val="F7D4E3"/>
+                        <a:srgbClr val="FAD1E2"/>
                       </a:solidFill>
                       <a:prstDash val="solid"/>
                     </a:lnL>
                     <a:lnR w="9525" cap="flat" cmpd="sng" algn="ctr">
                       <a:solidFill>
-                        <a:srgbClr val="F7D4E3"/>
+                        <a:srgbClr val="FAD1E2"/>
                       </a:solidFill>
                       <a:prstDash val="solid"/>
                     </a:lnR>
                     <a:lnT w="9525" cap="flat" cmpd="sng" algn="ctr">
                       <a:solidFill>
-                        <a:srgbClr val="F7D4E3"/>
+                        <a:srgbClr val="FAD1E2"/>
                       </a:solidFill>
                       <a:prstDash val="solid"/>
                     </a:lnT>
                     <a:lnB w="9525" cap="flat" cmpd="sng" algn="ctr">
                       <a:solidFill>
-                        <a:srgbClr val="F7D4E3"/>
+                        <a:srgbClr val="FAD1E2"/>
                       </a:solidFill>
                       <a:prstDash val="solid"/>
                     </a:lnB>
@@ -5613,7 +5769,7 @@
                       <a:r>
                         <a:rPr sz="1400" b="0">
                           <a:solidFill>
-                            <a:srgbClr val="2B2B2B"/>
+                            <a:srgbClr val="26231F"/>
                           </a:solidFill>
                         </a:rPr>
                         <a:t/>
@@ -5623,30 +5779,30 @@
                   <a:tcPr anchor="ctr" marL="73152" marR="73152">
                     <a:lnL w="9525" cap="flat" cmpd="sng" algn="ctr">
                       <a:solidFill>
-                        <a:srgbClr val="F7D4E3"/>
+                        <a:srgbClr val="FAD1E2"/>
                       </a:solidFill>
                       <a:prstDash val="solid"/>
                     </a:lnL>
                     <a:lnR w="9525" cap="flat" cmpd="sng" algn="ctr">
                       <a:solidFill>
-                        <a:srgbClr val="F7D4E3"/>
+                        <a:srgbClr val="FAD1E2"/>
                       </a:solidFill>
                       <a:prstDash val="solid"/>
                     </a:lnR>
                     <a:lnT w="9525" cap="flat" cmpd="sng" algn="ctr">
                       <a:solidFill>
-                        <a:srgbClr val="F7D4E3"/>
+                        <a:srgbClr val="FAD1E2"/>
                       </a:solidFill>
                       <a:prstDash val="solid"/>
                     </a:lnT>
                     <a:lnB w="9525" cap="flat" cmpd="sng" algn="ctr">
                       <a:solidFill>
-                        <a:srgbClr val="F7D4E3"/>
+                        <a:srgbClr val="FAD1E2"/>
                       </a:solidFill>
                       <a:prstDash val="solid"/>
                     </a:lnB>
                     <a:solidFill>
-                      <a:srgbClr val="FCF3F7"/>
+                      <a:srgbClr val="FDEAF2"/>
                     </a:solidFill>
                   </a:tcPr>
                 </a:tc>
@@ -5659,7 +5815,7 @@
                       <a:r>
                         <a:rPr sz="1400" b="0">
                           <a:solidFill>
-                            <a:srgbClr val="2B2B2B"/>
+                            <a:srgbClr val="26231F"/>
                           </a:solidFill>
                         </a:rPr>
                         <a:t/>
@@ -5669,30 +5825,30 @@
                   <a:tcPr anchor="ctr" marL="73152" marR="73152">
                     <a:lnL w="9525" cap="flat" cmpd="sng" algn="ctr">
                       <a:solidFill>
-                        <a:srgbClr val="F7D4E3"/>
+                        <a:srgbClr val="FAD1E2"/>
                       </a:solidFill>
                       <a:prstDash val="solid"/>
                     </a:lnL>
                     <a:lnR w="9525" cap="flat" cmpd="sng" algn="ctr">
                       <a:solidFill>
-                        <a:srgbClr val="F7D4E3"/>
+                        <a:srgbClr val="FAD1E2"/>
                       </a:solidFill>
                       <a:prstDash val="solid"/>
                     </a:lnR>
                     <a:lnT w="9525" cap="flat" cmpd="sng" algn="ctr">
                       <a:solidFill>
-                        <a:srgbClr val="F7D4E3"/>
+                        <a:srgbClr val="FAD1E2"/>
                       </a:solidFill>
                       <a:prstDash val="solid"/>
                     </a:lnT>
                     <a:lnB w="9525" cap="flat" cmpd="sng" algn="ctr">
                       <a:solidFill>
-                        <a:srgbClr val="F7D4E3"/>
+                        <a:srgbClr val="FAD1E2"/>
                       </a:solidFill>
                       <a:prstDash val="solid"/>
                     </a:lnB>
                     <a:solidFill>
-                      <a:srgbClr val="FCF3F7"/>
+                      <a:srgbClr val="FDEAF2"/>
                     </a:solidFill>
                   </a:tcPr>
                 </a:tc>
@@ -5705,7 +5861,7 @@
                       <a:r>
                         <a:rPr sz="1400" b="0">
                           <a:solidFill>
-                            <a:srgbClr val="2B2B2B"/>
+                            <a:srgbClr val="26231F"/>
                           </a:solidFill>
                         </a:rPr>
                         <a:t/>
@@ -5715,30 +5871,30 @@
                   <a:tcPr anchor="ctr" marL="73152" marR="73152">
                     <a:lnL w="9525" cap="flat" cmpd="sng" algn="ctr">
                       <a:solidFill>
-                        <a:srgbClr val="F7D4E3"/>
+                        <a:srgbClr val="FAD1E2"/>
                       </a:solidFill>
                       <a:prstDash val="solid"/>
                     </a:lnL>
                     <a:lnR w="9525" cap="flat" cmpd="sng" algn="ctr">
                       <a:solidFill>
-                        <a:srgbClr val="F7D4E3"/>
+                        <a:srgbClr val="FAD1E2"/>
                       </a:solidFill>
                       <a:prstDash val="solid"/>
                     </a:lnR>
                     <a:lnT w="9525" cap="flat" cmpd="sng" algn="ctr">
                       <a:solidFill>
-                        <a:srgbClr val="F7D4E3"/>
+                        <a:srgbClr val="FAD1E2"/>
                       </a:solidFill>
                       <a:prstDash val="solid"/>
                     </a:lnT>
                     <a:lnB w="9525" cap="flat" cmpd="sng" algn="ctr">
                       <a:solidFill>
-                        <a:srgbClr val="F7D4E3"/>
+                        <a:srgbClr val="FAD1E2"/>
                       </a:solidFill>
                       <a:prstDash val="solid"/>
                     </a:lnB>
                     <a:solidFill>
-                      <a:srgbClr val="FCF3F7"/>
+                      <a:srgbClr val="FDEAF2"/>
                     </a:solidFill>
                   </a:tcPr>
                 </a:tc>
@@ -5751,7 +5907,7 @@
                       <a:r>
                         <a:rPr sz="1400" b="0">
                           <a:solidFill>
-                            <a:srgbClr val="2B2B2B"/>
+                            <a:srgbClr val="26231F"/>
                           </a:solidFill>
                         </a:rPr>
                         <a:t/>
@@ -5761,30 +5917,30 @@
                   <a:tcPr anchor="ctr" marL="73152" marR="73152">
                     <a:lnL w="9525" cap="flat" cmpd="sng" algn="ctr">
                       <a:solidFill>
-                        <a:srgbClr val="F7D4E3"/>
+                        <a:srgbClr val="FAD1E2"/>
                       </a:solidFill>
                       <a:prstDash val="solid"/>
                     </a:lnL>
                     <a:lnR w="9525" cap="flat" cmpd="sng" algn="ctr">
                       <a:solidFill>
-                        <a:srgbClr val="F7D4E3"/>
+                        <a:srgbClr val="FAD1E2"/>
                       </a:solidFill>
                       <a:prstDash val="solid"/>
                     </a:lnR>
                     <a:lnT w="9525" cap="flat" cmpd="sng" algn="ctr">
                       <a:solidFill>
-                        <a:srgbClr val="F7D4E3"/>
+                        <a:srgbClr val="FAD1E2"/>
                       </a:solidFill>
                       <a:prstDash val="solid"/>
                     </a:lnT>
                     <a:lnB w="9525" cap="flat" cmpd="sng" algn="ctr">
                       <a:solidFill>
-                        <a:srgbClr val="F7D4E3"/>
+                        <a:srgbClr val="FAD1E2"/>
                       </a:solidFill>
                       <a:prstDash val="solid"/>
                     </a:lnB>
                     <a:solidFill>
-                      <a:srgbClr val="FCF3F7"/>
+                      <a:srgbClr val="FDEAF2"/>
                     </a:solidFill>
                   </a:tcPr>
                 </a:tc>
@@ -5797,7 +5953,7 @@
                       <a:r>
                         <a:rPr sz="1400" b="0">
                           <a:solidFill>
-                            <a:srgbClr val="2B2B2B"/>
+                            <a:srgbClr val="26231F"/>
                           </a:solidFill>
                         </a:rPr>
                         <a:t/>
@@ -5807,30 +5963,30 @@
                   <a:tcPr anchor="ctr" marL="73152" marR="73152">
                     <a:lnL w="9525" cap="flat" cmpd="sng" algn="ctr">
                       <a:solidFill>
-                        <a:srgbClr val="F7D4E3"/>
+                        <a:srgbClr val="FAD1E2"/>
                       </a:solidFill>
                       <a:prstDash val="solid"/>
                     </a:lnL>
                     <a:lnR w="9525" cap="flat" cmpd="sng" algn="ctr">
                       <a:solidFill>
-                        <a:srgbClr val="F7D4E3"/>
+                        <a:srgbClr val="FAD1E2"/>
                       </a:solidFill>
                       <a:prstDash val="solid"/>
                     </a:lnR>
                     <a:lnT w="9525" cap="flat" cmpd="sng" algn="ctr">
                       <a:solidFill>
-                        <a:srgbClr val="F7D4E3"/>
+                        <a:srgbClr val="FAD1E2"/>
                       </a:solidFill>
                       <a:prstDash val="solid"/>
                     </a:lnT>
                     <a:lnB w="9525" cap="flat" cmpd="sng" algn="ctr">
                       <a:solidFill>
-                        <a:srgbClr val="F7D4E3"/>
+                        <a:srgbClr val="FAD1E2"/>
                       </a:solidFill>
                       <a:prstDash val="solid"/>
                     </a:lnB>
                     <a:solidFill>
-                      <a:srgbClr val="FCF3F7"/>
+                      <a:srgbClr val="FDEAF2"/>
                     </a:solidFill>
                   </a:tcPr>
                 </a:tc>
@@ -5853,7 +6009,7 @@
     <p:bg>
       <p:bgPr>
         <a:solidFill>
-          <a:srgbClr val="FCF3F7"/>
+          <a:srgbClr val="FDFAFB"/>
         </a:solidFill>
         <a:effectLst/>
       </p:bgPr>
@@ -5867,20 +6023,49 @@
       <p:grpSpPr/>
       <p:sp>
         <p:nvSpPr>
-          <p:cNvPr id="3" name="장식"/>
+          <p:cNvPr id="3" name="포인트"/>
           <p:cNvSpPr/>
           <p:nvPr/>
         </p:nvSpPr>
         <p:spPr>
           <a:xfrm>
-            <a:off x="0" y="0"/>
-            <a:ext cx="12191695" cy="274320"/>
+            <a:off x="5958687" y="246888"/>
+            <a:ext cx="274320" cy="274320"/>
+          </a:xfrm>
+          <a:prstGeom prst="heart">
+            <a:avLst/>
+          </a:prstGeom>
+          <a:solidFill>
+            <a:srgbClr val="ED97BB"/>
+          </a:solidFill>
+          <a:ln>
+            <a:noFill/>
+          </a:ln>
+        </p:spPr>
+        <p:txBody>
+          <a:bodyPr rtlCol="0" anchor="ctr"/>
+          <a:lstStyle/>
+          <a:p>
+            <a:pPr algn="ctr"/>
+          </a:p>
+        </p:txBody>
+      </p:sp>
+      <p:sp>
+        <p:nvSpPr>
+          <p:cNvPr id="4" name="장식"/>
+          <p:cNvSpPr/>
+          <p:nvPr/>
+        </p:nvSpPr>
+        <p:spPr>
+          <a:xfrm>
+            <a:off x="5684367" y="1572768"/>
+            <a:ext cx="822960" cy="22860"/>
           </a:xfrm>
           <a:prstGeom prst="rect">
             <a:avLst/>
           </a:prstGeom>
           <a:solidFill>
-            <a:srgbClr val="CD4C82"/>
+            <a:srgbClr val="ED97BB"/>
           </a:solidFill>
           <a:ln>
             <a:noFill/>
@@ -5896,30 +6081,39 @@
       </p:sp>
       <p:sp>
         <p:nvSpPr>
-          <p:cNvPr id="4" name="장식"/>
-          <p:cNvSpPr/>
+          <p:cNvPr id="5" name="상단 라벨"/>
+          <p:cNvSpPr txBox="1"/>
           <p:nvPr/>
         </p:nvSpPr>
         <p:spPr>
           <a:xfrm>
-            <a:off x="0" y="274320"/>
-            <a:ext cx="12191695" cy="54864"/>
+            <a:off x="640080" y="182880"/>
+            <a:ext cx="3657600" cy="274320"/>
           </a:xfrm>
           <a:prstGeom prst="rect">
             <a:avLst/>
           </a:prstGeom>
-          <a:solidFill>
-            <a:srgbClr val="339941"/>
-          </a:solidFill>
-          <a:ln>
-            <a:noFill/>
-          </a:ln>
-        </p:spPr>
-        <p:txBody>
-          <a:bodyPr rtlCol="0" anchor="ctr"/>
-          <a:lstStyle/>
-          <a:p>
-            <a:pPr algn="ctr"/>
+          <a:noFill/>
+        </p:spPr>
+        <p:txBody>
+          <a:bodyPr wrap="square" lIns="54864" rIns="54864" tIns="27432" bIns="27432" anchor="ctr">
+            <a:noAutofit/>
+          </a:bodyPr>
+          <a:lstStyle/>
+          <a:p>
+            <a:pPr algn="l">
+              <a:lnSpc>
+                <a:spcPct val="115000"/>
+              </a:lnSpc>
+            </a:pPr>
+            <a:r>
+              <a:rPr sz="800" b="1" i="0" spc="250">
+                <a:solidFill>
+                  <a:srgbClr val="8E8780"/>
+                </a:solidFill>
+              </a:rPr>
+              <a:t>INSURANCE CHECK</a:t>
+            </a:r>
           </a:p>
         </p:txBody>
       </p:sp>
@@ -5935,8 +6129,8 @@
         </p:nvSpPr>
         <p:spPr>
           <a:xfrm>
-            <a:off x="640080" y="457200"/>
-            <a:ext cx="9722815" cy="868680"/>
+            <a:off x="1371600" y="640080"/>
+            <a:ext cx="9448495" cy="868680"/>
           </a:xfrm>
         </p:spPr>
         <p:txBody>
@@ -5945,7 +6139,7 @@
           </a:bodyPr>
           <a:lstStyle/>
           <a:p>
-            <a:pPr algn="l">
+            <a:pPr algn="ctr">
               <a:lnSpc>
                 <a:spcPct val="105000"/>
               </a:lnSpc>
@@ -5953,7 +6147,7 @@
             <a:r>
               <a:rPr sz="3000" b="1" i="0">
                 <a:solidFill>
-                  <a:srgbClr val="6F1F41"/>
+                  <a:srgbClr val="26231F"/>
                 </a:solidFill>
               </a:rPr>
               <a:t>보장 항목 체크</a:t>
@@ -5963,14 +6157,14 @@
       </p:sp>
       <p:graphicFrame>
         <p:nvGraphicFramePr>
-          <p:cNvPr id="5" name="표"/>
+          <p:cNvPr id="6" name="표"/>
           <p:cNvGraphicFramePr>
             <a:graphicFrameLocks noGrp="1"/>
           </p:cNvGraphicFramePr>
           <p:nvPr/>
         </p:nvGraphicFramePr>
         <p:xfrm>
-          <a:off x="640080" y="1600200"/>
+          <a:off x="640080" y="1783080"/>
           <a:ext cx="10911534" cy="4773168"/>
         </p:xfrm>
         <a:graphic>
@@ -5995,7 +6189,7 @@
                       <a:r>
                         <a:rPr sz="1400" b="1">
                           <a:solidFill>
-                            <a:srgbClr val="FFFFFF"/>
+                            <a:srgbClr val="26231F"/>
                           </a:solidFill>
                         </a:rPr>
                         <a:t>보장 항목</a:t>
@@ -6005,30 +6199,30 @@
                   <a:tcPr anchor="ctr" marL="73152" marR="73152">
                     <a:lnL w="9525" cap="flat" cmpd="sng" algn="ctr">
                       <a:solidFill>
-                        <a:srgbClr val="CD4C82"/>
+                        <a:srgbClr val="ED97BB"/>
                       </a:solidFill>
                       <a:prstDash val="solid"/>
                     </a:lnL>
                     <a:lnR w="9525" cap="flat" cmpd="sng" algn="ctr">
                       <a:solidFill>
-                        <a:srgbClr val="CD4C82"/>
+                        <a:srgbClr val="ED97BB"/>
                       </a:solidFill>
                       <a:prstDash val="solid"/>
                     </a:lnR>
                     <a:lnT w="9525" cap="flat" cmpd="sng" algn="ctr">
                       <a:solidFill>
-                        <a:srgbClr val="CD4C82"/>
+                        <a:srgbClr val="ED97BB"/>
                       </a:solidFill>
                       <a:prstDash val="solid"/>
                     </a:lnT>
                     <a:lnB w="9525" cap="flat" cmpd="sng" algn="ctr">
                       <a:solidFill>
-                        <a:srgbClr val="CD4C82"/>
+                        <a:srgbClr val="ED97BB"/>
                       </a:solidFill>
                       <a:prstDash val="solid"/>
                     </a:lnB>
                     <a:solidFill>
-                      <a:srgbClr val="CD4C82"/>
+                      <a:srgbClr val="ED97BB"/>
                     </a:solidFill>
                   </a:tcPr>
                 </a:tc>
@@ -6041,7 +6235,7 @@
                       <a:r>
                         <a:rPr sz="1400" b="1">
                           <a:solidFill>
-                            <a:srgbClr val="FFFFFF"/>
+                            <a:srgbClr val="26231F"/>
                           </a:solidFill>
                         </a:rPr>
                         <a:t>가입 확인</a:t>
@@ -6051,30 +6245,30 @@
                   <a:tcPr anchor="ctr" marL="73152" marR="73152">
                     <a:lnL w="9525" cap="flat" cmpd="sng" algn="ctr">
                       <a:solidFill>
-                        <a:srgbClr val="CD4C82"/>
+                        <a:srgbClr val="ED97BB"/>
                       </a:solidFill>
                       <a:prstDash val="solid"/>
                     </a:lnL>
                     <a:lnR w="9525" cap="flat" cmpd="sng" algn="ctr">
                       <a:solidFill>
-                        <a:srgbClr val="CD4C82"/>
+                        <a:srgbClr val="ED97BB"/>
                       </a:solidFill>
                       <a:prstDash val="solid"/>
                     </a:lnR>
                     <a:lnT w="9525" cap="flat" cmpd="sng" algn="ctr">
                       <a:solidFill>
-                        <a:srgbClr val="CD4C82"/>
+                        <a:srgbClr val="ED97BB"/>
                       </a:solidFill>
                       <a:prstDash val="solid"/>
                     </a:lnT>
                     <a:lnB w="9525" cap="flat" cmpd="sng" algn="ctr">
                       <a:solidFill>
-                        <a:srgbClr val="CD4C82"/>
+                        <a:srgbClr val="ED97BB"/>
                       </a:solidFill>
                       <a:prstDash val="solid"/>
                     </a:lnB>
                     <a:solidFill>
-                      <a:srgbClr val="CD4C82"/>
+                      <a:srgbClr val="ED97BB"/>
                     </a:solidFill>
                   </a:tcPr>
                 </a:tc>
@@ -6087,7 +6281,7 @@
                       <a:r>
                         <a:rPr sz="1400" b="1">
                           <a:solidFill>
-                            <a:srgbClr val="FFFFFF"/>
+                            <a:srgbClr val="26231F"/>
                           </a:solidFill>
                         </a:rPr>
                         <a:t>확인 필요</a:t>
@@ -6097,30 +6291,30 @@
                   <a:tcPr anchor="ctr" marL="73152" marR="73152">
                     <a:lnL w="9525" cap="flat" cmpd="sng" algn="ctr">
                       <a:solidFill>
-                        <a:srgbClr val="CD4C82"/>
+                        <a:srgbClr val="ED97BB"/>
                       </a:solidFill>
                       <a:prstDash val="solid"/>
                     </a:lnL>
                     <a:lnR w="9525" cap="flat" cmpd="sng" algn="ctr">
                       <a:solidFill>
-                        <a:srgbClr val="CD4C82"/>
+                        <a:srgbClr val="ED97BB"/>
                       </a:solidFill>
                       <a:prstDash val="solid"/>
                     </a:lnR>
                     <a:lnT w="9525" cap="flat" cmpd="sng" algn="ctr">
                       <a:solidFill>
-                        <a:srgbClr val="CD4C82"/>
+                        <a:srgbClr val="ED97BB"/>
                       </a:solidFill>
                       <a:prstDash val="solid"/>
                     </a:lnT>
                     <a:lnB w="9525" cap="flat" cmpd="sng" algn="ctr">
                       <a:solidFill>
-                        <a:srgbClr val="CD4C82"/>
+                        <a:srgbClr val="ED97BB"/>
                       </a:solidFill>
                       <a:prstDash val="solid"/>
                     </a:lnB>
                     <a:solidFill>
-                      <a:srgbClr val="CD4C82"/>
+                      <a:srgbClr val="ED97BB"/>
                     </a:solidFill>
                   </a:tcPr>
                 </a:tc>
@@ -6133,7 +6327,7 @@
                       <a:r>
                         <a:rPr sz="1400" b="1">
                           <a:solidFill>
-                            <a:srgbClr val="FFFFFF"/>
+                            <a:srgbClr val="26231F"/>
                           </a:solidFill>
                         </a:rPr>
                         <a:t>해당 없음</a:t>
@@ -6143,30 +6337,30 @@
                   <a:tcPr anchor="ctr" marL="73152" marR="73152">
                     <a:lnL w="9525" cap="flat" cmpd="sng" algn="ctr">
                       <a:solidFill>
-                        <a:srgbClr val="CD4C82"/>
+                        <a:srgbClr val="ED97BB"/>
                       </a:solidFill>
                       <a:prstDash val="solid"/>
                     </a:lnL>
                     <a:lnR w="9525" cap="flat" cmpd="sng" algn="ctr">
                       <a:solidFill>
-                        <a:srgbClr val="CD4C82"/>
+                        <a:srgbClr val="ED97BB"/>
                       </a:solidFill>
                       <a:prstDash val="solid"/>
                     </a:lnR>
                     <a:lnT w="9525" cap="flat" cmpd="sng" algn="ctr">
                       <a:solidFill>
-                        <a:srgbClr val="CD4C82"/>
+                        <a:srgbClr val="ED97BB"/>
                       </a:solidFill>
                       <a:prstDash val="solid"/>
                     </a:lnT>
                     <a:lnB w="9525" cap="flat" cmpd="sng" algn="ctr">
                       <a:solidFill>
-                        <a:srgbClr val="CD4C82"/>
+                        <a:srgbClr val="ED97BB"/>
                       </a:solidFill>
                       <a:prstDash val="solid"/>
                     </a:lnB>
                     <a:solidFill>
-                      <a:srgbClr val="CD4C82"/>
+                      <a:srgbClr val="ED97BB"/>
                     </a:solidFill>
                   </a:tcPr>
                 </a:tc>
@@ -6181,7 +6375,7 @@
                       <a:r>
                         <a:rPr sz="1400" b="1">
                           <a:solidFill>
-                            <a:srgbClr val="6F1F41"/>
+                            <a:srgbClr val="492735"/>
                           </a:solidFill>
                         </a:rPr>
                         <a:t>사망·재해</a:t>
@@ -6191,30 +6385,30 @@
                   <a:tcPr anchor="ctr" marL="73152" marR="73152">
                     <a:lnL w="9525" cap="flat" cmpd="sng" algn="ctr">
                       <a:solidFill>
-                        <a:srgbClr val="F7D4E3"/>
+                        <a:srgbClr val="FAD1E2"/>
                       </a:solidFill>
                       <a:prstDash val="solid"/>
                     </a:lnL>
                     <a:lnR w="9525" cap="flat" cmpd="sng" algn="ctr">
                       <a:solidFill>
-                        <a:srgbClr val="F7D4E3"/>
+                        <a:srgbClr val="FAD1E2"/>
                       </a:solidFill>
                       <a:prstDash val="solid"/>
                     </a:lnR>
                     <a:lnT w="9525" cap="flat" cmpd="sng" algn="ctr">
                       <a:solidFill>
-                        <a:srgbClr val="F7D4E3"/>
+                        <a:srgbClr val="FAD1E2"/>
                       </a:solidFill>
                       <a:prstDash val="solid"/>
                     </a:lnT>
                     <a:lnB w="9525" cap="flat" cmpd="sng" algn="ctr">
                       <a:solidFill>
-                        <a:srgbClr val="F7D4E3"/>
+                        <a:srgbClr val="FAD1E2"/>
                       </a:solidFill>
                       <a:prstDash val="solid"/>
                     </a:lnB>
                     <a:solidFill>
-                      <a:srgbClr val="F7D4E3"/>
+                      <a:srgbClr val="FAD1E2"/>
                     </a:solidFill>
                   </a:tcPr>
                 </a:tc>
@@ -6227,7 +6421,7 @@
                       <a:r>
                         <a:rPr sz="1400" b="0">
                           <a:solidFill>
-                            <a:srgbClr val="2B2B2B"/>
+                            <a:srgbClr val="26231F"/>
                           </a:solidFill>
                         </a:rPr>
                         <a:t>□</a:t>
@@ -6237,25 +6431,25 @@
                   <a:tcPr anchor="ctr" marL="73152" marR="73152">
                     <a:lnL w="9525" cap="flat" cmpd="sng" algn="ctr">
                       <a:solidFill>
-                        <a:srgbClr val="F7D4E3"/>
+                        <a:srgbClr val="FAD1E2"/>
                       </a:solidFill>
                       <a:prstDash val="solid"/>
                     </a:lnL>
                     <a:lnR w="9525" cap="flat" cmpd="sng" algn="ctr">
                       <a:solidFill>
-                        <a:srgbClr val="F7D4E3"/>
+                        <a:srgbClr val="FAD1E2"/>
                       </a:solidFill>
                       <a:prstDash val="solid"/>
                     </a:lnR>
                     <a:lnT w="9525" cap="flat" cmpd="sng" algn="ctr">
                       <a:solidFill>
-                        <a:srgbClr val="F7D4E3"/>
+                        <a:srgbClr val="FAD1E2"/>
                       </a:solidFill>
                       <a:prstDash val="solid"/>
                     </a:lnT>
                     <a:lnB w="9525" cap="flat" cmpd="sng" algn="ctr">
                       <a:solidFill>
-                        <a:srgbClr val="F7D4E3"/>
+                        <a:srgbClr val="FAD1E2"/>
                       </a:solidFill>
                       <a:prstDash val="solid"/>
                     </a:lnB>
@@ -6273,7 +6467,7 @@
                       <a:r>
                         <a:rPr sz="1400" b="0">
                           <a:solidFill>
-                            <a:srgbClr val="2B2B2B"/>
+                            <a:srgbClr val="26231F"/>
                           </a:solidFill>
                         </a:rPr>
                         <a:t>□</a:t>
@@ -6283,25 +6477,25 @@
                   <a:tcPr anchor="ctr" marL="73152" marR="73152">
                     <a:lnL w="9525" cap="flat" cmpd="sng" algn="ctr">
                       <a:solidFill>
-                        <a:srgbClr val="F7D4E3"/>
+                        <a:srgbClr val="FAD1E2"/>
                       </a:solidFill>
                       <a:prstDash val="solid"/>
                     </a:lnL>
                     <a:lnR w="9525" cap="flat" cmpd="sng" algn="ctr">
                       <a:solidFill>
-                        <a:srgbClr val="F7D4E3"/>
+                        <a:srgbClr val="FAD1E2"/>
                       </a:solidFill>
                       <a:prstDash val="solid"/>
                     </a:lnR>
                     <a:lnT w="9525" cap="flat" cmpd="sng" algn="ctr">
                       <a:solidFill>
-                        <a:srgbClr val="F7D4E3"/>
+                        <a:srgbClr val="FAD1E2"/>
                       </a:solidFill>
                       <a:prstDash val="solid"/>
                     </a:lnT>
                     <a:lnB w="9525" cap="flat" cmpd="sng" algn="ctr">
                       <a:solidFill>
-                        <a:srgbClr val="F7D4E3"/>
+                        <a:srgbClr val="FAD1E2"/>
                       </a:solidFill>
                       <a:prstDash val="solid"/>
                     </a:lnB>
@@ -6319,7 +6513,7 @@
                       <a:r>
                         <a:rPr sz="1400" b="0">
                           <a:solidFill>
-                            <a:srgbClr val="2B2B2B"/>
+                            <a:srgbClr val="26231F"/>
                           </a:solidFill>
                         </a:rPr>
                         <a:t>□</a:t>
@@ -6329,25 +6523,25 @@
                   <a:tcPr anchor="ctr" marL="73152" marR="73152">
                     <a:lnL w="9525" cap="flat" cmpd="sng" algn="ctr">
                       <a:solidFill>
-                        <a:srgbClr val="F7D4E3"/>
+                        <a:srgbClr val="FAD1E2"/>
                       </a:solidFill>
                       <a:prstDash val="solid"/>
                     </a:lnL>
                     <a:lnR w="9525" cap="flat" cmpd="sng" algn="ctr">
                       <a:solidFill>
-                        <a:srgbClr val="F7D4E3"/>
+                        <a:srgbClr val="FAD1E2"/>
                       </a:solidFill>
                       <a:prstDash val="solid"/>
                     </a:lnR>
                     <a:lnT w="9525" cap="flat" cmpd="sng" algn="ctr">
                       <a:solidFill>
-                        <a:srgbClr val="F7D4E3"/>
+                        <a:srgbClr val="FAD1E2"/>
                       </a:solidFill>
                       <a:prstDash val="solid"/>
                     </a:lnT>
                     <a:lnB w="9525" cap="flat" cmpd="sng" algn="ctr">
                       <a:solidFill>
-                        <a:srgbClr val="F7D4E3"/>
+                        <a:srgbClr val="FAD1E2"/>
                       </a:solidFill>
                       <a:prstDash val="solid"/>
                     </a:lnB>
@@ -6367,7 +6561,7 @@
                       <a:r>
                         <a:rPr sz="1400" b="1">
                           <a:solidFill>
-                            <a:srgbClr val="6F1F41"/>
+                            <a:srgbClr val="492735"/>
                           </a:solidFill>
                         </a:rPr>
                         <a:t>질병 진단</a:t>
@@ -6377,30 +6571,30 @@
                   <a:tcPr anchor="ctr" marL="73152" marR="73152">
                     <a:lnL w="9525" cap="flat" cmpd="sng" algn="ctr">
                       <a:solidFill>
-                        <a:srgbClr val="F7D4E3"/>
+                        <a:srgbClr val="FAD1E2"/>
                       </a:solidFill>
                       <a:prstDash val="solid"/>
                     </a:lnL>
                     <a:lnR w="9525" cap="flat" cmpd="sng" algn="ctr">
                       <a:solidFill>
-                        <a:srgbClr val="F7D4E3"/>
+                        <a:srgbClr val="FAD1E2"/>
                       </a:solidFill>
                       <a:prstDash val="solid"/>
                     </a:lnR>
                     <a:lnT w="9525" cap="flat" cmpd="sng" algn="ctr">
                       <a:solidFill>
-                        <a:srgbClr val="F7D4E3"/>
+                        <a:srgbClr val="FAD1E2"/>
                       </a:solidFill>
                       <a:prstDash val="solid"/>
                     </a:lnT>
                     <a:lnB w="9525" cap="flat" cmpd="sng" algn="ctr">
                       <a:solidFill>
-                        <a:srgbClr val="F7D4E3"/>
+                        <a:srgbClr val="FAD1E2"/>
                       </a:solidFill>
                       <a:prstDash val="solid"/>
                     </a:lnB>
                     <a:solidFill>
-                      <a:srgbClr val="F7D4E3"/>
+                      <a:srgbClr val="FAD1E2"/>
                     </a:solidFill>
                   </a:tcPr>
                 </a:tc>
@@ -6413,7 +6607,7 @@
                       <a:r>
                         <a:rPr sz="1400" b="0">
                           <a:solidFill>
-                            <a:srgbClr val="2B2B2B"/>
+                            <a:srgbClr val="26231F"/>
                           </a:solidFill>
                         </a:rPr>
                         <a:t>□</a:t>
@@ -6423,30 +6617,30 @@
                   <a:tcPr anchor="ctr" marL="73152" marR="73152">
                     <a:lnL w="9525" cap="flat" cmpd="sng" algn="ctr">
                       <a:solidFill>
-                        <a:srgbClr val="F7D4E3"/>
+                        <a:srgbClr val="FAD1E2"/>
                       </a:solidFill>
                       <a:prstDash val="solid"/>
                     </a:lnL>
                     <a:lnR w="9525" cap="flat" cmpd="sng" algn="ctr">
                       <a:solidFill>
-                        <a:srgbClr val="F7D4E3"/>
+                        <a:srgbClr val="FAD1E2"/>
                       </a:solidFill>
                       <a:prstDash val="solid"/>
                     </a:lnR>
                     <a:lnT w="9525" cap="flat" cmpd="sng" algn="ctr">
                       <a:solidFill>
-                        <a:srgbClr val="F7D4E3"/>
+                        <a:srgbClr val="FAD1E2"/>
                       </a:solidFill>
                       <a:prstDash val="solid"/>
                     </a:lnT>
                     <a:lnB w="9525" cap="flat" cmpd="sng" algn="ctr">
                       <a:solidFill>
-                        <a:srgbClr val="F7D4E3"/>
+                        <a:srgbClr val="FAD1E2"/>
                       </a:solidFill>
                       <a:prstDash val="solid"/>
                     </a:lnB>
                     <a:solidFill>
-                      <a:srgbClr val="FCF3F7"/>
+                      <a:srgbClr val="FDEAF2"/>
                     </a:solidFill>
                   </a:tcPr>
                 </a:tc>
@@ -6459,7 +6653,7 @@
                       <a:r>
                         <a:rPr sz="1400" b="0">
                           <a:solidFill>
-                            <a:srgbClr val="2B2B2B"/>
+                            <a:srgbClr val="26231F"/>
                           </a:solidFill>
                         </a:rPr>
                         <a:t>□</a:t>
@@ -6469,30 +6663,30 @@
                   <a:tcPr anchor="ctr" marL="73152" marR="73152">
                     <a:lnL w="9525" cap="flat" cmpd="sng" algn="ctr">
                       <a:solidFill>
-                        <a:srgbClr val="F7D4E3"/>
+                        <a:srgbClr val="FAD1E2"/>
                       </a:solidFill>
                       <a:prstDash val="solid"/>
                     </a:lnL>
                     <a:lnR w="9525" cap="flat" cmpd="sng" algn="ctr">
                       <a:solidFill>
-                        <a:srgbClr val="F7D4E3"/>
+                        <a:srgbClr val="FAD1E2"/>
                       </a:solidFill>
                       <a:prstDash val="solid"/>
                     </a:lnR>
                     <a:lnT w="9525" cap="flat" cmpd="sng" algn="ctr">
                       <a:solidFill>
-                        <a:srgbClr val="F7D4E3"/>
+                        <a:srgbClr val="FAD1E2"/>
                       </a:solidFill>
                       <a:prstDash val="solid"/>
                     </a:lnT>
                     <a:lnB w="9525" cap="flat" cmpd="sng" algn="ctr">
                       <a:solidFill>
-                        <a:srgbClr val="F7D4E3"/>
+                        <a:srgbClr val="FAD1E2"/>
                       </a:solidFill>
                       <a:prstDash val="solid"/>
                     </a:lnB>
                     <a:solidFill>
-                      <a:srgbClr val="FCF3F7"/>
+                      <a:srgbClr val="FDEAF2"/>
                     </a:solidFill>
                   </a:tcPr>
                 </a:tc>
@@ -6505,7 +6699,7 @@
                       <a:r>
                         <a:rPr sz="1400" b="0">
                           <a:solidFill>
-                            <a:srgbClr val="2B2B2B"/>
+                            <a:srgbClr val="26231F"/>
                           </a:solidFill>
                         </a:rPr>
                         <a:t>□</a:t>
@@ -6515,30 +6709,30 @@
                   <a:tcPr anchor="ctr" marL="73152" marR="73152">
                     <a:lnL w="9525" cap="flat" cmpd="sng" algn="ctr">
                       <a:solidFill>
-                        <a:srgbClr val="F7D4E3"/>
+                        <a:srgbClr val="FAD1E2"/>
                       </a:solidFill>
                       <a:prstDash val="solid"/>
                     </a:lnL>
                     <a:lnR w="9525" cap="flat" cmpd="sng" algn="ctr">
                       <a:solidFill>
-                        <a:srgbClr val="F7D4E3"/>
+                        <a:srgbClr val="FAD1E2"/>
                       </a:solidFill>
                       <a:prstDash val="solid"/>
                     </a:lnR>
                     <a:lnT w="9525" cap="flat" cmpd="sng" algn="ctr">
                       <a:solidFill>
-                        <a:srgbClr val="F7D4E3"/>
+                        <a:srgbClr val="FAD1E2"/>
                       </a:solidFill>
                       <a:prstDash val="solid"/>
                     </a:lnT>
                     <a:lnB w="9525" cap="flat" cmpd="sng" algn="ctr">
                       <a:solidFill>
-                        <a:srgbClr val="F7D4E3"/>
+                        <a:srgbClr val="FAD1E2"/>
                       </a:solidFill>
                       <a:prstDash val="solid"/>
                     </a:lnB>
                     <a:solidFill>
-                      <a:srgbClr val="FCF3F7"/>
+                      <a:srgbClr val="FDEAF2"/>
                     </a:solidFill>
                   </a:tcPr>
                 </a:tc>
@@ -6553,7 +6747,7 @@
                       <a:r>
                         <a:rPr sz="1400" b="1">
                           <a:solidFill>
-                            <a:srgbClr val="6F1F41"/>
+                            <a:srgbClr val="492735"/>
                           </a:solidFill>
                         </a:rPr>
                         <a:t>암</a:t>
@@ -6563,30 +6757,30 @@
                   <a:tcPr anchor="ctr" marL="73152" marR="73152">
                     <a:lnL w="9525" cap="flat" cmpd="sng" algn="ctr">
                       <a:solidFill>
-                        <a:srgbClr val="F7D4E3"/>
+                        <a:srgbClr val="FAD1E2"/>
                       </a:solidFill>
                       <a:prstDash val="solid"/>
                     </a:lnL>
                     <a:lnR w="9525" cap="flat" cmpd="sng" algn="ctr">
                       <a:solidFill>
-                        <a:srgbClr val="F7D4E3"/>
+                        <a:srgbClr val="FAD1E2"/>
                       </a:solidFill>
                       <a:prstDash val="solid"/>
                     </a:lnR>
                     <a:lnT w="9525" cap="flat" cmpd="sng" algn="ctr">
                       <a:solidFill>
-                        <a:srgbClr val="F7D4E3"/>
+                        <a:srgbClr val="FAD1E2"/>
                       </a:solidFill>
                       <a:prstDash val="solid"/>
                     </a:lnT>
                     <a:lnB w="9525" cap="flat" cmpd="sng" algn="ctr">
                       <a:solidFill>
-                        <a:srgbClr val="F7D4E3"/>
+                        <a:srgbClr val="FAD1E2"/>
                       </a:solidFill>
                       <a:prstDash val="solid"/>
                     </a:lnB>
                     <a:solidFill>
-                      <a:srgbClr val="F7D4E3"/>
+                      <a:srgbClr val="FAD1E2"/>
                     </a:solidFill>
                   </a:tcPr>
                 </a:tc>
@@ -6599,7 +6793,7 @@
                       <a:r>
                         <a:rPr sz="1400" b="0">
                           <a:solidFill>
-                            <a:srgbClr val="2B2B2B"/>
+                            <a:srgbClr val="26231F"/>
                           </a:solidFill>
                         </a:rPr>
                         <a:t>□</a:t>
@@ -6609,25 +6803,25 @@
                   <a:tcPr anchor="ctr" marL="73152" marR="73152">
                     <a:lnL w="9525" cap="flat" cmpd="sng" algn="ctr">
                       <a:solidFill>
-                        <a:srgbClr val="F7D4E3"/>
+                        <a:srgbClr val="FAD1E2"/>
                       </a:solidFill>
                       <a:prstDash val="solid"/>
                     </a:lnL>
                     <a:lnR w="9525" cap="flat" cmpd="sng" algn="ctr">
                       <a:solidFill>
-                        <a:srgbClr val="F7D4E3"/>
+                        <a:srgbClr val="FAD1E2"/>
                       </a:solidFill>
                       <a:prstDash val="solid"/>
                     </a:lnR>
                     <a:lnT w="9525" cap="flat" cmpd="sng" algn="ctr">
                       <a:solidFill>
-                        <a:srgbClr val="F7D4E3"/>
+                        <a:srgbClr val="FAD1E2"/>
                       </a:solidFill>
                       <a:prstDash val="solid"/>
                     </a:lnT>
                     <a:lnB w="9525" cap="flat" cmpd="sng" algn="ctr">
                       <a:solidFill>
-                        <a:srgbClr val="F7D4E3"/>
+                        <a:srgbClr val="FAD1E2"/>
                       </a:solidFill>
                       <a:prstDash val="solid"/>
                     </a:lnB>
@@ -6645,7 +6839,7 @@
                       <a:r>
                         <a:rPr sz="1400" b="0">
                           <a:solidFill>
-                            <a:srgbClr val="2B2B2B"/>
+                            <a:srgbClr val="26231F"/>
                           </a:solidFill>
                         </a:rPr>
                         <a:t>□</a:t>
@@ -6655,25 +6849,25 @@
                   <a:tcPr anchor="ctr" marL="73152" marR="73152">
                     <a:lnL w="9525" cap="flat" cmpd="sng" algn="ctr">
                       <a:solidFill>
-                        <a:srgbClr val="F7D4E3"/>
+                        <a:srgbClr val="FAD1E2"/>
                       </a:solidFill>
                       <a:prstDash val="solid"/>
                     </a:lnL>
                     <a:lnR w="9525" cap="flat" cmpd="sng" algn="ctr">
                       <a:solidFill>
-                        <a:srgbClr val="F7D4E3"/>
+                        <a:srgbClr val="FAD1E2"/>
                       </a:solidFill>
                       <a:prstDash val="solid"/>
                     </a:lnR>
                     <a:lnT w="9525" cap="flat" cmpd="sng" algn="ctr">
                       <a:solidFill>
-                        <a:srgbClr val="F7D4E3"/>
+                        <a:srgbClr val="FAD1E2"/>
                       </a:solidFill>
                       <a:prstDash val="solid"/>
                     </a:lnT>
                     <a:lnB w="9525" cap="flat" cmpd="sng" algn="ctr">
                       <a:solidFill>
-                        <a:srgbClr val="F7D4E3"/>
+                        <a:srgbClr val="FAD1E2"/>
                       </a:solidFill>
                       <a:prstDash val="solid"/>
                     </a:lnB>
@@ -6691,7 +6885,7 @@
                       <a:r>
                         <a:rPr sz="1400" b="0">
                           <a:solidFill>
-                            <a:srgbClr val="2B2B2B"/>
+                            <a:srgbClr val="26231F"/>
                           </a:solidFill>
                         </a:rPr>
                         <a:t>□</a:t>
@@ -6701,25 +6895,25 @@
                   <a:tcPr anchor="ctr" marL="73152" marR="73152">
                     <a:lnL w="9525" cap="flat" cmpd="sng" algn="ctr">
                       <a:solidFill>
-                        <a:srgbClr val="F7D4E3"/>
+                        <a:srgbClr val="FAD1E2"/>
                       </a:solidFill>
                       <a:prstDash val="solid"/>
                     </a:lnL>
                     <a:lnR w="9525" cap="flat" cmpd="sng" algn="ctr">
                       <a:solidFill>
-                        <a:srgbClr val="F7D4E3"/>
+                        <a:srgbClr val="FAD1E2"/>
                       </a:solidFill>
                       <a:prstDash val="solid"/>
                     </a:lnR>
                     <a:lnT w="9525" cap="flat" cmpd="sng" algn="ctr">
                       <a:solidFill>
-                        <a:srgbClr val="F7D4E3"/>
+                        <a:srgbClr val="FAD1E2"/>
                       </a:solidFill>
                       <a:prstDash val="solid"/>
                     </a:lnT>
                     <a:lnB w="9525" cap="flat" cmpd="sng" algn="ctr">
                       <a:solidFill>
-                        <a:srgbClr val="F7D4E3"/>
+                        <a:srgbClr val="FAD1E2"/>
                       </a:solidFill>
                       <a:prstDash val="solid"/>
                     </a:lnB>
@@ -6739,7 +6933,7 @@
                       <a:r>
                         <a:rPr sz="1400" b="1">
                           <a:solidFill>
-                            <a:srgbClr val="6F1F41"/>
+                            <a:srgbClr val="492735"/>
                           </a:solidFill>
                         </a:rPr>
                         <a:t>뇌·심장</a:t>
@@ -6749,30 +6943,30 @@
                   <a:tcPr anchor="ctr" marL="73152" marR="73152">
                     <a:lnL w="9525" cap="flat" cmpd="sng" algn="ctr">
                       <a:solidFill>
-                        <a:srgbClr val="F7D4E3"/>
+                        <a:srgbClr val="FAD1E2"/>
                       </a:solidFill>
                       <a:prstDash val="solid"/>
                     </a:lnL>
                     <a:lnR w="9525" cap="flat" cmpd="sng" algn="ctr">
                       <a:solidFill>
-                        <a:srgbClr val="F7D4E3"/>
+                        <a:srgbClr val="FAD1E2"/>
                       </a:solidFill>
                       <a:prstDash val="solid"/>
                     </a:lnR>
                     <a:lnT w="9525" cap="flat" cmpd="sng" algn="ctr">
                       <a:solidFill>
-                        <a:srgbClr val="F7D4E3"/>
+                        <a:srgbClr val="FAD1E2"/>
                       </a:solidFill>
                       <a:prstDash val="solid"/>
                     </a:lnT>
                     <a:lnB w="9525" cap="flat" cmpd="sng" algn="ctr">
                       <a:solidFill>
-                        <a:srgbClr val="F7D4E3"/>
+                        <a:srgbClr val="FAD1E2"/>
                       </a:solidFill>
                       <a:prstDash val="solid"/>
                     </a:lnB>
                     <a:solidFill>
-                      <a:srgbClr val="F7D4E3"/>
+                      <a:srgbClr val="FAD1E2"/>
                     </a:solidFill>
                   </a:tcPr>
                 </a:tc>
@@ -6785,7 +6979,7 @@
                       <a:r>
                         <a:rPr sz="1400" b="0">
                           <a:solidFill>
-                            <a:srgbClr val="2B2B2B"/>
+                            <a:srgbClr val="26231F"/>
                           </a:solidFill>
                         </a:rPr>
                         <a:t>□</a:t>
@@ -6795,30 +6989,30 @@
                   <a:tcPr anchor="ctr" marL="73152" marR="73152">
                     <a:lnL w="9525" cap="flat" cmpd="sng" algn="ctr">
                       <a:solidFill>
-                        <a:srgbClr val="F7D4E3"/>
+                        <a:srgbClr val="FAD1E2"/>
                       </a:solidFill>
                       <a:prstDash val="solid"/>
                     </a:lnL>
                     <a:lnR w="9525" cap="flat" cmpd="sng" algn="ctr">
                       <a:solidFill>
-                        <a:srgbClr val="F7D4E3"/>
+                        <a:srgbClr val="FAD1E2"/>
                       </a:solidFill>
                       <a:prstDash val="solid"/>
                     </a:lnR>
                     <a:lnT w="9525" cap="flat" cmpd="sng" algn="ctr">
                       <a:solidFill>
-                        <a:srgbClr val="F7D4E3"/>
+                        <a:srgbClr val="FAD1E2"/>
                       </a:solidFill>
                       <a:prstDash val="solid"/>
                     </a:lnT>
                     <a:lnB w="9525" cap="flat" cmpd="sng" algn="ctr">
                       <a:solidFill>
-                        <a:srgbClr val="F7D4E3"/>
+                        <a:srgbClr val="FAD1E2"/>
                       </a:solidFill>
                       <a:prstDash val="solid"/>
                     </a:lnB>
                     <a:solidFill>
-                      <a:srgbClr val="FCF3F7"/>
+                      <a:srgbClr val="FDEAF2"/>
                     </a:solidFill>
                   </a:tcPr>
                 </a:tc>
@@ -6831,7 +7025,7 @@
                       <a:r>
                         <a:rPr sz="1400" b="0">
                           <a:solidFill>
-                            <a:srgbClr val="2B2B2B"/>
+                            <a:srgbClr val="26231F"/>
                           </a:solidFill>
                         </a:rPr>
                         <a:t>□</a:t>
@@ -6841,30 +7035,30 @@
                   <a:tcPr anchor="ctr" marL="73152" marR="73152">
                     <a:lnL w="9525" cap="flat" cmpd="sng" algn="ctr">
                       <a:solidFill>
-                        <a:srgbClr val="F7D4E3"/>
+                        <a:srgbClr val="FAD1E2"/>
                       </a:solidFill>
                       <a:prstDash val="solid"/>
                     </a:lnL>
                     <a:lnR w="9525" cap="flat" cmpd="sng" algn="ctr">
                       <a:solidFill>
-                        <a:srgbClr val="F7D4E3"/>
+                        <a:srgbClr val="FAD1E2"/>
                       </a:solidFill>
                       <a:prstDash val="solid"/>
                     </a:lnR>
                     <a:lnT w="9525" cap="flat" cmpd="sng" algn="ctr">
                       <a:solidFill>
-                        <a:srgbClr val="F7D4E3"/>
+                        <a:srgbClr val="FAD1E2"/>
                       </a:solidFill>
                       <a:prstDash val="solid"/>
                     </a:lnT>
                     <a:lnB w="9525" cap="flat" cmpd="sng" algn="ctr">
                       <a:solidFill>
-                        <a:srgbClr val="F7D4E3"/>
+                        <a:srgbClr val="FAD1E2"/>
                       </a:solidFill>
                       <a:prstDash val="solid"/>
                     </a:lnB>
                     <a:solidFill>
-                      <a:srgbClr val="FCF3F7"/>
+                      <a:srgbClr val="FDEAF2"/>
                     </a:solidFill>
                   </a:tcPr>
                 </a:tc>
@@ -6877,7 +7071,7 @@
                       <a:r>
                         <a:rPr sz="1400" b="0">
                           <a:solidFill>
-                            <a:srgbClr val="2B2B2B"/>
+                            <a:srgbClr val="26231F"/>
                           </a:solidFill>
                         </a:rPr>
                         <a:t>□</a:t>
@@ -6887,30 +7081,30 @@
                   <a:tcPr anchor="ctr" marL="73152" marR="73152">
                     <a:lnL w="9525" cap="flat" cmpd="sng" algn="ctr">
                       <a:solidFill>
-                        <a:srgbClr val="F7D4E3"/>
+                        <a:srgbClr val="FAD1E2"/>
                       </a:solidFill>
                       <a:prstDash val="solid"/>
                     </a:lnL>
                     <a:lnR w="9525" cap="flat" cmpd="sng" algn="ctr">
                       <a:solidFill>
-                        <a:srgbClr val="F7D4E3"/>
+                        <a:srgbClr val="FAD1E2"/>
                       </a:solidFill>
                       <a:prstDash val="solid"/>
                     </a:lnR>
                     <a:lnT w="9525" cap="flat" cmpd="sng" algn="ctr">
                       <a:solidFill>
-                        <a:srgbClr val="F7D4E3"/>
+                        <a:srgbClr val="FAD1E2"/>
                       </a:solidFill>
                       <a:prstDash val="solid"/>
                     </a:lnT>
                     <a:lnB w="9525" cap="flat" cmpd="sng" algn="ctr">
                       <a:solidFill>
-                        <a:srgbClr val="F7D4E3"/>
+                        <a:srgbClr val="FAD1E2"/>
                       </a:solidFill>
                       <a:prstDash val="solid"/>
                     </a:lnB>
                     <a:solidFill>
-                      <a:srgbClr val="FCF3F7"/>
+                      <a:srgbClr val="FDEAF2"/>
                     </a:solidFill>
                   </a:tcPr>
                 </a:tc>
@@ -6925,7 +7119,7 @@
                       <a:r>
                         <a:rPr sz="1400" b="1">
                           <a:solidFill>
-                            <a:srgbClr val="6F1F41"/>
+                            <a:srgbClr val="492735"/>
                           </a:solidFill>
                         </a:rPr>
                         <a:t>입원·수술</a:t>
@@ -6935,30 +7129,30 @@
                   <a:tcPr anchor="ctr" marL="73152" marR="73152">
                     <a:lnL w="9525" cap="flat" cmpd="sng" algn="ctr">
                       <a:solidFill>
-                        <a:srgbClr val="F7D4E3"/>
+                        <a:srgbClr val="FAD1E2"/>
                       </a:solidFill>
                       <a:prstDash val="solid"/>
                     </a:lnL>
                     <a:lnR w="9525" cap="flat" cmpd="sng" algn="ctr">
                       <a:solidFill>
-                        <a:srgbClr val="F7D4E3"/>
+                        <a:srgbClr val="FAD1E2"/>
                       </a:solidFill>
                       <a:prstDash val="solid"/>
                     </a:lnR>
                     <a:lnT w="9525" cap="flat" cmpd="sng" algn="ctr">
                       <a:solidFill>
-                        <a:srgbClr val="F7D4E3"/>
+                        <a:srgbClr val="FAD1E2"/>
                       </a:solidFill>
                       <a:prstDash val="solid"/>
                     </a:lnT>
                     <a:lnB w="9525" cap="flat" cmpd="sng" algn="ctr">
                       <a:solidFill>
-                        <a:srgbClr val="F7D4E3"/>
+                        <a:srgbClr val="FAD1E2"/>
                       </a:solidFill>
                       <a:prstDash val="solid"/>
                     </a:lnB>
                     <a:solidFill>
-                      <a:srgbClr val="F7D4E3"/>
+                      <a:srgbClr val="FAD1E2"/>
                     </a:solidFill>
                   </a:tcPr>
                 </a:tc>
@@ -6971,7 +7165,7 @@
                       <a:r>
                         <a:rPr sz="1400" b="0">
                           <a:solidFill>
-                            <a:srgbClr val="2B2B2B"/>
+                            <a:srgbClr val="26231F"/>
                           </a:solidFill>
                         </a:rPr>
                         <a:t>□</a:t>
@@ -6981,25 +7175,25 @@
                   <a:tcPr anchor="ctr" marL="73152" marR="73152">
                     <a:lnL w="9525" cap="flat" cmpd="sng" algn="ctr">
                       <a:solidFill>
-                        <a:srgbClr val="F7D4E3"/>
+                        <a:srgbClr val="FAD1E2"/>
                       </a:solidFill>
                       <a:prstDash val="solid"/>
                     </a:lnL>
                     <a:lnR w="9525" cap="flat" cmpd="sng" algn="ctr">
                       <a:solidFill>
-                        <a:srgbClr val="F7D4E3"/>
+                        <a:srgbClr val="FAD1E2"/>
                       </a:solidFill>
                       <a:prstDash val="solid"/>
                     </a:lnR>
                     <a:lnT w="9525" cap="flat" cmpd="sng" algn="ctr">
                       <a:solidFill>
-                        <a:srgbClr val="F7D4E3"/>
+                        <a:srgbClr val="FAD1E2"/>
                       </a:solidFill>
                       <a:prstDash val="solid"/>
                     </a:lnT>
                     <a:lnB w="9525" cap="flat" cmpd="sng" algn="ctr">
                       <a:solidFill>
-                        <a:srgbClr val="F7D4E3"/>
+                        <a:srgbClr val="FAD1E2"/>
                       </a:solidFill>
                       <a:prstDash val="solid"/>
                     </a:lnB>
@@ -7017,7 +7211,7 @@
                       <a:r>
                         <a:rPr sz="1400" b="0">
                           <a:solidFill>
-                            <a:srgbClr val="2B2B2B"/>
+                            <a:srgbClr val="26231F"/>
                           </a:solidFill>
                         </a:rPr>
                         <a:t>□</a:t>
@@ -7027,25 +7221,25 @@
                   <a:tcPr anchor="ctr" marL="73152" marR="73152">
                     <a:lnL w="9525" cap="flat" cmpd="sng" algn="ctr">
                       <a:solidFill>
-                        <a:srgbClr val="F7D4E3"/>
+                        <a:srgbClr val="FAD1E2"/>
                       </a:solidFill>
                       <a:prstDash val="solid"/>
                     </a:lnL>
                     <a:lnR w="9525" cap="flat" cmpd="sng" algn="ctr">
                       <a:solidFill>
-                        <a:srgbClr val="F7D4E3"/>
+                        <a:srgbClr val="FAD1E2"/>
                       </a:solidFill>
                       <a:prstDash val="solid"/>
                     </a:lnR>
                     <a:lnT w="9525" cap="flat" cmpd="sng" algn="ctr">
                       <a:solidFill>
-                        <a:srgbClr val="F7D4E3"/>
+                        <a:srgbClr val="FAD1E2"/>
                       </a:solidFill>
                       <a:prstDash val="solid"/>
                     </a:lnT>
                     <a:lnB w="9525" cap="flat" cmpd="sng" algn="ctr">
                       <a:solidFill>
-                        <a:srgbClr val="F7D4E3"/>
+                        <a:srgbClr val="FAD1E2"/>
                       </a:solidFill>
                       <a:prstDash val="solid"/>
                     </a:lnB>
@@ -7063,7 +7257,7 @@
                       <a:r>
                         <a:rPr sz="1400" b="0">
                           <a:solidFill>
-                            <a:srgbClr val="2B2B2B"/>
+                            <a:srgbClr val="26231F"/>
                           </a:solidFill>
                         </a:rPr>
                         <a:t>□</a:t>
@@ -7073,25 +7267,25 @@
                   <a:tcPr anchor="ctr" marL="73152" marR="73152">
                     <a:lnL w="9525" cap="flat" cmpd="sng" algn="ctr">
                       <a:solidFill>
-                        <a:srgbClr val="F7D4E3"/>
+                        <a:srgbClr val="FAD1E2"/>
                       </a:solidFill>
                       <a:prstDash val="solid"/>
                     </a:lnL>
                     <a:lnR w="9525" cap="flat" cmpd="sng" algn="ctr">
                       <a:solidFill>
-                        <a:srgbClr val="F7D4E3"/>
+                        <a:srgbClr val="FAD1E2"/>
                       </a:solidFill>
                       <a:prstDash val="solid"/>
                     </a:lnR>
                     <a:lnT w="9525" cap="flat" cmpd="sng" algn="ctr">
                       <a:solidFill>
-                        <a:srgbClr val="F7D4E3"/>
+                        <a:srgbClr val="FAD1E2"/>
                       </a:solidFill>
                       <a:prstDash val="solid"/>
                     </a:lnT>
                     <a:lnB w="9525" cap="flat" cmpd="sng" algn="ctr">
                       <a:solidFill>
-                        <a:srgbClr val="F7D4E3"/>
+                        <a:srgbClr val="FAD1E2"/>
                       </a:solidFill>
                       <a:prstDash val="solid"/>
                     </a:lnB>
@@ -7111,7 +7305,7 @@
                       <a:r>
                         <a:rPr sz="1400" b="1">
                           <a:solidFill>
-                            <a:srgbClr val="6F1F41"/>
+                            <a:srgbClr val="492735"/>
                           </a:solidFill>
                         </a:rPr>
                         <a:t>상해</a:t>
@@ -7121,30 +7315,30 @@
                   <a:tcPr anchor="ctr" marL="73152" marR="73152">
                     <a:lnL w="9525" cap="flat" cmpd="sng" algn="ctr">
                       <a:solidFill>
-                        <a:srgbClr val="F7D4E3"/>
+                        <a:srgbClr val="FAD1E2"/>
                       </a:solidFill>
                       <a:prstDash val="solid"/>
                     </a:lnL>
                     <a:lnR w="9525" cap="flat" cmpd="sng" algn="ctr">
                       <a:solidFill>
-                        <a:srgbClr val="F7D4E3"/>
+                        <a:srgbClr val="FAD1E2"/>
                       </a:solidFill>
                       <a:prstDash val="solid"/>
                     </a:lnR>
                     <a:lnT w="9525" cap="flat" cmpd="sng" algn="ctr">
                       <a:solidFill>
-                        <a:srgbClr val="F7D4E3"/>
+                        <a:srgbClr val="FAD1E2"/>
                       </a:solidFill>
                       <a:prstDash val="solid"/>
                     </a:lnT>
                     <a:lnB w="9525" cap="flat" cmpd="sng" algn="ctr">
                       <a:solidFill>
-                        <a:srgbClr val="F7D4E3"/>
+                        <a:srgbClr val="FAD1E2"/>
                       </a:solidFill>
                       <a:prstDash val="solid"/>
                     </a:lnB>
                     <a:solidFill>
-                      <a:srgbClr val="F7D4E3"/>
+                      <a:srgbClr val="FAD1E2"/>
                     </a:solidFill>
                   </a:tcPr>
                 </a:tc>
@@ -7157,7 +7351,7 @@
                       <a:r>
                         <a:rPr sz="1400" b="0">
                           <a:solidFill>
-                            <a:srgbClr val="2B2B2B"/>
+                            <a:srgbClr val="26231F"/>
                           </a:solidFill>
                         </a:rPr>
                         <a:t>□</a:t>
@@ -7167,30 +7361,30 @@
                   <a:tcPr anchor="ctr" marL="73152" marR="73152">
                     <a:lnL w="9525" cap="flat" cmpd="sng" algn="ctr">
                       <a:solidFill>
-                        <a:srgbClr val="F7D4E3"/>
+                        <a:srgbClr val="FAD1E2"/>
                       </a:solidFill>
                       <a:prstDash val="solid"/>
                     </a:lnL>
                     <a:lnR w="9525" cap="flat" cmpd="sng" algn="ctr">
                       <a:solidFill>
-                        <a:srgbClr val="F7D4E3"/>
+                        <a:srgbClr val="FAD1E2"/>
                       </a:solidFill>
                       <a:prstDash val="solid"/>
                     </a:lnR>
                     <a:lnT w="9525" cap="flat" cmpd="sng" algn="ctr">
                       <a:solidFill>
-                        <a:srgbClr val="F7D4E3"/>
+                        <a:srgbClr val="FAD1E2"/>
                       </a:solidFill>
                       <a:prstDash val="solid"/>
                     </a:lnT>
                     <a:lnB w="9525" cap="flat" cmpd="sng" algn="ctr">
                       <a:solidFill>
-                        <a:srgbClr val="F7D4E3"/>
+                        <a:srgbClr val="FAD1E2"/>
                       </a:solidFill>
                       <a:prstDash val="solid"/>
                     </a:lnB>
                     <a:solidFill>
-                      <a:srgbClr val="FCF3F7"/>
+                      <a:srgbClr val="FDEAF2"/>
                     </a:solidFill>
                   </a:tcPr>
                 </a:tc>
@@ -7203,7 +7397,7 @@
                       <a:r>
                         <a:rPr sz="1400" b="0">
                           <a:solidFill>
-                            <a:srgbClr val="2B2B2B"/>
+                            <a:srgbClr val="26231F"/>
                           </a:solidFill>
                         </a:rPr>
                         <a:t>□</a:t>
@@ -7213,30 +7407,30 @@
                   <a:tcPr anchor="ctr" marL="73152" marR="73152">
                     <a:lnL w="9525" cap="flat" cmpd="sng" algn="ctr">
                       <a:solidFill>
-                        <a:srgbClr val="F7D4E3"/>
+                        <a:srgbClr val="FAD1E2"/>
                       </a:solidFill>
                       <a:prstDash val="solid"/>
                     </a:lnL>
                     <a:lnR w="9525" cap="flat" cmpd="sng" algn="ctr">
                       <a:solidFill>
-                        <a:srgbClr val="F7D4E3"/>
+                        <a:srgbClr val="FAD1E2"/>
                       </a:solidFill>
                       <a:prstDash val="solid"/>
                     </a:lnR>
                     <a:lnT w="9525" cap="flat" cmpd="sng" algn="ctr">
                       <a:solidFill>
-                        <a:srgbClr val="F7D4E3"/>
+                        <a:srgbClr val="FAD1E2"/>
                       </a:solidFill>
                       <a:prstDash val="solid"/>
                     </a:lnT>
                     <a:lnB w="9525" cap="flat" cmpd="sng" algn="ctr">
                       <a:solidFill>
-                        <a:srgbClr val="F7D4E3"/>
+                        <a:srgbClr val="FAD1E2"/>
                       </a:solidFill>
                       <a:prstDash val="solid"/>
                     </a:lnB>
                     <a:solidFill>
-                      <a:srgbClr val="FCF3F7"/>
+                      <a:srgbClr val="FDEAF2"/>
                     </a:solidFill>
                   </a:tcPr>
                 </a:tc>
@@ -7249,7 +7443,7 @@
                       <a:r>
                         <a:rPr sz="1400" b="0">
                           <a:solidFill>
-                            <a:srgbClr val="2B2B2B"/>
+                            <a:srgbClr val="26231F"/>
                           </a:solidFill>
                         </a:rPr>
                         <a:t>□</a:t>
@@ -7259,30 +7453,30 @@
                   <a:tcPr anchor="ctr" marL="73152" marR="73152">
                     <a:lnL w="9525" cap="flat" cmpd="sng" algn="ctr">
                       <a:solidFill>
-                        <a:srgbClr val="F7D4E3"/>
+                        <a:srgbClr val="FAD1E2"/>
                       </a:solidFill>
                       <a:prstDash val="solid"/>
                     </a:lnL>
                     <a:lnR w="9525" cap="flat" cmpd="sng" algn="ctr">
                       <a:solidFill>
-                        <a:srgbClr val="F7D4E3"/>
+                        <a:srgbClr val="FAD1E2"/>
                       </a:solidFill>
                       <a:prstDash val="solid"/>
                     </a:lnR>
                     <a:lnT w="9525" cap="flat" cmpd="sng" algn="ctr">
                       <a:solidFill>
-                        <a:srgbClr val="F7D4E3"/>
+                        <a:srgbClr val="FAD1E2"/>
                       </a:solidFill>
                       <a:prstDash val="solid"/>
                     </a:lnT>
                     <a:lnB w="9525" cap="flat" cmpd="sng" algn="ctr">
                       <a:solidFill>
-                        <a:srgbClr val="F7D4E3"/>
+                        <a:srgbClr val="FAD1E2"/>
                       </a:solidFill>
                       <a:prstDash val="solid"/>
                     </a:lnB>
                     <a:solidFill>
-                      <a:srgbClr val="FCF3F7"/>
+                      <a:srgbClr val="FDEAF2"/>
                     </a:solidFill>
                   </a:tcPr>
                 </a:tc>
@@ -7297,7 +7491,7 @@
                       <a:r>
                         <a:rPr sz="1400" b="1">
                           <a:solidFill>
-                            <a:srgbClr val="6F1F41"/>
+                            <a:srgbClr val="492735"/>
                           </a:solidFill>
                         </a:rPr>
                         <a:t>실손의료</a:t>
@@ -7307,30 +7501,30 @@
                   <a:tcPr anchor="ctr" marL="73152" marR="73152">
                     <a:lnL w="9525" cap="flat" cmpd="sng" algn="ctr">
                       <a:solidFill>
-                        <a:srgbClr val="F7D4E3"/>
+                        <a:srgbClr val="FAD1E2"/>
                       </a:solidFill>
                       <a:prstDash val="solid"/>
                     </a:lnL>
                     <a:lnR w="9525" cap="flat" cmpd="sng" algn="ctr">
                       <a:solidFill>
-                        <a:srgbClr val="F7D4E3"/>
+                        <a:srgbClr val="FAD1E2"/>
                       </a:solidFill>
                       <a:prstDash val="solid"/>
                     </a:lnR>
                     <a:lnT w="9525" cap="flat" cmpd="sng" algn="ctr">
                       <a:solidFill>
-                        <a:srgbClr val="F7D4E3"/>
+                        <a:srgbClr val="FAD1E2"/>
                       </a:solidFill>
                       <a:prstDash val="solid"/>
                     </a:lnT>
                     <a:lnB w="9525" cap="flat" cmpd="sng" algn="ctr">
                       <a:solidFill>
-                        <a:srgbClr val="F7D4E3"/>
+                        <a:srgbClr val="FAD1E2"/>
                       </a:solidFill>
                       <a:prstDash val="solid"/>
                     </a:lnB>
                     <a:solidFill>
-                      <a:srgbClr val="F7D4E3"/>
+                      <a:srgbClr val="FAD1E2"/>
                     </a:solidFill>
                   </a:tcPr>
                 </a:tc>
@@ -7343,7 +7537,7 @@
                       <a:r>
                         <a:rPr sz="1400" b="0">
                           <a:solidFill>
-                            <a:srgbClr val="2B2B2B"/>
+                            <a:srgbClr val="26231F"/>
                           </a:solidFill>
                         </a:rPr>
                         <a:t>□</a:t>
@@ -7353,25 +7547,25 @@
                   <a:tcPr anchor="ctr" marL="73152" marR="73152">
                     <a:lnL w="9525" cap="flat" cmpd="sng" algn="ctr">
                       <a:solidFill>
-                        <a:srgbClr val="F7D4E3"/>
+                        <a:srgbClr val="FAD1E2"/>
                       </a:solidFill>
                       <a:prstDash val="solid"/>
                     </a:lnL>
                     <a:lnR w="9525" cap="flat" cmpd="sng" algn="ctr">
                       <a:solidFill>
-                        <a:srgbClr val="F7D4E3"/>
+                        <a:srgbClr val="FAD1E2"/>
                       </a:solidFill>
                       <a:prstDash val="solid"/>
                     </a:lnR>
                     <a:lnT w="9525" cap="flat" cmpd="sng" algn="ctr">
                       <a:solidFill>
-                        <a:srgbClr val="F7D4E3"/>
+                        <a:srgbClr val="FAD1E2"/>
                       </a:solidFill>
                       <a:prstDash val="solid"/>
                     </a:lnT>
                     <a:lnB w="9525" cap="flat" cmpd="sng" algn="ctr">
                       <a:solidFill>
-                        <a:srgbClr val="F7D4E3"/>
+                        <a:srgbClr val="FAD1E2"/>
                       </a:solidFill>
                       <a:prstDash val="solid"/>
                     </a:lnB>
@@ -7389,7 +7583,7 @@
                       <a:r>
                         <a:rPr sz="1400" b="0">
                           <a:solidFill>
-                            <a:srgbClr val="2B2B2B"/>
+                            <a:srgbClr val="26231F"/>
                           </a:solidFill>
                         </a:rPr>
                         <a:t>□</a:t>
@@ -7399,25 +7593,25 @@
                   <a:tcPr anchor="ctr" marL="73152" marR="73152">
                     <a:lnL w="9525" cap="flat" cmpd="sng" algn="ctr">
                       <a:solidFill>
-                        <a:srgbClr val="F7D4E3"/>
+                        <a:srgbClr val="FAD1E2"/>
                       </a:solidFill>
                       <a:prstDash val="solid"/>
                     </a:lnL>
                     <a:lnR w="9525" cap="flat" cmpd="sng" algn="ctr">
                       <a:solidFill>
-                        <a:srgbClr val="F7D4E3"/>
+                        <a:srgbClr val="FAD1E2"/>
                       </a:solidFill>
                       <a:prstDash val="solid"/>
                     </a:lnR>
                     <a:lnT w="9525" cap="flat" cmpd="sng" algn="ctr">
                       <a:solidFill>
-                        <a:srgbClr val="F7D4E3"/>
+                        <a:srgbClr val="FAD1E2"/>
                       </a:solidFill>
                       <a:prstDash val="solid"/>
                     </a:lnT>
                     <a:lnB w="9525" cap="flat" cmpd="sng" algn="ctr">
                       <a:solidFill>
-                        <a:srgbClr val="F7D4E3"/>
+                        <a:srgbClr val="FAD1E2"/>
                       </a:solidFill>
                       <a:prstDash val="solid"/>
                     </a:lnB>
@@ -7435,7 +7629,7 @@
                       <a:r>
                         <a:rPr sz="1400" b="0">
                           <a:solidFill>
-                            <a:srgbClr val="2B2B2B"/>
+                            <a:srgbClr val="26231F"/>
                           </a:solidFill>
                         </a:rPr>
                         <a:t>□</a:t>
@@ -7445,25 +7639,25 @@
                   <a:tcPr anchor="ctr" marL="73152" marR="73152">
                     <a:lnL w="9525" cap="flat" cmpd="sng" algn="ctr">
                       <a:solidFill>
-                        <a:srgbClr val="F7D4E3"/>
+                        <a:srgbClr val="FAD1E2"/>
                       </a:solidFill>
                       <a:prstDash val="solid"/>
                     </a:lnL>
                     <a:lnR w="9525" cap="flat" cmpd="sng" algn="ctr">
                       <a:solidFill>
-                        <a:srgbClr val="F7D4E3"/>
+                        <a:srgbClr val="FAD1E2"/>
                       </a:solidFill>
                       <a:prstDash val="solid"/>
                     </a:lnR>
                     <a:lnT w="9525" cap="flat" cmpd="sng" algn="ctr">
                       <a:solidFill>
-                        <a:srgbClr val="F7D4E3"/>
+                        <a:srgbClr val="FAD1E2"/>
                       </a:solidFill>
                       <a:prstDash val="solid"/>
                     </a:lnT>
                     <a:lnB w="9525" cap="flat" cmpd="sng" algn="ctr">
                       <a:solidFill>
-                        <a:srgbClr val="F7D4E3"/>
+                        <a:srgbClr val="FAD1E2"/>
                       </a:solidFill>
                       <a:prstDash val="solid"/>
                     </a:lnB>
@@ -7483,7 +7677,7 @@
                       <a:r>
                         <a:rPr sz="1400" b="1">
                           <a:solidFill>
-                            <a:srgbClr val="6F1F41"/>
+                            <a:srgbClr val="492735"/>
                           </a:solidFill>
                         </a:rPr>
                         <a:t>연금·노후자금</a:t>
@@ -7493,30 +7687,30 @@
                   <a:tcPr anchor="ctr" marL="73152" marR="73152">
                     <a:lnL w="9525" cap="flat" cmpd="sng" algn="ctr">
                       <a:solidFill>
-                        <a:srgbClr val="F7D4E3"/>
+                        <a:srgbClr val="FAD1E2"/>
                       </a:solidFill>
                       <a:prstDash val="solid"/>
                     </a:lnL>
                     <a:lnR w="9525" cap="flat" cmpd="sng" algn="ctr">
                       <a:solidFill>
-                        <a:srgbClr val="F7D4E3"/>
+                        <a:srgbClr val="FAD1E2"/>
                       </a:solidFill>
                       <a:prstDash val="solid"/>
                     </a:lnR>
                     <a:lnT w="9525" cap="flat" cmpd="sng" algn="ctr">
                       <a:solidFill>
-                        <a:srgbClr val="F7D4E3"/>
+                        <a:srgbClr val="FAD1E2"/>
                       </a:solidFill>
                       <a:prstDash val="solid"/>
                     </a:lnT>
                     <a:lnB w="9525" cap="flat" cmpd="sng" algn="ctr">
                       <a:solidFill>
-                        <a:srgbClr val="F7D4E3"/>
+                        <a:srgbClr val="FAD1E2"/>
                       </a:solidFill>
                       <a:prstDash val="solid"/>
                     </a:lnB>
                     <a:solidFill>
-                      <a:srgbClr val="F7D4E3"/>
+                      <a:srgbClr val="FAD1E2"/>
                     </a:solidFill>
                   </a:tcPr>
                 </a:tc>
@@ -7529,7 +7723,7 @@
                       <a:r>
                         <a:rPr sz="1400" b="0">
                           <a:solidFill>
-                            <a:srgbClr val="2B2B2B"/>
+                            <a:srgbClr val="26231F"/>
                           </a:solidFill>
                         </a:rPr>
                         <a:t>□</a:t>
@@ -7539,30 +7733,30 @@
                   <a:tcPr anchor="ctr" marL="73152" marR="73152">
                     <a:lnL w="9525" cap="flat" cmpd="sng" algn="ctr">
                       <a:solidFill>
-                        <a:srgbClr val="F7D4E3"/>
+                        <a:srgbClr val="FAD1E2"/>
                       </a:solidFill>
                       <a:prstDash val="solid"/>
                     </a:lnL>
                     <a:lnR w="9525" cap="flat" cmpd="sng" algn="ctr">
                       <a:solidFill>
-                        <a:srgbClr val="F7D4E3"/>
+                        <a:srgbClr val="FAD1E2"/>
                       </a:solidFill>
                       <a:prstDash val="solid"/>
                     </a:lnR>
                     <a:lnT w="9525" cap="flat" cmpd="sng" algn="ctr">
                       <a:solidFill>
-                        <a:srgbClr val="F7D4E3"/>
+                        <a:srgbClr val="FAD1E2"/>
                       </a:solidFill>
                       <a:prstDash val="solid"/>
                     </a:lnT>
                     <a:lnB w="9525" cap="flat" cmpd="sng" algn="ctr">
                       <a:solidFill>
-                        <a:srgbClr val="F7D4E3"/>
+                        <a:srgbClr val="FAD1E2"/>
                       </a:solidFill>
                       <a:prstDash val="solid"/>
                     </a:lnB>
                     <a:solidFill>
-                      <a:srgbClr val="FCF3F7"/>
+                      <a:srgbClr val="FDEAF2"/>
                     </a:solidFill>
                   </a:tcPr>
                 </a:tc>
@@ -7575,7 +7769,7 @@
                       <a:r>
                         <a:rPr sz="1400" b="0">
                           <a:solidFill>
-                            <a:srgbClr val="2B2B2B"/>
+                            <a:srgbClr val="26231F"/>
                           </a:solidFill>
                         </a:rPr>
                         <a:t>□</a:t>
@@ -7585,30 +7779,30 @@
                   <a:tcPr anchor="ctr" marL="73152" marR="73152">
                     <a:lnL w="9525" cap="flat" cmpd="sng" algn="ctr">
                       <a:solidFill>
-                        <a:srgbClr val="F7D4E3"/>
+                        <a:srgbClr val="FAD1E2"/>
                       </a:solidFill>
                       <a:prstDash val="solid"/>
                     </a:lnL>
                     <a:lnR w="9525" cap="flat" cmpd="sng" algn="ctr">
                       <a:solidFill>
-                        <a:srgbClr val="F7D4E3"/>
+                        <a:srgbClr val="FAD1E2"/>
                       </a:solidFill>
                       <a:prstDash val="solid"/>
                     </a:lnR>
                     <a:lnT w="9525" cap="flat" cmpd="sng" algn="ctr">
                       <a:solidFill>
-                        <a:srgbClr val="F7D4E3"/>
+                        <a:srgbClr val="FAD1E2"/>
                       </a:solidFill>
                       <a:prstDash val="solid"/>
                     </a:lnT>
                     <a:lnB w="9525" cap="flat" cmpd="sng" algn="ctr">
                       <a:solidFill>
-                        <a:srgbClr val="F7D4E3"/>
+                        <a:srgbClr val="FAD1E2"/>
                       </a:solidFill>
                       <a:prstDash val="solid"/>
                     </a:lnB>
                     <a:solidFill>
-                      <a:srgbClr val="FCF3F7"/>
+                      <a:srgbClr val="FDEAF2"/>
                     </a:solidFill>
                   </a:tcPr>
                 </a:tc>
@@ -7621,7 +7815,7 @@
                       <a:r>
                         <a:rPr sz="1400" b="0">
                           <a:solidFill>
-                            <a:srgbClr val="2B2B2B"/>
+                            <a:srgbClr val="26231F"/>
                           </a:solidFill>
                         </a:rPr>
                         <a:t>□</a:t>
@@ -7631,30 +7825,30 @@
                   <a:tcPr anchor="ctr" marL="73152" marR="73152">
                     <a:lnL w="9525" cap="flat" cmpd="sng" algn="ctr">
                       <a:solidFill>
-                        <a:srgbClr val="F7D4E3"/>
+                        <a:srgbClr val="FAD1E2"/>
                       </a:solidFill>
                       <a:prstDash val="solid"/>
                     </a:lnL>
                     <a:lnR w="9525" cap="flat" cmpd="sng" algn="ctr">
                       <a:solidFill>
-                        <a:srgbClr val="F7D4E3"/>
+                        <a:srgbClr val="FAD1E2"/>
                       </a:solidFill>
                       <a:prstDash val="solid"/>
                     </a:lnR>
                     <a:lnT w="9525" cap="flat" cmpd="sng" algn="ctr">
                       <a:solidFill>
-                        <a:srgbClr val="F7D4E3"/>
+                        <a:srgbClr val="FAD1E2"/>
                       </a:solidFill>
                       <a:prstDash val="solid"/>
                     </a:lnT>
                     <a:lnB w="9525" cap="flat" cmpd="sng" algn="ctr">
                       <a:solidFill>
-                        <a:srgbClr val="F7D4E3"/>
+                        <a:srgbClr val="FAD1E2"/>
                       </a:solidFill>
                       <a:prstDash val="solid"/>
                     </a:lnB>
                     <a:solidFill>
-                      <a:srgbClr val="FCF3F7"/>
+                      <a:srgbClr val="FDEAF2"/>
                     </a:solidFill>
                   </a:tcPr>
                 </a:tc>
@@ -7677,7 +7871,7 @@
     <p:bg>
       <p:bgPr>
         <a:solidFill>
-          <a:srgbClr val="FCF3F7"/>
+          <a:srgbClr val="FDFAFB"/>
         </a:solidFill>
         <a:effectLst/>
       </p:bgPr>
@@ -7691,20 +7885,49 @@
       <p:grpSpPr/>
       <p:sp>
         <p:nvSpPr>
-          <p:cNvPr id="3" name="장식"/>
+          <p:cNvPr id="3" name="포인트"/>
           <p:cNvSpPr/>
           <p:nvPr/>
         </p:nvSpPr>
         <p:spPr>
           <a:xfrm>
-            <a:off x="0" y="0"/>
-            <a:ext cx="12191695" cy="274320"/>
+            <a:off x="5958687" y="246888"/>
+            <a:ext cx="274320" cy="274320"/>
+          </a:xfrm>
+          <a:prstGeom prst="heart">
+            <a:avLst/>
+          </a:prstGeom>
+          <a:solidFill>
+            <a:srgbClr val="ED97BB"/>
+          </a:solidFill>
+          <a:ln>
+            <a:noFill/>
+          </a:ln>
+        </p:spPr>
+        <p:txBody>
+          <a:bodyPr rtlCol="0" anchor="ctr"/>
+          <a:lstStyle/>
+          <a:p>
+            <a:pPr algn="ctr"/>
+          </a:p>
+        </p:txBody>
+      </p:sp>
+      <p:sp>
+        <p:nvSpPr>
+          <p:cNvPr id="4" name="장식"/>
+          <p:cNvSpPr/>
+          <p:nvPr/>
+        </p:nvSpPr>
+        <p:spPr>
+          <a:xfrm>
+            <a:off x="5684367" y="1572768"/>
+            <a:ext cx="822960" cy="22860"/>
           </a:xfrm>
           <a:prstGeom prst="rect">
             <a:avLst/>
           </a:prstGeom>
           <a:solidFill>
-            <a:srgbClr val="CD4C82"/>
+            <a:srgbClr val="ED97BB"/>
           </a:solidFill>
           <a:ln>
             <a:noFill/>
@@ -7720,30 +7943,39 @@
       </p:sp>
       <p:sp>
         <p:nvSpPr>
-          <p:cNvPr id="4" name="장식"/>
-          <p:cNvSpPr/>
+          <p:cNvPr id="5" name="상단 라벨"/>
+          <p:cNvSpPr txBox="1"/>
           <p:nvPr/>
         </p:nvSpPr>
         <p:spPr>
           <a:xfrm>
-            <a:off x="0" y="274320"/>
-            <a:ext cx="12191695" cy="54864"/>
+            <a:off x="640080" y="182880"/>
+            <a:ext cx="3657600" cy="274320"/>
           </a:xfrm>
           <a:prstGeom prst="rect">
             <a:avLst/>
           </a:prstGeom>
-          <a:solidFill>
-            <a:srgbClr val="339941"/>
-          </a:solidFill>
-          <a:ln>
-            <a:noFill/>
-          </a:ln>
-        </p:spPr>
-        <p:txBody>
-          <a:bodyPr rtlCol="0" anchor="ctr"/>
-          <a:lstStyle/>
-          <a:p>
-            <a:pPr algn="ctr"/>
+          <a:noFill/>
+        </p:spPr>
+        <p:txBody>
+          <a:bodyPr wrap="square" lIns="54864" rIns="54864" tIns="27432" bIns="27432" anchor="ctr">
+            <a:noAutofit/>
+          </a:bodyPr>
+          <a:lstStyle/>
+          <a:p>
+            <a:pPr algn="l">
+              <a:lnSpc>
+                <a:spcPct val="115000"/>
+              </a:lnSpc>
+            </a:pPr>
+            <a:r>
+              <a:rPr sz="800" b="1" i="0" spc="250">
+                <a:solidFill>
+                  <a:srgbClr val="8E8780"/>
+                </a:solidFill>
+              </a:rPr>
+              <a:t>INSURANCE CHECK</a:t>
+            </a:r>
           </a:p>
         </p:txBody>
       </p:sp>
@@ -7759,8 +7991,8 @@
         </p:nvSpPr>
         <p:spPr>
           <a:xfrm>
-            <a:off x="640080" y="457200"/>
-            <a:ext cx="9722815" cy="868680"/>
+            <a:off x="1371600" y="640080"/>
+            <a:ext cx="9448495" cy="868680"/>
           </a:xfrm>
         </p:spPr>
         <p:txBody>
@@ -7769,7 +8001,7 @@
           </a:bodyPr>
           <a:lstStyle/>
           <a:p>
-            <a:pPr algn="l">
+            <a:pPr algn="ctr">
               <a:lnSpc>
                 <a:spcPct val="105000"/>
               </a:lnSpc>
@@ -7777,7 +8009,7 @@
             <a:r>
               <a:rPr sz="3000" b="1" i="0">
                 <a:solidFill>
-                  <a:srgbClr val="6F1F41"/>
+                  <a:srgbClr val="26231F"/>
                 </a:solidFill>
               </a:rPr>
               <a:t>월 보험료 한눈에</a:t>
@@ -7787,26 +8019,26 @@
       </p:sp>
       <p:sp>
         <p:nvSpPr>
-          <p:cNvPr id="5" name="카드 1"/>
+          <p:cNvPr id="6" name="카드 1"/>
           <p:cNvSpPr/>
           <p:nvPr/>
         </p:nvSpPr>
         <p:spPr>
           <a:xfrm>
-            <a:off x="640080" y="1600200"/>
+            <a:off x="640080" y="1783080"/>
             <a:ext cx="3484778" cy="2926080"/>
           </a:xfrm>
           <a:prstGeom prst="roundRect">
             <a:avLst>
-              <a:gd name="adj" fmla="val 8000"/>
+              <a:gd name="adj" fmla="val 7000"/>
             </a:avLst>
           </a:prstGeom>
           <a:solidFill>
-            <a:srgbClr val="FCF3F7"/>
+            <a:srgbClr val="FFFFFF"/>
           </a:solidFill>
-          <a:ln w="15875">
+          <a:ln w="12700">
             <a:solidFill>
-              <a:srgbClr val="F7D4E3"/>
+              <a:srgbClr val="F2A6C6"/>
             </a:solidFill>
           </a:ln>
         </p:spPr>
@@ -7820,57 +8052,14 @@
       </p:sp>
       <p:sp>
         <p:nvSpPr>
-          <p:cNvPr id="6" name="번호 1"/>
-          <p:cNvSpPr/>
-          <p:nvPr/>
-        </p:nvSpPr>
-        <p:spPr>
-          <a:xfrm>
-            <a:off x="822959" y="1783080"/>
-            <a:ext cx="457200" cy="457200"/>
-          </a:xfrm>
-          <a:prstGeom prst="ellipse">
-            <a:avLst/>
-          </a:prstGeom>
-          <a:solidFill>
-            <a:srgbClr val="CD4C82"/>
-          </a:solidFill>
-          <a:ln>
-            <a:noFill/>
-          </a:ln>
-        </p:spPr>
-        <p:txBody>
-          <a:bodyPr rtlCol="0" anchor="ctr" wrap="square" lIns="54864" rIns="54864" tIns="27432" bIns="27432">
-            <a:noAutofit/>
-          </a:bodyPr>
-          <a:lstStyle/>
-          <a:p>
-            <a:pPr algn="ctr">
-              <a:lnSpc>
-                <a:spcPct val="100000"/>
-              </a:lnSpc>
-            </a:pPr>
-            <a:r>
-              <a:rPr sz="1600" b="1" i="0">
-                <a:solidFill>
-                  <a:srgbClr val="FFFFFF"/>
-                </a:solidFill>
-              </a:rPr>
-              <a:t>1</a:t>
-            </a:r>
-          </a:p>
-        </p:txBody>
-      </p:sp>
-      <p:sp>
-        <p:nvSpPr>
-          <p:cNvPr id="7" name="TextBox 6"/>
+          <p:cNvPr id="7" name="번호 1"/>
           <p:cNvSpPr txBox="1"/>
           <p:nvPr/>
         </p:nvSpPr>
         <p:spPr>
           <a:xfrm>
-            <a:off x="777240" y="2377440"/>
-            <a:ext cx="3210458" cy="640080"/>
+            <a:off x="731519" y="1920240"/>
+            <a:ext cx="914400" cy="548640"/>
           </a:xfrm>
           <a:prstGeom prst="rect">
             <a:avLst/>
@@ -7889,9 +8078,47 @@
               </a:lnSpc>
             </a:pPr>
             <a:r>
+              <a:rPr sz="2400" b="1" i="0">
+                <a:solidFill>
+                  <a:srgbClr val="ED97BB"/>
+                </a:solidFill>
+              </a:rPr>
+              <a:t>01</a:t>
+            </a:r>
+          </a:p>
+        </p:txBody>
+      </p:sp>
+      <p:sp>
+        <p:nvSpPr>
+          <p:cNvPr id="8" name="TextBox 7"/>
+          <p:cNvSpPr txBox="1"/>
+          <p:nvPr/>
+        </p:nvSpPr>
+        <p:spPr>
+          <a:xfrm>
+            <a:off x="777240" y="2560320"/>
+            <a:ext cx="3210458" cy="640080"/>
+          </a:xfrm>
+          <a:prstGeom prst="rect">
+            <a:avLst/>
+          </a:prstGeom>
+          <a:noFill/>
+        </p:spPr>
+        <p:txBody>
+          <a:bodyPr wrap="square" lIns="54864" rIns="54864" tIns="27432" bIns="27432" anchor="ctr">
+            <a:noAutofit/>
+          </a:bodyPr>
+          <a:lstStyle/>
+          <a:p>
+            <a:pPr algn="l">
+              <a:lnSpc>
+                <a:spcPct val="115000"/>
+              </a:lnSpc>
+            </a:pPr>
+            <a:r>
               <a:rPr sz="1700" b="1" i="0">
                 <a:solidFill>
-                  <a:srgbClr val="6F1F41"/>
+                  <a:srgbClr val="492735"/>
                 </a:solidFill>
               </a:rPr>
               <a:t>월 보험료 합계</a:t>
@@ -7901,13 +8128,13 @@
       </p:sp>
       <p:sp>
         <p:nvSpPr>
-          <p:cNvPr id="8" name="TextBox 7"/>
+          <p:cNvPr id="9" name="TextBox 8"/>
           <p:cNvSpPr txBox="1"/>
           <p:nvPr/>
         </p:nvSpPr>
         <p:spPr>
           <a:xfrm>
-            <a:off x="777240" y="3063240"/>
+            <a:off x="777240" y="3246120"/>
             <a:ext cx="3210458" cy="1325880"/>
           </a:xfrm>
           <a:prstGeom prst="rect">
@@ -7929,7 +8156,7 @@
             <a:r>
               <a:rPr sz="3000" b="0" i="0">
                 <a:solidFill>
-                  <a:srgbClr val="2B2B2B"/>
+                  <a:srgbClr val="26231F"/>
                 </a:solidFill>
               </a:rPr>
               <a:t>0원</a:t>
@@ -7939,26 +8166,26 @@
       </p:sp>
       <p:sp>
         <p:nvSpPr>
-          <p:cNvPr id="9" name="카드 2"/>
+          <p:cNvPr id="10" name="카드 2"/>
           <p:cNvSpPr/>
           <p:nvPr/>
         </p:nvSpPr>
         <p:spPr>
           <a:xfrm>
-            <a:off x="4353458" y="1600200"/>
+            <a:off x="4353458" y="1783080"/>
             <a:ext cx="3484778" cy="2926080"/>
           </a:xfrm>
           <a:prstGeom prst="roundRect">
             <a:avLst>
-              <a:gd name="adj" fmla="val 8000"/>
+              <a:gd name="adj" fmla="val 7000"/>
             </a:avLst>
           </a:prstGeom>
           <a:solidFill>
-            <a:srgbClr val="FCF3F7"/>
+            <a:srgbClr val="FFFFFF"/>
           </a:solidFill>
-          <a:ln w="15875">
+          <a:ln w="12700">
             <a:solidFill>
-              <a:srgbClr val="F7D4E3"/>
+              <a:srgbClr val="F2A6C6"/>
             </a:solidFill>
           </a:ln>
         </p:spPr>
@@ -7972,57 +8199,14 @@
       </p:sp>
       <p:sp>
         <p:nvSpPr>
-          <p:cNvPr id="10" name="번호 2"/>
-          <p:cNvSpPr/>
-          <p:nvPr/>
-        </p:nvSpPr>
-        <p:spPr>
-          <a:xfrm>
-            <a:off x="4536338" y="1783080"/>
-            <a:ext cx="457200" cy="457200"/>
-          </a:xfrm>
-          <a:prstGeom prst="ellipse">
-            <a:avLst/>
-          </a:prstGeom>
-          <a:solidFill>
-            <a:srgbClr val="CD4C82"/>
-          </a:solidFill>
-          <a:ln>
-            <a:noFill/>
-          </a:ln>
-        </p:spPr>
-        <p:txBody>
-          <a:bodyPr rtlCol="0" anchor="ctr" wrap="square" lIns="54864" rIns="54864" tIns="27432" bIns="27432">
-            <a:noAutofit/>
-          </a:bodyPr>
-          <a:lstStyle/>
-          <a:p>
-            <a:pPr algn="ctr">
-              <a:lnSpc>
-                <a:spcPct val="100000"/>
-              </a:lnSpc>
-            </a:pPr>
-            <a:r>
-              <a:rPr sz="1600" b="1" i="0">
-                <a:solidFill>
-                  <a:srgbClr val="FFFFFF"/>
-                </a:solidFill>
-              </a:rPr>
-              <a:t>2</a:t>
-            </a:r>
-          </a:p>
-        </p:txBody>
-      </p:sp>
-      <p:sp>
-        <p:nvSpPr>
-          <p:cNvPr id="11" name="TextBox 10"/>
+          <p:cNvPr id="11" name="번호 2"/>
           <p:cNvSpPr txBox="1"/>
           <p:nvPr/>
         </p:nvSpPr>
         <p:spPr>
           <a:xfrm>
-            <a:off x="4490618" y="2377440"/>
-            <a:ext cx="3210458" cy="640080"/>
+            <a:off x="4444898" y="1920240"/>
+            <a:ext cx="914400" cy="548640"/>
           </a:xfrm>
           <a:prstGeom prst="rect">
             <a:avLst/>
@@ -8041,9 +8225,47 @@
               </a:lnSpc>
             </a:pPr>
             <a:r>
+              <a:rPr sz="2400" b="1" i="0">
+                <a:solidFill>
+                  <a:srgbClr val="ED97BB"/>
+                </a:solidFill>
+              </a:rPr>
+              <a:t>02</a:t>
+            </a:r>
+          </a:p>
+        </p:txBody>
+      </p:sp>
+      <p:sp>
+        <p:nvSpPr>
+          <p:cNvPr id="12" name="TextBox 11"/>
+          <p:cNvSpPr txBox="1"/>
+          <p:nvPr/>
+        </p:nvSpPr>
+        <p:spPr>
+          <a:xfrm>
+            <a:off x="4490618" y="2560320"/>
+            <a:ext cx="3210458" cy="640080"/>
+          </a:xfrm>
+          <a:prstGeom prst="rect">
+            <a:avLst/>
+          </a:prstGeom>
+          <a:noFill/>
+        </p:spPr>
+        <p:txBody>
+          <a:bodyPr wrap="square" lIns="54864" rIns="54864" tIns="27432" bIns="27432" anchor="ctr">
+            <a:noAutofit/>
+          </a:bodyPr>
+          <a:lstStyle/>
+          <a:p>
+            <a:pPr algn="l">
+              <a:lnSpc>
+                <a:spcPct val="115000"/>
+              </a:lnSpc>
+            </a:pPr>
+            <a:r>
               <a:rPr sz="1700" b="1" i="0">
                 <a:solidFill>
-                  <a:srgbClr val="6F1F41"/>
+                  <a:srgbClr val="492735"/>
                 </a:solidFill>
               </a:rPr>
               <a:t>연 보험료 합계</a:t>
@@ -8053,13 +8275,13 @@
       </p:sp>
       <p:sp>
         <p:nvSpPr>
-          <p:cNvPr id="12" name="TextBox 11"/>
+          <p:cNvPr id="13" name="TextBox 12"/>
           <p:cNvSpPr txBox="1"/>
           <p:nvPr/>
         </p:nvSpPr>
         <p:spPr>
           <a:xfrm>
-            <a:off x="4490618" y="3063240"/>
+            <a:off x="4490618" y="3246120"/>
             <a:ext cx="3210458" cy="1325880"/>
           </a:xfrm>
           <a:prstGeom prst="rect">
@@ -8081,7 +8303,7 @@
             <a:r>
               <a:rPr sz="3000" b="0" i="0">
                 <a:solidFill>
-                  <a:srgbClr val="2B2B2B"/>
+                  <a:srgbClr val="26231F"/>
                 </a:solidFill>
               </a:rPr>
               <a:t>0원</a:t>
@@ -8091,26 +8313,26 @@
       </p:sp>
       <p:sp>
         <p:nvSpPr>
-          <p:cNvPr id="13" name="카드 3"/>
+          <p:cNvPr id="14" name="카드 3"/>
           <p:cNvSpPr/>
           <p:nvPr/>
         </p:nvSpPr>
         <p:spPr>
           <a:xfrm>
-            <a:off x="8066836" y="1600200"/>
+            <a:off x="8066836" y="1783080"/>
             <a:ext cx="3484778" cy="2926080"/>
           </a:xfrm>
           <a:prstGeom prst="roundRect">
             <a:avLst>
-              <a:gd name="adj" fmla="val 8000"/>
+              <a:gd name="adj" fmla="val 7000"/>
             </a:avLst>
           </a:prstGeom>
           <a:solidFill>
-            <a:srgbClr val="FCF3F7"/>
+            <a:srgbClr val="FFFFFF"/>
           </a:solidFill>
-          <a:ln w="15875">
+          <a:ln w="12700">
             <a:solidFill>
-              <a:srgbClr val="F7D4E3"/>
+              <a:srgbClr val="F2A6C6"/>
             </a:solidFill>
           </a:ln>
         </p:spPr>
@@ -8124,57 +8346,14 @@
       </p:sp>
       <p:sp>
         <p:nvSpPr>
-          <p:cNvPr id="14" name="번호 3"/>
-          <p:cNvSpPr/>
-          <p:nvPr/>
-        </p:nvSpPr>
-        <p:spPr>
-          <a:xfrm>
-            <a:off x="8249716" y="1783080"/>
-            <a:ext cx="457200" cy="457200"/>
-          </a:xfrm>
-          <a:prstGeom prst="ellipse">
-            <a:avLst/>
-          </a:prstGeom>
-          <a:solidFill>
-            <a:srgbClr val="CD4C82"/>
-          </a:solidFill>
-          <a:ln>
-            <a:noFill/>
-          </a:ln>
-        </p:spPr>
-        <p:txBody>
-          <a:bodyPr rtlCol="0" anchor="ctr" wrap="square" lIns="54864" rIns="54864" tIns="27432" bIns="27432">
-            <a:noAutofit/>
-          </a:bodyPr>
-          <a:lstStyle/>
-          <a:p>
-            <a:pPr algn="ctr">
-              <a:lnSpc>
-                <a:spcPct val="100000"/>
-              </a:lnSpc>
-            </a:pPr>
-            <a:r>
-              <a:rPr sz="1600" b="1" i="0">
-                <a:solidFill>
-                  <a:srgbClr val="FFFFFF"/>
-                </a:solidFill>
-              </a:rPr>
-              <a:t>3</a:t>
-            </a:r>
-          </a:p>
-        </p:txBody>
-      </p:sp>
-      <p:sp>
-        <p:nvSpPr>
-          <p:cNvPr id="15" name="TextBox 14"/>
+          <p:cNvPr id="15" name="번호 3"/>
           <p:cNvSpPr txBox="1"/>
           <p:nvPr/>
         </p:nvSpPr>
         <p:spPr>
           <a:xfrm>
-            <a:off x="8203996" y="2377440"/>
-            <a:ext cx="3210458" cy="640080"/>
+            <a:off x="8158276" y="1920240"/>
+            <a:ext cx="914400" cy="548640"/>
           </a:xfrm>
           <a:prstGeom prst="rect">
             <a:avLst/>
@@ -8193,9 +8372,47 @@
               </a:lnSpc>
             </a:pPr>
             <a:r>
+              <a:rPr sz="2400" b="1" i="0">
+                <a:solidFill>
+                  <a:srgbClr val="ED97BB"/>
+                </a:solidFill>
+              </a:rPr>
+              <a:t>03</a:t>
+            </a:r>
+          </a:p>
+        </p:txBody>
+      </p:sp>
+      <p:sp>
+        <p:nvSpPr>
+          <p:cNvPr id="16" name="TextBox 15"/>
+          <p:cNvSpPr txBox="1"/>
+          <p:nvPr/>
+        </p:nvSpPr>
+        <p:spPr>
+          <a:xfrm>
+            <a:off x="8203996" y="2560320"/>
+            <a:ext cx="3210458" cy="640080"/>
+          </a:xfrm>
+          <a:prstGeom prst="rect">
+            <a:avLst/>
+          </a:prstGeom>
+          <a:noFill/>
+        </p:spPr>
+        <p:txBody>
+          <a:bodyPr wrap="square" lIns="54864" rIns="54864" tIns="27432" bIns="27432" anchor="ctr">
+            <a:noAutofit/>
+          </a:bodyPr>
+          <a:lstStyle/>
+          <a:p>
+            <a:pPr algn="l">
+              <a:lnSpc>
+                <a:spcPct val="115000"/>
+              </a:lnSpc>
+            </a:pPr>
+            <a:r>
               <a:rPr sz="1700" b="1" i="0">
                 <a:solidFill>
-                  <a:srgbClr val="6F1F41"/>
+                  <a:srgbClr val="492735"/>
                 </a:solidFill>
               </a:rPr>
               <a:t>월 소득 대비</a:t>
@@ -8205,13 +8422,13 @@
       </p:sp>
       <p:sp>
         <p:nvSpPr>
-          <p:cNvPr id="16" name="TextBox 15"/>
+          <p:cNvPr id="17" name="TextBox 16"/>
           <p:cNvSpPr txBox="1"/>
           <p:nvPr/>
         </p:nvSpPr>
         <p:spPr>
           <a:xfrm>
-            <a:off x="8203996" y="3063240"/>
+            <a:off x="8203996" y="3246120"/>
             <a:ext cx="3210458" cy="1325880"/>
           </a:xfrm>
           <a:prstGeom prst="rect">
@@ -8233,7 +8450,7 @@
             <a:r>
               <a:rPr sz="3000" b="0" i="0">
                 <a:solidFill>
-                  <a:srgbClr val="2B2B2B"/>
+                  <a:srgbClr val="26231F"/>
                 </a:solidFill>
               </a:rPr>
               <a:t>0 %</a:t>
@@ -8243,13 +8460,13 @@
       </p:sp>
       <p:sp>
         <p:nvSpPr>
-          <p:cNvPr id="17" name="안내"/>
+          <p:cNvPr id="18" name="안내"/>
           <p:cNvSpPr txBox="1"/>
           <p:nvPr/>
         </p:nvSpPr>
         <p:spPr>
           <a:xfrm>
-            <a:off x="640080" y="4709160"/>
+            <a:off x="640080" y="4892040"/>
             <a:ext cx="10911535" cy="365760"/>
           </a:xfrm>
           <a:prstGeom prst="rect">
@@ -8293,7 +8510,7 @@
     <p:bg>
       <p:bgPr>
         <a:solidFill>
-          <a:srgbClr val="FCF3F7"/>
+          <a:srgbClr val="FDFAFB"/>
         </a:solidFill>
         <a:effectLst/>
       </p:bgPr>
@@ -8307,20 +8524,49 @@
       <p:grpSpPr/>
       <p:sp>
         <p:nvSpPr>
-          <p:cNvPr id="3" name="장식"/>
+          <p:cNvPr id="3" name="포인트"/>
           <p:cNvSpPr/>
           <p:nvPr/>
         </p:nvSpPr>
         <p:spPr>
           <a:xfrm>
-            <a:off x="0" y="0"/>
-            <a:ext cx="12191695" cy="274320"/>
+            <a:off x="5958687" y="246888"/>
+            <a:ext cx="274320" cy="274320"/>
+          </a:xfrm>
+          <a:prstGeom prst="heart">
+            <a:avLst/>
+          </a:prstGeom>
+          <a:solidFill>
+            <a:srgbClr val="ED97BB"/>
+          </a:solidFill>
+          <a:ln>
+            <a:noFill/>
+          </a:ln>
+        </p:spPr>
+        <p:txBody>
+          <a:bodyPr rtlCol="0" anchor="ctr"/>
+          <a:lstStyle/>
+          <a:p>
+            <a:pPr algn="ctr"/>
+          </a:p>
+        </p:txBody>
+      </p:sp>
+      <p:sp>
+        <p:nvSpPr>
+          <p:cNvPr id="4" name="장식"/>
+          <p:cNvSpPr/>
+          <p:nvPr/>
+        </p:nvSpPr>
+        <p:spPr>
+          <a:xfrm>
+            <a:off x="5684367" y="1572768"/>
+            <a:ext cx="822960" cy="22860"/>
           </a:xfrm>
           <a:prstGeom prst="rect">
             <a:avLst/>
           </a:prstGeom>
           <a:solidFill>
-            <a:srgbClr val="CD4C82"/>
+            <a:srgbClr val="ED97BB"/>
           </a:solidFill>
           <a:ln>
             <a:noFill/>
@@ -8336,30 +8582,39 @@
       </p:sp>
       <p:sp>
         <p:nvSpPr>
-          <p:cNvPr id="4" name="장식"/>
-          <p:cNvSpPr/>
+          <p:cNvPr id="5" name="상단 라벨"/>
+          <p:cNvSpPr txBox="1"/>
           <p:nvPr/>
         </p:nvSpPr>
         <p:spPr>
           <a:xfrm>
-            <a:off x="0" y="274320"/>
-            <a:ext cx="12191695" cy="54864"/>
+            <a:off x="640080" y="182880"/>
+            <a:ext cx="3657600" cy="274320"/>
           </a:xfrm>
           <a:prstGeom prst="rect">
             <a:avLst/>
           </a:prstGeom>
-          <a:solidFill>
-            <a:srgbClr val="339941"/>
-          </a:solidFill>
-          <a:ln>
-            <a:noFill/>
-          </a:ln>
-        </p:spPr>
-        <p:txBody>
-          <a:bodyPr rtlCol="0" anchor="ctr"/>
-          <a:lstStyle/>
-          <a:p>
-            <a:pPr algn="ctr"/>
+          <a:noFill/>
+        </p:spPr>
+        <p:txBody>
+          <a:bodyPr wrap="square" lIns="54864" rIns="54864" tIns="27432" bIns="27432" anchor="ctr">
+            <a:noAutofit/>
+          </a:bodyPr>
+          <a:lstStyle/>
+          <a:p>
+            <a:pPr algn="l">
+              <a:lnSpc>
+                <a:spcPct val="115000"/>
+              </a:lnSpc>
+            </a:pPr>
+            <a:r>
+              <a:rPr sz="800" b="1" i="0" spc="250">
+                <a:solidFill>
+                  <a:srgbClr val="8E8780"/>
+                </a:solidFill>
+              </a:rPr>
+              <a:t>INSURANCE CHECK</a:t>
+            </a:r>
           </a:p>
         </p:txBody>
       </p:sp>
@@ -8375,8 +8630,8 @@
         </p:nvSpPr>
         <p:spPr>
           <a:xfrm>
-            <a:off x="640080" y="457200"/>
-            <a:ext cx="9722815" cy="868680"/>
+            <a:off x="1371600" y="640080"/>
+            <a:ext cx="9448495" cy="868680"/>
           </a:xfrm>
         </p:spPr>
         <p:txBody>
@@ -8385,7 +8640,7 @@
           </a:bodyPr>
           <a:lstStyle/>
           <a:p>
-            <a:pPr algn="l">
+            <a:pPr algn="ctr">
               <a:lnSpc>
                 <a:spcPct val="105000"/>
               </a:lnSpc>
@@ -8393,7 +8648,7 @@
             <a:r>
               <a:rPr sz="3000" b="1" i="0">
                 <a:solidFill>
-                  <a:srgbClr val="6F1F41"/>
+                  <a:srgbClr val="26231F"/>
                 </a:solidFill>
               </a:rPr>
               <a:t>점검 메모와 다음 할 일</a:t>
@@ -8403,26 +8658,26 @@
       </p:sp>
       <p:sp>
         <p:nvSpPr>
-          <p:cNvPr id="5" name="카드 1"/>
+          <p:cNvPr id="6" name="카드 1"/>
           <p:cNvSpPr/>
           <p:nvPr/>
         </p:nvSpPr>
         <p:spPr>
           <a:xfrm>
-            <a:off x="640080" y="1600200"/>
-            <a:ext cx="3484778" cy="4160520"/>
+            <a:off x="640080" y="1783080"/>
+            <a:ext cx="3484778" cy="3931920"/>
           </a:xfrm>
           <a:prstGeom prst="roundRect">
             <a:avLst>
-              <a:gd name="adj" fmla="val 8000"/>
+              <a:gd name="adj" fmla="val 7000"/>
             </a:avLst>
           </a:prstGeom>
           <a:solidFill>
-            <a:srgbClr val="FCF3F7"/>
+            <a:srgbClr val="FFFFFF"/>
           </a:solidFill>
-          <a:ln w="15875">
+          <a:ln w="12700">
             <a:solidFill>
-              <a:srgbClr val="F7D4E3"/>
+              <a:srgbClr val="F2A6C6"/>
             </a:solidFill>
           </a:ln>
         </p:spPr>
@@ -8436,57 +8691,14 @@
       </p:sp>
       <p:sp>
         <p:nvSpPr>
-          <p:cNvPr id="6" name="번호 1"/>
-          <p:cNvSpPr/>
-          <p:nvPr/>
-        </p:nvSpPr>
-        <p:spPr>
-          <a:xfrm>
-            <a:off x="822959" y="1783080"/>
-            <a:ext cx="457200" cy="457200"/>
-          </a:xfrm>
-          <a:prstGeom prst="ellipse">
-            <a:avLst/>
-          </a:prstGeom>
-          <a:solidFill>
-            <a:srgbClr val="CD4C82"/>
-          </a:solidFill>
-          <a:ln>
-            <a:noFill/>
-          </a:ln>
-        </p:spPr>
-        <p:txBody>
-          <a:bodyPr rtlCol="0" anchor="ctr" wrap="square" lIns="54864" rIns="54864" tIns="27432" bIns="27432">
-            <a:noAutofit/>
-          </a:bodyPr>
-          <a:lstStyle/>
-          <a:p>
-            <a:pPr algn="ctr">
-              <a:lnSpc>
-                <a:spcPct val="100000"/>
-              </a:lnSpc>
-            </a:pPr>
-            <a:r>
-              <a:rPr sz="1600" b="1" i="0">
-                <a:solidFill>
-                  <a:srgbClr val="FFFFFF"/>
-                </a:solidFill>
-              </a:rPr>
-              <a:t>1</a:t>
-            </a:r>
-          </a:p>
-        </p:txBody>
-      </p:sp>
-      <p:sp>
-        <p:nvSpPr>
-          <p:cNvPr id="7" name="TextBox 6"/>
+          <p:cNvPr id="7" name="번호 1"/>
           <p:cNvSpPr txBox="1"/>
           <p:nvPr/>
         </p:nvSpPr>
         <p:spPr>
           <a:xfrm>
-            <a:off x="777240" y="2377440"/>
-            <a:ext cx="3210458" cy="640080"/>
+            <a:off x="731519" y="1920240"/>
+            <a:ext cx="914400" cy="548640"/>
           </a:xfrm>
           <a:prstGeom prst="rect">
             <a:avLst/>
@@ -8505,9 +8717,47 @@
               </a:lnSpc>
             </a:pPr>
             <a:r>
+              <a:rPr sz="2400" b="1" i="0">
+                <a:solidFill>
+                  <a:srgbClr val="ED97BB"/>
+                </a:solidFill>
+              </a:rPr>
+              <a:t>01</a:t>
+            </a:r>
+          </a:p>
+        </p:txBody>
+      </p:sp>
+      <p:sp>
+        <p:nvSpPr>
+          <p:cNvPr id="8" name="TextBox 7"/>
+          <p:cNvSpPr txBox="1"/>
+          <p:nvPr/>
+        </p:nvSpPr>
+        <p:spPr>
+          <a:xfrm>
+            <a:off x="777240" y="2560320"/>
+            <a:ext cx="3210458" cy="640080"/>
+          </a:xfrm>
+          <a:prstGeom prst="rect">
+            <a:avLst/>
+          </a:prstGeom>
+          <a:noFill/>
+        </p:spPr>
+        <p:txBody>
+          <a:bodyPr wrap="square" lIns="54864" rIns="54864" tIns="27432" bIns="27432" anchor="ctr">
+            <a:noAutofit/>
+          </a:bodyPr>
+          <a:lstStyle/>
+          <a:p>
+            <a:pPr algn="l">
+              <a:lnSpc>
+                <a:spcPct val="115000"/>
+              </a:lnSpc>
+            </a:pPr>
+            <a:r>
               <a:rPr sz="1800" b="1" i="0">
                 <a:solidFill>
-                  <a:srgbClr val="6F1F41"/>
+                  <a:srgbClr val="492735"/>
                 </a:solidFill>
               </a:rPr>
               <a:t>확인할 것</a:t>
@@ -8517,14 +8767,14 @@
       </p:sp>
       <p:sp>
         <p:nvSpPr>
-          <p:cNvPr id="8" name="TextBox 7"/>
+          <p:cNvPr id="9" name="TextBox 8"/>
           <p:cNvSpPr txBox="1"/>
           <p:nvPr/>
         </p:nvSpPr>
         <p:spPr>
           <a:xfrm>
-            <a:off x="777240" y="3063240"/>
-            <a:ext cx="3210458" cy="2560320"/>
+            <a:off x="777240" y="3246120"/>
+            <a:ext cx="3210458" cy="2331720"/>
           </a:xfrm>
           <a:prstGeom prst="rect">
             <a:avLst/>
@@ -8545,7 +8795,7 @@
             <a:r>
               <a:rPr sz="1500" b="0" i="0">
                 <a:solidFill>
-                  <a:srgbClr val="2B2B2B"/>
+                  <a:srgbClr val="26231F"/>
                 </a:solidFill>
               </a:rPr>
               <a:t>내용을 입력하세요</a:t>
@@ -8555,26 +8805,26 @@
       </p:sp>
       <p:sp>
         <p:nvSpPr>
-          <p:cNvPr id="9" name="카드 2"/>
+          <p:cNvPr id="10" name="카드 2"/>
           <p:cNvSpPr/>
           <p:nvPr/>
         </p:nvSpPr>
         <p:spPr>
           <a:xfrm>
-            <a:off x="4353458" y="1600200"/>
-            <a:ext cx="3484778" cy="4160520"/>
+            <a:off x="4353458" y="1783080"/>
+            <a:ext cx="3484778" cy="3931920"/>
           </a:xfrm>
           <a:prstGeom prst="roundRect">
             <a:avLst>
-              <a:gd name="adj" fmla="val 8000"/>
+              <a:gd name="adj" fmla="val 7000"/>
             </a:avLst>
           </a:prstGeom>
           <a:solidFill>
-            <a:srgbClr val="FCF3F7"/>
+            <a:srgbClr val="FFFFFF"/>
           </a:solidFill>
-          <a:ln w="15875">
+          <a:ln w="12700">
             <a:solidFill>
-              <a:srgbClr val="F7D4E3"/>
+              <a:srgbClr val="F2A6C6"/>
             </a:solidFill>
           </a:ln>
         </p:spPr>
@@ -8588,57 +8838,14 @@
       </p:sp>
       <p:sp>
         <p:nvSpPr>
-          <p:cNvPr id="10" name="번호 2"/>
-          <p:cNvSpPr/>
-          <p:nvPr/>
-        </p:nvSpPr>
-        <p:spPr>
-          <a:xfrm>
-            <a:off x="4536338" y="1783080"/>
-            <a:ext cx="457200" cy="457200"/>
-          </a:xfrm>
-          <a:prstGeom prst="ellipse">
-            <a:avLst/>
-          </a:prstGeom>
-          <a:solidFill>
-            <a:srgbClr val="CD4C82"/>
-          </a:solidFill>
-          <a:ln>
-            <a:noFill/>
-          </a:ln>
-        </p:spPr>
-        <p:txBody>
-          <a:bodyPr rtlCol="0" anchor="ctr" wrap="square" lIns="54864" rIns="54864" tIns="27432" bIns="27432">
-            <a:noAutofit/>
-          </a:bodyPr>
-          <a:lstStyle/>
-          <a:p>
-            <a:pPr algn="ctr">
-              <a:lnSpc>
-                <a:spcPct val="100000"/>
-              </a:lnSpc>
-            </a:pPr>
-            <a:r>
-              <a:rPr sz="1600" b="1" i="0">
-                <a:solidFill>
-                  <a:srgbClr val="FFFFFF"/>
-                </a:solidFill>
-              </a:rPr>
-              <a:t>2</a:t>
-            </a:r>
-          </a:p>
-        </p:txBody>
-      </p:sp>
-      <p:sp>
-        <p:nvSpPr>
-          <p:cNvPr id="11" name="TextBox 10"/>
+          <p:cNvPr id="11" name="번호 2"/>
           <p:cNvSpPr txBox="1"/>
           <p:nvPr/>
         </p:nvSpPr>
         <p:spPr>
           <a:xfrm>
-            <a:off x="4490618" y="2377440"/>
-            <a:ext cx="3210458" cy="640080"/>
+            <a:off x="4444898" y="1920240"/>
+            <a:ext cx="914400" cy="548640"/>
           </a:xfrm>
           <a:prstGeom prst="rect">
             <a:avLst/>
@@ -8657,9 +8864,47 @@
               </a:lnSpc>
             </a:pPr>
             <a:r>
+              <a:rPr sz="2400" b="1" i="0">
+                <a:solidFill>
+                  <a:srgbClr val="ED97BB"/>
+                </a:solidFill>
+              </a:rPr>
+              <a:t>02</a:t>
+            </a:r>
+          </a:p>
+        </p:txBody>
+      </p:sp>
+      <p:sp>
+        <p:nvSpPr>
+          <p:cNvPr id="12" name="TextBox 11"/>
+          <p:cNvSpPr txBox="1"/>
+          <p:nvPr/>
+        </p:nvSpPr>
+        <p:spPr>
+          <a:xfrm>
+            <a:off x="4490618" y="2560320"/>
+            <a:ext cx="3210458" cy="640080"/>
+          </a:xfrm>
+          <a:prstGeom prst="rect">
+            <a:avLst/>
+          </a:prstGeom>
+          <a:noFill/>
+        </p:spPr>
+        <p:txBody>
+          <a:bodyPr wrap="square" lIns="54864" rIns="54864" tIns="27432" bIns="27432" anchor="ctr">
+            <a:noAutofit/>
+          </a:bodyPr>
+          <a:lstStyle/>
+          <a:p>
+            <a:pPr algn="l">
+              <a:lnSpc>
+                <a:spcPct val="115000"/>
+              </a:lnSpc>
+            </a:pPr>
+            <a:r>
               <a:rPr sz="1800" b="1" i="0">
                 <a:solidFill>
-                  <a:srgbClr val="6F1F41"/>
+                  <a:srgbClr val="492735"/>
                 </a:solidFill>
               </a:rPr>
               <a:t>문의할 것</a:t>
@@ -8669,14 +8914,14 @@
       </p:sp>
       <p:sp>
         <p:nvSpPr>
-          <p:cNvPr id="12" name="TextBox 11"/>
+          <p:cNvPr id="13" name="TextBox 12"/>
           <p:cNvSpPr txBox="1"/>
           <p:nvPr/>
         </p:nvSpPr>
         <p:spPr>
           <a:xfrm>
-            <a:off x="4490618" y="3063240"/>
-            <a:ext cx="3210458" cy="2560320"/>
+            <a:off x="4490618" y="3246120"/>
+            <a:ext cx="3210458" cy="2331720"/>
           </a:xfrm>
           <a:prstGeom prst="rect">
             <a:avLst/>
@@ -8697,7 +8942,7 @@
             <a:r>
               <a:rPr sz="1500" b="0" i="0">
                 <a:solidFill>
-                  <a:srgbClr val="2B2B2B"/>
+                  <a:srgbClr val="26231F"/>
                 </a:solidFill>
               </a:rPr>
               <a:t>내용을 입력하세요</a:t>
@@ -8707,26 +8952,26 @@
       </p:sp>
       <p:sp>
         <p:nvSpPr>
-          <p:cNvPr id="13" name="카드 3"/>
+          <p:cNvPr id="14" name="카드 3"/>
           <p:cNvSpPr/>
           <p:nvPr/>
         </p:nvSpPr>
         <p:spPr>
           <a:xfrm>
-            <a:off x="8066836" y="1600200"/>
-            <a:ext cx="3484778" cy="4160520"/>
+            <a:off x="8066836" y="1783080"/>
+            <a:ext cx="3484778" cy="3931920"/>
           </a:xfrm>
           <a:prstGeom prst="roundRect">
             <a:avLst>
-              <a:gd name="adj" fmla="val 8000"/>
+              <a:gd name="adj" fmla="val 7000"/>
             </a:avLst>
           </a:prstGeom>
           <a:solidFill>
-            <a:srgbClr val="FCF3F7"/>
+            <a:srgbClr val="FFFFFF"/>
           </a:solidFill>
-          <a:ln w="15875">
+          <a:ln w="12700">
             <a:solidFill>
-              <a:srgbClr val="F7D4E3"/>
+              <a:srgbClr val="F2A6C6"/>
             </a:solidFill>
           </a:ln>
         </p:spPr>
@@ -8740,57 +8985,14 @@
       </p:sp>
       <p:sp>
         <p:nvSpPr>
-          <p:cNvPr id="14" name="번호 3"/>
-          <p:cNvSpPr/>
-          <p:nvPr/>
-        </p:nvSpPr>
-        <p:spPr>
-          <a:xfrm>
-            <a:off x="8249716" y="1783080"/>
-            <a:ext cx="457200" cy="457200"/>
-          </a:xfrm>
-          <a:prstGeom prst="ellipse">
-            <a:avLst/>
-          </a:prstGeom>
-          <a:solidFill>
-            <a:srgbClr val="CD4C82"/>
-          </a:solidFill>
-          <a:ln>
-            <a:noFill/>
-          </a:ln>
-        </p:spPr>
-        <p:txBody>
-          <a:bodyPr rtlCol="0" anchor="ctr" wrap="square" lIns="54864" rIns="54864" tIns="27432" bIns="27432">
-            <a:noAutofit/>
-          </a:bodyPr>
-          <a:lstStyle/>
-          <a:p>
-            <a:pPr algn="ctr">
-              <a:lnSpc>
-                <a:spcPct val="100000"/>
-              </a:lnSpc>
-            </a:pPr>
-            <a:r>
-              <a:rPr sz="1600" b="1" i="0">
-                <a:solidFill>
-                  <a:srgbClr val="FFFFFF"/>
-                </a:solidFill>
-              </a:rPr>
-              <a:t>3</a:t>
-            </a:r>
-          </a:p>
-        </p:txBody>
-      </p:sp>
-      <p:sp>
-        <p:nvSpPr>
-          <p:cNvPr id="15" name="TextBox 14"/>
+          <p:cNvPr id="15" name="번호 3"/>
           <p:cNvSpPr txBox="1"/>
           <p:nvPr/>
         </p:nvSpPr>
         <p:spPr>
           <a:xfrm>
-            <a:off x="8203996" y="2377440"/>
-            <a:ext cx="3210458" cy="640080"/>
+            <a:off x="8158276" y="1920240"/>
+            <a:ext cx="914400" cy="548640"/>
           </a:xfrm>
           <a:prstGeom prst="rect">
             <a:avLst/>
@@ -8809,9 +9011,47 @@
               </a:lnSpc>
             </a:pPr>
             <a:r>
+              <a:rPr sz="2400" b="1" i="0">
+                <a:solidFill>
+                  <a:srgbClr val="ED97BB"/>
+                </a:solidFill>
+              </a:rPr>
+              <a:t>03</a:t>
+            </a:r>
+          </a:p>
+        </p:txBody>
+      </p:sp>
+      <p:sp>
+        <p:nvSpPr>
+          <p:cNvPr id="16" name="TextBox 15"/>
+          <p:cNvSpPr txBox="1"/>
+          <p:nvPr/>
+        </p:nvSpPr>
+        <p:spPr>
+          <a:xfrm>
+            <a:off x="8203996" y="2560320"/>
+            <a:ext cx="3210458" cy="640080"/>
+          </a:xfrm>
+          <a:prstGeom prst="rect">
+            <a:avLst/>
+          </a:prstGeom>
+          <a:noFill/>
+        </p:spPr>
+        <p:txBody>
+          <a:bodyPr wrap="square" lIns="54864" rIns="54864" tIns="27432" bIns="27432" anchor="ctr">
+            <a:noAutofit/>
+          </a:bodyPr>
+          <a:lstStyle/>
+          <a:p>
+            <a:pPr algn="l">
+              <a:lnSpc>
+                <a:spcPct val="115000"/>
+              </a:lnSpc>
+            </a:pPr>
+            <a:r>
               <a:rPr sz="1800" b="1" i="0">
                 <a:solidFill>
-                  <a:srgbClr val="6F1F41"/>
+                  <a:srgbClr val="492735"/>
                 </a:solidFill>
               </a:rPr>
               <a:t>정리할 날짜</a:t>
@@ -8821,14 +9061,14 @@
       </p:sp>
       <p:sp>
         <p:nvSpPr>
-          <p:cNvPr id="16" name="TextBox 15"/>
+          <p:cNvPr id="17" name="TextBox 16"/>
           <p:cNvSpPr txBox="1"/>
           <p:nvPr/>
         </p:nvSpPr>
         <p:spPr>
           <a:xfrm>
-            <a:off x="8203996" y="3063240"/>
-            <a:ext cx="3210458" cy="2560320"/>
+            <a:off x="8203996" y="3246120"/>
+            <a:ext cx="3210458" cy="2331720"/>
           </a:xfrm>
           <a:prstGeom prst="rect">
             <a:avLst/>
@@ -8849,7 +9089,7 @@
             <a:r>
               <a:rPr sz="1500" b="0" i="0">
                 <a:solidFill>
-                  <a:srgbClr val="2B2B2B"/>
+                  <a:srgbClr val="26231F"/>
                 </a:solidFill>
               </a:rPr>
               <a:t>내용을 입력하세요</a:t>
@@ -8859,13 +9099,13 @@
       </p:sp>
       <p:sp>
         <p:nvSpPr>
-          <p:cNvPr id="17" name="안내 문구"/>
+          <p:cNvPr id="18" name="안내 문구"/>
           <p:cNvSpPr txBox="1"/>
           <p:nvPr/>
         </p:nvSpPr>
         <p:spPr>
           <a:xfrm>
-            <a:off x="640080" y="5852160"/>
+            <a:off x="640080" y="5806440"/>
             <a:ext cx="10911535" cy="548640"/>
           </a:xfrm>
           <a:prstGeom prst="rect">
@@ -8914,34 +9154,34 @@
         <a:sysClr val="window" lastClr="FFFFFF"/>
       </a:lt1>
       <a:dk2>
-        <a:srgbClr val="6F1F41"/>
+        <a:srgbClr val="492735"/>
       </a:dk2>
       <a:lt2>
-        <a:srgbClr val="FCF3F7"/>
+        <a:srgbClr val="FDEAF2"/>
       </a:lt2>
       <a:accent1>
-        <a:srgbClr val="CD4C82"/>
+        <a:srgbClr val="ED97BB"/>
       </a:accent1>
       <a:accent2>
-        <a:srgbClr val="339941"/>
+        <a:srgbClr val="F3BCBA"/>
       </a:accent2>
       <a:accent3>
-        <a:srgbClr val="6F1F41"/>
+        <a:srgbClr val="492735"/>
       </a:accent3>
       <a:accent4>
-        <a:srgbClr val="F7D4E3"/>
+        <a:srgbClr val="FAD1E2"/>
       </a:accent4>
       <a:accent5>
-        <a:srgbClr val="807262"/>
+        <a:srgbClr val="F0AABA"/>
       </a:accent5>
       <a:accent6>
-        <a:srgbClr val="A9798D"/>
+        <a:srgbClr val="927D86"/>
       </a:accent6>
       <a:hlink>
-        <a:srgbClr val="CD4C82"/>
+        <a:srgbClr val="ED97BB"/>
       </a:hlink>
       <a:folHlink>
-        <a:srgbClr val="6F1F41"/>
+        <a:srgbClr val="492735"/>
       </a:folHlink>
     </a:clrScheme>
     <a:fontScheme name="Office">
